--- a/Clase 05 Intro Métodos Supervisados/C6_Clasificacion Bayes_Logit_kNN_ROC.pptx
+++ b/Clase 05 Intro Métodos Supervisados/C6_Clasificacion Bayes_Logit_kNN_ROC.pptx
@@ -5,7 +5,7 @@
     <p:sldMasterId id="2147483648" r:id="rId1"/>
   </p:sldMasterIdLst>
   <p:notesMasterIdLst>
-    <p:notesMasterId r:id="rId54"/>
+    <p:notesMasterId r:id="rId55"/>
   </p:notesMasterIdLst>
   <p:sldIdLst>
     <p:sldId id="493" r:id="rId2"/>
@@ -34,32 +34,33 @@
     <p:sldId id="487" r:id="rId25"/>
     <p:sldId id="314" r:id="rId26"/>
     <p:sldId id="325" r:id="rId27"/>
-    <p:sldId id="305" r:id="rId28"/>
-    <p:sldId id="261" r:id="rId29"/>
-    <p:sldId id="417" r:id="rId30"/>
-    <p:sldId id="408" r:id="rId31"/>
-    <p:sldId id="284" r:id="rId32"/>
-    <p:sldId id="319" r:id="rId33"/>
-    <p:sldId id="324" r:id="rId34"/>
-    <p:sldId id="492" r:id="rId35"/>
-    <p:sldId id="306" r:id="rId36"/>
-    <p:sldId id="488" r:id="rId37"/>
-    <p:sldId id="445" r:id="rId38"/>
-    <p:sldId id="422" r:id="rId39"/>
-    <p:sldId id="302" r:id="rId40"/>
-    <p:sldId id="308" r:id="rId41"/>
-    <p:sldId id="489" r:id="rId42"/>
-    <p:sldId id="309" r:id="rId43"/>
-    <p:sldId id="420" r:id="rId44"/>
-    <p:sldId id="311" r:id="rId45"/>
-    <p:sldId id="312" r:id="rId46"/>
-    <p:sldId id="313" r:id="rId47"/>
-    <p:sldId id="490" r:id="rId48"/>
-    <p:sldId id="336" r:id="rId49"/>
-    <p:sldId id="337" r:id="rId50"/>
-    <p:sldId id="300" r:id="rId51"/>
-    <p:sldId id="491" r:id="rId52"/>
-    <p:sldId id="407" r:id="rId53"/>
+    <p:sldId id="521" r:id="rId28"/>
+    <p:sldId id="305" r:id="rId29"/>
+    <p:sldId id="261" r:id="rId30"/>
+    <p:sldId id="417" r:id="rId31"/>
+    <p:sldId id="408" r:id="rId32"/>
+    <p:sldId id="284" r:id="rId33"/>
+    <p:sldId id="319" r:id="rId34"/>
+    <p:sldId id="324" r:id="rId35"/>
+    <p:sldId id="492" r:id="rId36"/>
+    <p:sldId id="306" r:id="rId37"/>
+    <p:sldId id="488" r:id="rId38"/>
+    <p:sldId id="445" r:id="rId39"/>
+    <p:sldId id="422" r:id="rId40"/>
+    <p:sldId id="302" r:id="rId41"/>
+    <p:sldId id="308" r:id="rId42"/>
+    <p:sldId id="489" r:id="rId43"/>
+    <p:sldId id="309" r:id="rId44"/>
+    <p:sldId id="420" r:id="rId45"/>
+    <p:sldId id="311" r:id="rId46"/>
+    <p:sldId id="312" r:id="rId47"/>
+    <p:sldId id="313" r:id="rId48"/>
+    <p:sldId id="490" r:id="rId49"/>
+    <p:sldId id="336" r:id="rId50"/>
+    <p:sldId id="337" r:id="rId51"/>
+    <p:sldId id="300" r:id="rId52"/>
+    <p:sldId id="491" r:id="rId53"/>
+    <p:sldId id="407" r:id="rId54"/>
   </p:sldIdLst>
   <p:sldSz cx="12192000" cy="6858000"/>
   <p:notesSz cx="6858000" cy="9144000"/>
@@ -209,6 +210,7 @@
           <p14:sldIdLst>
             <p14:sldId id="314"/>
             <p14:sldId id="325"/>
+            <p14:sldId id="521"/>
           </p14:sldIdLst>
         </p14:section>
         <p14:section name="Vecinos ceranos" id="{5623DDE8-0602-0D4F-AFA1-3B05F3F0BCCE}">
@@ -348,7 +350,7 @@
           <a:p>
             <a:fld id="{87047155-560D-CC43-A75F-B08C641787EA}" type="datetimeFigureOut">
               <a:rPr lang="en-US" smtClean="0"/>
-              <a:t>9/26/25</a:t>
+              <a:t>9/30/25</a:t>
             </a:fld>
             <a:endParaRPr lang="en-US"/>
           </a:p>
@@ -764,7 +766,91 @@
           <a:p>
             <a:fld id="{7E630DE0-2491-4445-BD47-B1B1930FC5EF}" type="slidenum">
               <a:rPr lang="en-US" smtClean="0"/>
-              <a:t>31</a:t>
+              <a:t>30</a:t>
+            </a:fld>
+            <a:endParaRPr lang="en-US"/>
+          </a:p>
+        </p:txBody>
+      </p:sp>
+    </p:spTree>
+    <p:extLst>
+      <p:ext uri="{BB962C8B-B14F-4D97-AF65-F5344CB8AC3E}">
+        <p14:creationId xmlns:p14="http://schemas.microsoft.com/office/powerpoint/2010/main" val="3956216826"/>
+      </p:ext>
+    </p:extLst>
+  </p:cSld>
+  <p:clrMapOvr>
+    <a:masterClrMapping/>
+  </p:clrMapOvr>
+</p:notes>
+</file>
+
+<file path=ppt/notesSlides/notesSlide11.xml><?xml version="1.0" encoding="utf-8"?>
+<p:notes xmlns:a="http://schemas.openxmlformats.org/drawingml/2006/main" xmlns:r="http://schemas.openxmlformats.org/officeDocument/2006/relationships" xmlns:p="http://schemas.openxmlformats.org/presentationml/2006/main">
+  <p:cSld>
+    <p:spTree>
+      <p:nvGrpSpPr>
+        <p:cNvPr id="1" name=""/>
+        <p:cNvGrpSpPr/>
+        <p:nvPr/>
+      </p:nvGrpSpPr>
+      <p:grpSpPr>
+        <a:xfrm>
+          <a:off x="0" y="0"/>
+          <a:ext cx="0" cy="0"/>
+          <a:chOff x="0" y="0"/>
+          <a:chExt cx="0" cy="0"/>
+        </a:xfrm>
+      </p:grpSpPr>
+      <p:sp>
+        <p:nvSpPr>
+          <p:cNvPr id="2" name="Slide Image Placeholder 1"/>
+          <p:cNvSpPr>
+            <a:spLocks noGrp="1" noRot="1" noChangeAspect="1"/>
+          </p:cNvSpPr>
+          <p:nvPr>
+            <p:ph type="sldImg"/>
+          </p:nvPr>
+        </p:nvSpPr>
+        <p:spPr/>
+      </p:sp>
+      <p:sp>
+        <p:nvSpPr>
+          <p:cNvPr id="3" name="Notes Placeholder 2"/>
+          <p:cNvSpPr>
+            <a:spLocks noGrp="1"/>
+          </p:cNvSpPr>
+          <p:nvPr>
+            <p:ph type="body" idx="1"/>
+          </p:nvPr>
+        </p:nvSpPr>
+        <p:spPr/>
+        <p:txBody>
+          <a:bodyPr/>
+          <a:lstStyle/>
+          <a:p>
+            <a:endParaRPr lang="es-ES_tradnl" dirty="0"/>
+          </a:p>
+        </p:txBody>
+      </p:sp>
+      <p:sp>
+        <p:nvSpPr>
+          <p:cNvPr id="4" name="Slide Number Placeholder 3"/>
+          <p:cNvSpPr>
+            <a:spLocks noGrp="1"/>
+          </p:cNvSpPr>
+          <p:nvPr>
+            <p:ph type="sldNum" sz="quarter" idx="5"/>
+          </p:nvPr>
+        </p:nvSpPr>
+        <p:spPr/>
+        <p:txBody>
+          <a:bodyPr/>
+          <a:lstStyle/>
+          <a:p>
+            <a:fld id="{7E630DE0-2491-4445-BD47-B1B1930FC5EF}" type="slidenum">
+              <a:rPr lang="en-US" smtClean="0"/>
+              <a:t>32</a:t>
             </a:fld>
             <a:endParaRPr lang="en-US"/>
           </a:p>
@@ -783,7 +869,7 @@
 </p:notes>
 </file>
 
-<file path=ppt/notesSlides/notesSlide11.xml><?xml version="1.0" encoding="utf-8"?>
+<file path=ppt/notesSlides/notesSlide12.xml><?xml version="1.0" encoding="utf-8"?>
 <p:notes xmlns:a="http://schemas.openxmlformats.org/drawingml/2006/main" xmlns:r="http://schemas.openxmlformats.org/officeDocument/2006/relationships" xmlns:p="http://schemas.openxmlformats.org/presentationml/2006/main">
   <p:cSld>
     <p:spTree>
@@ -882,7 +968,7 @@
           <a:p>
             <a:fld id="{7E630DE0-2491-4445-BD47-B1B1930FC5EF}" type="slidenum">
               <a:rPr lang="en-US" smtClean="0"/>
-              <a:t>33</a:t>
+              <a:t>34</a:t>
             </a:fld>
             <a:endParaRPr lang="en-US"/>
           </a:p>
@@ -892,90 +978,6 @@
     <p:extLst>
       <p:ext uri="{BB962C8B-B14F-4D97-AF65-F5344CB8AC3E}">
         <p14:creationId xmlns:p14="http://schemas.microsoft.com/office/powerpoint/2010/main" val="2495762410"/>
-      </p:ext>
-    </p:extLst>
-  </p:cSld>
-  <p:clrMapOvr>
-    <a:masterClrMapping/>
-  </p:clrMapOvr>
-</p:notes>
-</file>
-
-<file path=ppt/notesSlides/notesSlide12.xml><?xml version="1.0" encoding="utf-8"?>
-<p:notes xmlns:a="http://schemas.openxmlformats.org/drawingml/2006/main" xmlns:r="http://schemas.openxmlformats.org/officeDocument/2006/relationships" xmlns:p="http://schemas.openxmlformats.org/presentationml/2006/main">
-  <p:cSld>
-    <p:spTree>
-      <p:nvGrpSpPr>
-        <p:cNvPr id="1" name=""/>
-        <p:cNvGrpSpPr/>
-        <p:nvPr/>
-      </p:nvGrpSpPr>
-      <p:grpSpPr>
-        <a:xfrm>
-          <a:off x="0" y="0"/>
-          <a:ext cx="0" cy="0"/>
-          <a:chOff x="0" y="0"/>
-          <a:chExt cx="0" cy="0"/>
-        </a:xfrm>
-      </p:grpSpPr>
-      <p:sp>
-        <p:nvSpPr>
-          <p:cNvPr id="2" name="Slide Image Placeholder 1"/>
-          <p:cNvSpPr>
-            <a:spLocks noGrp="1" noRot="1" noChangeAspect="1"/>
-          </p:cNvSpPr>
-          <p:nvPr>
-            <p:ph type="sldImg"/>
-          </p:nvPr>
-        </p:nvSpPr>
-        <p:spPr/>
-      </p:sp>
-      <p:sp>
-        <p:nvSpPr>
-          <p:cNvPr id="3" name="Notes Placeholder 2"/>
-          <p:cNvSpPr>
-            <a:spLocks noGrp="1"/>
-          </p:cNvSpPr>
-          <p:nvPr>
-            <p:ph type="body" idx="1"/>
-          </p:nvPr>
-        </p:nvSpPr>
-        <p:spPr/>
-        <p:txBody>
-          <a:bodyPr/>
-          <a:lstStyle/>
-          <a:p>
-            <a:endParaRPr lang="es-ES_tradnl" dirty="0"/>
-          </a:p>
-        </p:txBody>
-      </p:sp>
-      <p:sp>
-        <p:nvSpPr>
-          <p:cNvPr id="4" name="Slide Number Placeholder 3"/>
-          <p:cNvSpPr>
-            <a:spLocks noGrp="1"/>
-          </p:cNvSpPr>
-          <p:nvPr>
-            <p:ph type="sldNum" sz="quarter" idx="5"/>
-          </p:nvPr>
-        </p:nvSpPr>
-        <p:spPr/>
-        <p:txBody>
-          <a:bodyPr/>
-          <a:lstStyle/>
-          <a:p>
-            <a:fld id="{A7ED07FA-7792-F649-B523-FCAF9068A01B}" type="slidenum">
-              <a:rPr lang="es-ES_tradnl" smtClean="0"/>
-              <a:t>34</a:t>
-            </a:fld>
-            <a:endParaRPr lang="es-ES_tradnl"/>
-          </a:p>
-        </p:txBody>
-      </p:sp>
-    </p:spTree>
-    <p:extLst>
-      <p:ext uri="{BB962C8B-B14F-4D97-AF65-F5344CB8AC3E}">
-        <p14:creationId xmlns:p14="http://schemas.microsoft.com/office/powerpoint/2010/main" val="3350313072"/>
       </p:ext>
     </p:extLst>
   </p:cSld>
@@ -1050,7 +1052,91 @@
           <a:p>
             <a:fld id="{A7ED07FA-7792-F649-B523-FCAF9068A01B}" type="slidenum">
               <a:rPr lang="es-ES_tradnl" smtClean="0"/>
-              <a:t>36</a:t>
+              <a:t>35</a:t>
+            </a:fld>
+            <a:endParaRPr lang="es-ES_tradnl"/>
+          </a:p>
+        </p:txBody>
+      </p:sp>
+    </p:spTree>
+    <p:extLst>
+      <p:ext uri="{BB962C8B-B14F-4D97-AF65-F5344CB8AC3E}">
+        <p14:creationId xmlns:p14="http://schemas.microsoft.com/office/powerpoint/2010/main" val="3350313072"/>
+      </p:ext>
+    </p:extLst>
+  </p:cSld>
+  <p:clrMapOvr>
+    <a:masterClrMapping/>
+  </p:clrMapOvr>
+</p:notes>
+</file>
+
+<file path=ppt/notesSlides/notesSlide14.xml><?xml version="1.0" encoding="utf-8"?>
+<p:notes xmlns:a="http://schemas.openxmlformats.org/drawingml/2006/main" xmlns:r="http://schemas.openxmlformats.org/officeDocument/2006/relationships" xmlns:p="http://schemas.openxmlformats.org/presentationml/2006/main">
+  <p:cSld>
+    <p:spTree>
+      <p:nvGrpSpPr>
+        <p:cNvPr id="1" name=""/>
+        <p:cNvGrpSpPr/>
+        <p:nvPr/>
+      </p:nvGrpSpPr>
+      <p:grpSpPr>
+        <a:xfrm>
+          <a:off x="0" y="0"/>
+          <a:ext cx="0" cy="0"/>
+          <a:chOff x="0" y="0"/>
+          <a:chExt cx="0" cy="0"/>
+        </a:xfrm>
+      </p:grpSpPr>
+      <p:sp>
+        <p:nvSpPr>
+          <p:cNvPr id="2" name="Slide Image Placeholder 1"/>
+          <p:cNvSpPr>
+            <a:spLocks noGrp="1" noRot="1" noChangeAspect="1"/>
+          </p:cNvSpPr>
+          <p:nvPr>
+            <p:ph type="sldImg"/>
+          </p:nvPr>
+        </p:nvSpPr>
+        <p:spPr/>
+      </p:sp>
+      <p:sp>
+        <p:nvSpPr>
+          <p:cNvPr id="3" name="Notes Placeholder 2"/>
+          <p:cNvSpPr>
+            <a:spLocks noGrp="1"/>
+          </p:cNvSpPr>
+          <p:nvPr>
+            <p:ph type="body" idx="1"/>
+          </p:nvPr>
+        </p:nvSpPr>
+        <p:spPr/>
+        <p:txBody>
+          <a:bodyPr/>
+          <a:lstStyle/>
+          <a:p>
+            <a:endParaRPr lang="es-ES_tradnl" dirty="0"/>
+          </a:p>
+        </p:txBody>
+      </p:sp>
+      <p:sp>
+        <p:nvSpPr>
+          <p:cNvPr id="4" name="Slide Number Placeholder 3"/>
+          <p:cNvSpPr>
+            <a:spLocks noGrp="1"/>
+          </p:cNvSpPr>
+          <p:nvPr>
+            <p:ph type="sldNum" sz="quarter" idx="5"/>
+          </p:nvPr>
+        </p:nvSpPr>
+        <p:spPr/>
+        <p:txBody>
+          <a:bodyPr/>
+          <a:lstStyle/>
+          <a:p>
+            <a:fld id="{A7ED07FA-7792-F649-B523-FCAF9068A01B}" type="slidenum">
+              <a:rPr lang="es-ES_tradnl" smtClean="0"/>
+              <a:t>37</a:t>
             </a:fld>
             <a:endParaRPr lang="es-ES_tradnl"/>
           </a:p>
@@ -1069,7 +1155,7 @@
 </p:notes>
 </file>
 
-<file path=ppt/notesSlides/notesSlide14.xml><?xml version="1.0" encoding="utf-8"?>
+<file path=ppt/notesSlides/notesSlide15.xml><?xml version="1.0" encoding="utf-8"?>
 <p:notes xmlns:a="http://schemas.openxmlformats.org/drawingml/2006/main" xmlns:r="http://schemas.openxmlformats.org/officeDocument/2006/relationships" xmlns:p="http://schemas.openxmlformats.org/presentationml/2006/main">
   <p:cSld>
     <p:spTree>
@@ -1158,7 +1244,7 @@
           <a:p>
             <a:fld id="{A7ED07FA-7792-F649-B523-FCAF9068A01B}" type="slidenum">
               <a:rPr lang="es-ES_tradnl" smtClean="0"/>
-              <a:t>37</a:t>
+              <a:t>38</a:t>
             </a:fld>
             <a:endParaRPr lang="es-ES_tradnl"/>
           </a:p>
@@ -1177,7 +1263,7 @@
 </p:notes>
 </file>
 
-<file path=ppt/notesSlides/notesSlide15.xml><?xml version="1.0" encoding="utf-8"?>
+<file path=ppt/notesSlides/notesSlide16.xml><?xml version="1.0" encoding="utf-8"?>
 <p:notes xmlns:a="http://schemas.openxmlformats.org/drawingml/2006/main" xmlns:r="http://schemas.openxmlformats.org/officeDocument/2006/relationships" xmlns:p="http://schemas.openxmlformats.org/presentationml/2006/main">
   <p:cSld>
     <p:spTree>
@@ -1266,7 +1352,7 @@
           <a:p>
             <a:fld id="{A7ED07FA-7792-F649-B523-FCAF9068A01B}" type="slidenum">
               <a:rPr lang="es-ES_tradnl" smtClean="0"/>
-              <a:t>38</a:t>
+              <a:t>39</a:t>
             </a:fld>
             <a:endParaRPr lang="es-ES_tradnl"/>
           </a:p>
@@ -1276,90 +1362,6 @@
     <p:extLst>
       <p:ext uri="{BB962C8B-B14F-4D97-AF65-F5344CB8AC3E}">
         <p14:creationId xmlns:p14="http://schemas.microsoft.com/office/powerpoint/2010/main" val="1223500000"/>
-      </p:ext>
-    </p:extLst>
-  </p:cSld>
-  <p:clrMapOvr>
-    <a:masterClrMapping/>
-  </p:clrMapOvr>
-</p:notes>
-</file>
-
-<file path=ppt/notesSlides/notesSlide16.xml><?xml version="1.0" encoding="utf-8"?>
-<p:notes xmlns:a="http://schemas.openxmlformats.org/drawingml/2006/main" xmlns:r="http://schemas.openxmlformats.org/officeDocument/2006/relationships" xmlns:p="http://schemas.openxmlformats.org/presentationml/2006/main">
-  <p:cSld>
-    <p:spTree>
-      <p:nvGrpSpPr>
-        <p:cNvPr id="1" name=""/>
-        <p:cNvGrpSpPr/>
-        <p:nvPr/>
-      </p:nvGrpSpPr>
-      <p:grpSpPr>
-        <a:xfrm>
-          <a:off x="0" y="0"/>
-          <a:ext cx="0" cy="0"/>
-          <a:chOff x="0" y="0"/>
-          <a:chExt cx="0" cy="0"/>
-        </a:xfrm>
-      </p:grpSpPr>
-      <p:sp>
-        <p:nvSpPr>
-          <p:cNvPr id="2" name="Slide Image Placeholder 1"/>
-          <p:cNvSpPr>
-            <a:spLocks noGrp="1" noRot="1" noChangeAspect="1"/>
-          </p:cNvSpPr>
-          <p:nvPr>
-            <p:ph type="sldImg"/>
-          </p:nvPr>
-        </p:nvSpPr>
-        <p:spPr/>
-      </p:sp>
-      <p:sp>
-        <p:nvSpPr>
-          <p:cNvPr id="3" name="Notes Placeholder 2"/>
-          <p:cNvSpPr>
-            <a:spLocks noGrp="1"/>
-          </p:cNvSpPr>
-          <p:nvPr>
-            <p:ph type="body" idx="1"/>
-          </p:nvPr>
-        </p:nvSpPr>
-        <p:spPr/>
-        <p:txBody>
-          <a:bodyPr/>
-          <a:lstStyle/>
-          <a:p>
-            <a:endParaRPr lang="es-ES_tradnl" dirty="0"/>
-          </a:p>
-        </p:txBody>
-      </p:sp>
-      <p:sp>
-        <p:nvSpPr>
-          <p:cNvPr id="4" name="Slide Number Placeholder 3"/>
-          <p:cNvSpPr>
-            <a:spLocks noGrp="1"/>
-          </p:cNvSpPr>
-          <p:nvPr>
-            <p:ph type="sldNum" sz="quarter" idx="5"/>
-          </p:nvPr>
-        </p:nvSpPr>
-        <p:spPr/>
-        <p:txBody>
-          <a:bodyPr/>
-          <a:lstStyle/>
-          <a:p>
-            <a:fld id="{A7ED07FA-7792-F649-B523-FCAF9068A01B}" type="slidenum">
-              <a:rPr lang="es-ES_tradnl" smtClean="0"/>
-              <a:t>41</a:t>
-            </a:fld>
-            <a:endParaRPr lang="es-ES_tradnl"/>
-          </a:p>
-        </p:txBody>
-      </p:sp>
-    </p:spTree>
-    <p:extLst>
-      <p:ext uri="{BB962C8B-B14F-4D97-AF65-F5344CB8AC3E}">
-        <p14:creationId xmlns:p14="http://schemas.microsoft.com/office/powerpoint/2010/main" val="3424750785"/>
       </p:ext>
     </p:extLst>
   </p:cSld>
@@ -1434,7 +1436,7 @@
           <a:p>
             <a:fld id="{A7ED07FA-7792-F649-B523-FCAF9068A01B}" type="slidenum">
               <a:rPr lang="es-ES_tradnl" smtClean="0"/>
-              <a:t>46</a:t>
+              <a:t>42</a:t>
             </a:fld>
             <a:endParaRPr lang="es-ES_tradnl"/>
           </a:p>
@@ -1443,7 +1445,7 @@
     </p:spTree>
     <p:extLst>
       <p:ext uri="{BB962C8B-B14F-4D97-AF65-F5344CB8AC3E}">
-        <p14:creationId xmlns:p14="http://schemas.microsoft.com/office/powerpoint/2010/main" val="786359673"/>
+        <p14:creationId xmlns:p14="http://schemas.microsoft.com/office/powerpoint/2010/main" val="3424750785"/>
       </p:ext>
     </p:extLst>
   </p:cSld>
@@ -1518,7 +1520,91 @@
           <a:p>
             <a:fld id="{A7ED07FA-7792-F649-B523-FCAF9068A01B}" type="slidenum">
               <a:rPr lang="es-ES_tradnl" smtClean="0"/>
-              <a:t>49</a:t>
+              <a:t>47</a:t>
+            </a:fld>
+            <a:endParaRPr lang="es-ES_tradnl"/>
+          </a:p>
+        </p:txBody>
+      </p:sp>
+    </p:spTree>
+    <p:extLst>
+      <p:ext uri="{BB962C8B-B14F-4D97-AF65-F5344CB8AC3E}">
+        <p14:creationId xmlns:p14="http://schemas.microsoft.com/office/powerpoint/2010/main" val="786359673"/>
+      </p:ext>
+    </p:extLst>
+  </p:cSld>
+  <p:clrMapOvr>
+    <a:masterClrMapping/>
+  </p:clrMapOvr>
+</p:notes>
+</file>
+
+<file path=ppt/notesSlides/notesSlide19.xml><?xml version="1.0" encoding="utf-8"?>
+<p:notes xmlns:a="http://schemas.openxmlformats.org/drawingml/2006/main" xmlns:r="http://schemas.openxmlformats.org/officeDocument/2006/relationships" xmlns:p="http://schemas.openxmlformats.org/presentationml/2006/main">
+  <p:cSld>
+    <p:spTree>
+      <p:nvGrpSpPr>
+        <p:cNvPr id="1" name=""/>
+        <p:cNvGrpSpPr/>
+        <p:nvPr/>
+      </p:nvGrpSpPr>
+      <p:grpSpPr>
+        <a:xfrm>
+          <a:off x="0" y="0"/>
+          <a:ext cx="0" cy="0"/>
+          <a:chOff x="0" y="0"/>
+          <a:chExt cx="0" cy="0"/>
+        </a:xfrm>
+      </p:grpSpPr>
+      <p:sp>
+        <p:nvSpPr>
+          <p:cNvPr id="2" name="Slide Image Placeholder 1"/>
+          <p:cNvSpPr>
+            <a:spLocks noGrp="1" noRot="1" noChangeAspect="1"/>
+          </p:cNvSpPr>
+          <p:nvPr>
+            <p:ph type="sldImg"/>
+          </p:nvPr>
+        </p:nvSpPr>
+        <p:spPr/>
+      </p:sp>
+      <p:sp>
+        <p:nvSpPr>
+          <p:cNvPr id="3" name="Notes Placeholder 2"/>
+          <p:cNvSpPr>
+            <a:spLocks noGrp="1"/>
+          </p:cNvSpPr>
+          <p:nvPr>
+            <p:ph type="body" idx="1"/>
+          </p:nvPr>
+        </p:nvSpPr>
+        <p:spPr/>
+        <p:txBody>
+          <a:bodyPr/>
+          <a:lstStyle/>
+          <a:p>
+            <a:endParaRPr lang="es-ES_tradnl" dirty="0"/>
+          </a:p>
+        </p:txBody>
+      </p:sp>
+      <p:sp>
+        <p:nvSpPr>
+          <p:cNvPr id="4" name="Slide Number Placeholder 3"/>
+          <p:cNvSpPr>
+            <a:spLocks noGrp="1"/>
+          </p:cNvSpPr>
+          <p:nvPr>
+            <p:ph type="sldNum" sz="quarter" idx="5"/>
+          </p:nvPr>
+        </p:nvSpPr>
+        <p:spPr/>
+        <p:txBody>
+          <a:bodyPr/>
+          <a:lstStyle/>
+          <a:p>
+            <a:fld id="{A7ED07FA-7792-F649-B523-FCAF9068A01B}" type="slidenum">
+              <a:rPr lang="es-ES_tradnl" smtClean="0"/>
+              <a:t>50</a:t>
             </a:fld>
             <a:endParaRPr lang="es-ES_tradnl"/>
           </a:p>
@@ -2200,7 +2286,7 @@
       </p:grpSpPr>
       <p:sp>
         <p:nvSpPr>
-          <p:cNvPr id="2" name="Slide Image Placeholder 1"/>
+          <p:cNvPr id="2" name="Marcador de imagen de diapositiva 1"/>
           <p:cNvSpPr>
             <a:spLocks noGrp="1" noRot="1" noChangeAspect="1"/>
           </p:cNvSpPr>
@@ -2212,7 +2298,7 @@
       </p:sp>
       <p:sp>
         <p:nvSpPr>
-          <p:cNvPr id="3" name="Notes Placeholder 2"/>
+          <p:cNvPr id="3" name="Marcador de notas 2"/>
           <p:cNvSpPr>
             <a:spLocks noGrp="1"/>
           </p:cNvSpPr>
@@ -2225,13 +2311,46 @@
           <a:bodyPr/>
           <a:lstStyle/>
           <a:p>
-            <a:endParaRPr lang="es-ES_tradnl" dirty="0"/>
+            <a:r>
+              <a:rPr lang="es-ES_tradnl" b="1" dirty="0"/>
+              <a:t>Interpretación: </a:t>
+            </a:r>
+            <a:r>
+              <a:rPr lang="es-ES_tradnl" b="0" dirty="0"/>
+              <a:t>“Si el delito más grave del caso fue un delito contra la propiedad con violencia, las probabilidades de reincidencia violenta son 176% mayores, manteniendo todas las demás variables constantes.” (p.579)</a:t>
+            </a:r>
+          </a:p>
+          <a:p>
+            <a:pPr marL="0" marR="0" lvl="0" indent="0" algn="l" defTabSz="914400" rtl="0" eaLnBrk="1" fontAlgn="auto" latinLnBrk="0" hangingPunct="1">
+              <a:lnSpc>
+                <a:spcPct val="100000"/>
+              </a:lnSpc>
+              <a:spcBef>
+                <a:spcPts val="0"/>
+              </a:spcBef>
+              <a:spcAft>
+                <a:spcPts val="0"/>
+              </a:spcAft>
+              <a:buClrTx/>
+              <a:buSzTx/>
+              <a:buFontTx/>
+              <a:buNone/>
+              <a:tabLst/>
+              <a:defRPr/>
+            </a:pPr>
+            <a:r>
+              <a:rPr lang="es-ES_tradnl" b="0" dirty="0"/>
+              <a:t>“El país de nacimiento muestra que nacer en algunos países conlleva un gran aumento en la probabilidad de violencia. Los perpetradores nacidos en las Antillas Neerlandesas, Aruba o Surinam tienen aproximadamente un 30 % más de probabilidades de reincidencia, independientemente de las demás características.” (p.579 y 580)</a:t>
+            </a:r>
+          </a:p>
+          <a:p>
+            <a:endParaRPr lang="es-ES_tradnl" b="0" dirty="0"/>
           </a:p>
         </p:txBody>
       </p:sp>
       <p:sp>
         <p:nvSpPr>
-          <p:cNvPr id="4" name="Slide Number Placeholder 3"/>
+          <p:cNvPr id="4" name="Marcador de número de diapositiva 3"/>
           <p:cNvSpPr>
             <a:spLocks noGrp="1"/>
           </p:cNvSpPr>
@@ -2246,7 +2365,7 @@
           <a:p>
             <a:fld id="{7E630DE0-2491-4445-BD47-B1B1930FC5EF}" type="slidenum">
               <a:rPr lang="en-US" smtClean="0"/>
-              <a:t>29</a:t>
+              <a:t>27</a:t>
             </a:fld>
             <a:endParaRPr lang="en-US"/>
           </a:p>
@@ -2255,7 +2374,7 @@
     </p:spTree>
     <p:extLst>
       <p:ext uri="{BB962C8B-B14F-4D97-AF65-F5344CB8AC3E}">
-        <p14:creationId xmlns:p14="http://schemas.microsoft.com/office/powerpoint/2010/main" val="3956216826"/>
+        <p14:creationId xmlns:p14="http://schemas.microsoft.com/office/powerpoint/2010/main" val="3048783414"/>
       </p:ext>
     </p:extLst>
   </p:cSld>
@@ -2412,7 +2531,7 @@
           <a:p>
             <a:fld id="{A7EB1630-065F-844C-B6A7-8C58AC6D2693}" type="datetimeFigureOut">
               <a:rPr lang="en-US" smtClean="0"/>
-              <a:t>9/26/25</a:t>
+              <a:t>9/30/25</a:t>
             </a:fld>
             <a:endParaRPr lang="en-US"/>
           </a:p>
@@ -2610,7 +2729,7 @@
           <a:p>
             <a:fld id="{A7EB1630-065F-844C-B6A7-8C58AC6D2693}" type="datetimeFigureOut">
               <a:rPr lang="en-US" smtClean="0"/>
-              <a:t>9/26/25</a:t>
+              <a:t>9/30/25</a:t>
             </a:fld>
             <a:endParaRPr lang="en-US"/>
           </a:p>
@@ -2818,7 +2937,7 @@
           <a:p>
             <a:fld id="{A7EB1630-065F-844C-B6A7-8C58AC6D2693}" type="datetimeFigureOut">
               <a:rPr lang="en-US" smtClean="0"/>
-              <a:t>9/26/25</a:t>
+              <a:t>9/30/25</a:t>
             </a:fld>
             <a:endParaRPr lang="en-US"/>
           </a:p>
@@ -3016,7 +3135,7 @@
           <a:p>
             <a:fld id="{A7EB1630-065F-844C-B6A7-8C58AC6D2693}" type="datetimeFigureOut">
               <a:rPr lang="en-US" smtClean="0"/>
-              <a:t>9/26/25</a:t>
+              <a:t>9/30/25</a:t>
             </a:fld>
             <a:endParaRPr lang="en-US"/>
           </a:p>
@@ -3291,7 +3410,7 @@
           <a:p>
             <a:fld id="{A7EB1630-065F-844C-B6A7-8C58AC6D2693}" type="datetimeFigureOut">
               <a:rPr lang="en-US" smtClean="0"/>
-              <a:t>9/26/25</a:t>
+              <a:t>9/30/25</a:t>
             </a:fld>
             <a:endParaRPr lang="en-US"/>
           </a:p>
@@ -3556,7 +3675,7 @@
           <a:p>
             <a:fld id="{A7EB1630-065F-844C-B6A7-8C58AC6D2693}" type="datetimeFigureOut">
               <a:rPr lang="en-US" smtClean="0"/>
-              <a:t>9/26/25</a:t>
+              <a:t>9/30/25</a:t>
             </a:fld>
             <a:endParaRPr lang="en-US"/>
           </a:p>
@@ -3968,7 +4087,7 @@
           <a:p>
             <a:fld id="{A7EB1630-065F-844C-B6A7-8C58AC6D2693}" type="datetimeFigureOut">
               <a:rPr lang="en-US" smtClean="0"/>
-              <a:t>9/26/25</a:t>
+              <a:t>9/30/25</a:t>
             </a:fld>
             <a:endParaRPr lang="en-US"/>
           </a:p>
@@ -4109,7 +4228,7 @@
           <a:p>
             <a:fld id="{A7EB1630-065F-844C-B6A7-8C58AC6D2693}" type="datetimeFigureOut">
               <a:rPr lang="en-US" smtClean="0"/>
-              <a:t>9/26/25</a:t>
+              <a:t>9/30/25</a:t>
             </a:fld>
             <a:endParaRPr lang="en-US"/>
           </a:p>
@@ -4222,7 +4341,7 @@
           <a:p>
             <a:fld id="{A7EB1630-065F-844C-B6A7-8C58AC6D2693}" type="datetimeFigureOut">
               <a:rPr lang="en-US" smtClean="0"/>
-              <a:t>9/26/25</a:t>
+              <a:t>9/30/25</a:t>
             </a:fld>
             <a:endParaRPr lang="en-US"/>
           </a:p>
@@ -4533,7 +4652,7 @@
           <a:p>
             <a:fld id="{A7EB1630-065F-844C-B6A7-8C58AC6D2693}" type="datetimeFigureOut">
               <a:rPr lang="en-US" smtClean="0"/>
-              <a:t>9/26/25</a:t>
+              <a:t>9/30/25</a:t>
             </a:fld>
             <a:endParaRPr lang="en-US"/>
           </a:p>
@@ -4821,7 +4940,7 @@
           <a:p>
             <a:fld id="{A7EB1630-065F-844C-B6A7-8C58AC6D2693}" type="datetimeFigureOut">
               <a:rPr lang="en-US" smtClean="0"/>
-              <a:t>9/26/25</a:t>
+              <a:t>9/30/25</a:t>
             </a:fld>
             <a:endParaRPr lang="en-US"/>
           </a:p>
@@ -5065,7 +5184,7 @@
             <a:fld id="{A7EB1630-065F-844C-B6A7-8C58AC6D2693}" type="datetimeFigureOut">
               <a:rPr lang="es-ES_tradnl" noProof="0" smtClean="0"/>
               <a:pPr/>
-              <a:t>26/9/25</a:t>
+              <a:t>30/9/25</a:t>
             </a:fld>
             <a:endParaRPr lang="es-ES_tradnl" noProof="0"/>
           </a:p>
@@ -13730,7 +13849,7 @@
             </a:r>
             <a:r>
               <a:rPr lang="es-ES_tradnl" dirty="0"/>
-              <a:t>Disponible pronto. </a:t>
+              <a:t>Disponible. </a:t>
             </a:r>
             <a:r>
               <a:rPr lang="es-ES_tradnl" dirty="0">
@@ -19134,6 +19253,227 @@
       </p:grpSpPr>
       <p:sp>
         <p:nvSpPr>
+          <p:cNvPr id="5" name="Title 4">
+            <a:extLst>
+              <a:ext uri="{FF2B5EF4-FFF2-40B4-BE49-F238E27FC236}">
+                <a16:creationId xmlns:a16="http://schemas.microsoft.com/office/drawing/2014/main" id="{00A1ADF7-7C9E-B017-96B4-1C758B898B27}"/>
+              </a:ext>
+            </a:extLst>
+          </p:cNvPr>
+          <p:cNvSpPr>
+            <a:spLocks noGrp="1"/>
+          </p:cNvSpPr>
+          <p:nvPr>
+            <p:ph type="title"/>
+          </p:nvPr>
+        </p:nvSpPr>
+        <p:spPr/>
+        <p:txBody>
+          <a:bodyPr/>
+          <a:lstStyle/>
+          <a:p>
+            <a:r>
+              <a:rPr lang="es-ES_tradnl" dirty="0"/>
+              <a:t>Se puede presentar coeficientes y </a:t>
+            </a:r>
+            <a:r>
+              <a:rPr lang="es-ES_tradnl" dirty="0" err="1"/>
+              <a:t>odd</a:t>
+            </a:r>
+            <a:r>
+              <a:rPr lang="es-ES_tradnl" dirty="0"/>
+              <a:t>-ratios</a:t>
+            </a:r>
+          </a:p>
+        </p:txBody>
+      </p:sp>
+      <p:sp>
+        <p:nvSpPr>
+          <p:cNvPr id="9" name="TextBox 8">
+            <a:extLst>
+              <a:ext uri="{FF2B5EF4-FFF2-40B4-BE49-F238E27FC236}">
+                <a16:creationId xmlns:a16="http://schemas.microsoft.com/office/drawing/2014/main" id="{B3CBFD59-C06C-78F7-9CFE-75E01DA991D5}"/>
+              </a:ext>
+            </a:extLst>
+          </p:cNvPr>
+          <p:cNvSpPr txBox="1"/>
+          <p:nvPr/>
+        </p:nvSpPr>
+        <p:spPr>
+          <a:xfrm>
+            <a:off x="1079500" y="6323598"/>
+            <a:ext cx="5181599" cy="338554"/>
+          </a:xfrm>
+          <a:prstGeom prst="rect">
+            <a:avLst/>
+          </a:prstGeom>
+          <a:noFill/>
+        </p:spPr>
+        <p:txBody>
+          <a:bodyPr wrap="square">
+            <a:spAutoFit/>
+          </a:bodyPr>
+          <a:lstStyle/>
+          <a:p>
+            <a:r>
+              <a:rPr lang="en-US" sz="1600" dirty="0">
+                <a:solidFill>
+                  <a:schemeClr val="tx1">
+                    <a:lumMod val="50000"/>
+                    <a:lumOff val="50000"/>
+                  </a:schemeClr>
+                </a:solidFill>
+                <a:effectLst/>
+                <a:latin typeface="Gill Sans Nova Light" panose="020B0302020104020203" pitchFamily="34" charset="0"/>
+              </a:rPr>
+              <a:t>Fuente: Tollenaar &amp; van der Heijden (2013), p. </a:t>
+            </a:r>
+            <a:r>
+              <a:rPr lang="en-US" sz="1600" dirty="0">
+                <a:solidFill>
+                  <a:schemeClr val="tx1">
+                    <a:lumMod val="50000"/>
+                    <a:lumOff val="50000"/>
+                  </a:schemeClr>
+                </a:solidFill>
+                <a:latin typeface="Gill Sans Nova Light" panose="020B0302020104020203" pitchFamily="34" charset="0"/>
+              </a:rPr>
+              <a:t>580</a:t>
+            </a:r>
+            <a:endParaRPr lang="en-US" sz="4400" dirty="0">
+              <a:solidFill>
+                <a:schemeClr val="tx1">
+                  <a:lumMod val="50000"/>
+                  <a:lumOff val="50000"/>
+                </a:schemeClr>
+              </a:solidFill>
+              <a:effectLst/>
+              <a:latin typeface="Gill Sans Nova Light" panose="020B0302020104020203" pitchFamily="34" charset="0"/>
+            </a:endParaRPr>
+          </a:p>
+        </p:txBody>
+      </p:sp>
+      <p:pic>
+        <p:nvPicPr>
+          <p:cNvPr id="6" name="Marcador de contenido 5">
+            <a:extLst>
+              <a:ext uri="{FF2B5EF4-FFF2-40B4-BE49-F238E27FC236}">
+                <a16:creationId xmlns:a16="http://schemas.microsoft.com/office/drawing/2014/main" id="{CEDC49C3-022A-34D3-905C-58065C75CF29}"/>
+              </a:ext>
+            </a:extLst>
+          </p:cNvPr>
+          <p:cNvPicPr>
+            <a:picLocks noGrp="1" noChangeAspect="1"/>
+          </p:cNvPicPr>
+          <p:nvPr>
+            <p:ph idx="1"/>
+          </p:nvPr>
+        </p:nvPicPr>
+        <p:blipFill>
+          <a:blip r:embed="rId3"/>
+          <a:stretch>
+            <a:fillRect/>
+          </a:stretch>
+        </p:blipFill>
+        <p:spPr>
+          <a:xfrm>
+            <a:off x="1079500" y="1606160"/>
+            <a:ext cx="10033000" cy="1358900"/>
+          </a:xfrm>
+        </p:spPr>
+      </p:pic>
+      <p:pic>
+        <p:nvPicPr>
+          <p:cNvPr id="10" name="Imagen 9">
+            <a:extLst>
+              <a:ext uri="{FF2B5EF4-FFF2-40B4-BE49-F238E27FC236}">
+                <a16:creationId xmlns:a16="http://schemas.microsoft.com/office/drawing/2014/main" id="{3F0786D2-71D0-AFD4-085B-DF6F27590CC3}"/>
+              </a:ext>
+            </a:extLst>
+          </p:cNvPr>
+          <p:cNvPicPr>
+            <a:picLocks noChangeAspect="1"/>
+          </p:cNvPicPr>
+          <p:nvPr/>
+        </p:nvPicPr>
+        <p:blipFill>
+          <a:blip r:embed="rId4"/>
+          <a:stretch>
+            <a:fillRect/>
+          </a:stretch>
+        </p:blipFill>
+        <p:spPr>
+          <a:xfrm>
+            <a:off x="1202273" y="2965060"/>
+            <a:ext cx="9910227" cy="1713730"/>
+          </a:xfrm>
+          <a:prstGeom prst="rect">
+            <a:avLst/>
+          </a:prstGeom>
+        </p:spPr>
+      </p:pic>
+      <p:pic>
+        <p:nvPicPr>
+          <p:cNvPr id="12" name="Imagen 11">
+            <a:extLst>
+              <a:ext uri="{FF2B5EF4-FFF2-40B4-BE49-F238E27FC236}">
+                <a16:creationId xmlns:a16="http://schemas.microsoft.com/office/drawing/2014/main" id="{DE5D0766-4ED6-DBE2-43FA-FA80D12744C6}"/>
+              </a:ext>
+            </a:extLst>
+          </p:cNvPr>
+          <p:cNvPicPr>
+            <a:picLocks noChangeAspect="1"/>
+          </p:cNvPicPr>
+          <p:nvPr/>
+        </p:nvPicPr>
+        <p:blipFill>
+          <a:blip r:embed="rId5"/>
+          <a:stretch>
+            <a:fillRect/>
+          </a:stretch>
+        </p:blipFill>
+        <p:spPr>
+          <a:xfrm>
+            <a:off x="1277558" y="4678790"/>
+            <a:ext cx="9787792" cy="1538081"/>
+          </a:xfrm>
+          <a:prstGeom prst="rect">
+            <a:avLst/>
+          </a:prstGeom>
+        </p:spPr>
+      </p:pic>
+    </p:spTree>
+    <p:extLst>
+      <p:ext uri="{BB962C8B-B14F-4D97-AF65-F5344CB8AC3E}">
+        <p14:creationId xmlns:p14="http://schemas.microsoft.com/office/powerpoint/2010/main" val="1769995523"/>
+      </p:ext>
+    </p:extLst>
+  </p:cSld>
+  <p:clrMapOvr>
+    <a:masterClrMapping/>
+  </p:clrMapOvr>
+</p:sld>
+</file>
+
+<file path=ppt/slides/slide28.xml><?xml version="1.0" encoding="utf-8"?>
+<p:sld xmlns:a="http://schemas.openxmlformats.org/drawingml/2006/main" xmlns:r="http://schemas.openxmlformats.org/officeDocument/2006/relationships" xmlns:p="http://schemas.openxmlformats.org/presentationml/2006/main">
+  <p:cSld>
+    <p:spTree>
+      <p:nvGrpSpPr>
+        <p:cNvPr id="1" name=""/>
+        <p:cNvGrpSpPr/>
+        <p:nvPr/>
+      </p:nvGrpSpPr>
+      <p:grpSpPr>
+        <a:xfrm>
+          <a:off x="0" y="0"/>
+          <a:ext cx="0" cy="0"/>
+          <a:chOff x="0" y="0"/>
+          <a:chExt cx="0" cy="0"/>
+        </a:xfrm>
+      </p:grpSpPr>
+      <p:sp>
+        <p:nvSpPr>
           <p:cNvPr id="2" name="Title 1">
             <a:extLst>
               <a:ext uri="{FF2B5EF4-FFF2-40B4-BE49-F238E27FC236}">
@@ -19229,7 +19569,7 @@
 </p:sld>
 </file>
 
-<file path=ppt/slides/slide28.xml><?xml version="1.0" encoding="utf-8"?>
+<file path=ppt/slides/slide29.xml><?xml version="1.0" encoding="utf-8"?>
 <p:sld xmlns:a="http://schemas.openxmlformats.org/drawingml/2006/main" xmlns:r="http://schemas.openxmlformats.org/officeDocument/2006/relationships" xmlns:p="http://schemas.openxmlformats.org/presentationml/2006/main">
   <p:cSld>
     <p:spTree>
@@ -20267,7 +20607,170 @@
 </p:sld>
 </file>
 
-<file path=ppt/slides/slide29.xml><?xml version="1.0" encoding="utf-8"?>
+<file path=ppt/slides/slide3.xml><?xml version="1.0" encoding="utf-8"?>
+<p:sld xmlns:a="http://schemas.openxmlformats.org/drawingml/2006/main" xmlns:r="http://schemas.openxmlformats.org/officeDocument/2006/relationships" xmlns:p="http://schemas.openxmlformats.org/presentationml/2006/main">
+  <p:cSld>
+    <p:spTree>
+      <p:nvGrpSpPr>
+        <p:cNvPr id="1" name=""/>
+        <p:cNvGrpSpPr/>
+        <p:nvPr/>
+      </p:nvGrpSpPr>
+      <p:grpSpPr>
+        <a:xfrm>
+          <a:off x="0" y="0"/>
+          <a:ext cx="0" cy="0"/>
+          <a:chOff x="0" y="0"/>
+          <a:chExt cx="0" cy="0"/>
+        </a:xfrm>
+      </p:grpSpPr>
+      <p:sp>
+        <p:nvSpPr>
+          <p:cNvPr id="2" name="Title 1">
+            <a:extLst>
+              <a:ext uri="{FF2B5EF4-FFF2-40B4-BE49-F238E27FC236}">
+                <a16:creationId xmlns:a16="http://schemas.microsoft.com/office/drawing/2014/main" id="{EDAE00F5-C7EE-2CC9-E9BA-CD7EB57AFC01}"/>
+              </a:ext>
+            </a:extLst>
+          </p:cNvPr>
+          <p:cNvSpPr>
+            <a:spLocks noGrp="1"/>
+          </p:cNvSpPr>
+          <p:nvPr>
+            <p:ph type="title"/>
+          </p:nvPr>
+        </p:nvSpPr>
+        <p:spPr/>
+        <p:txBody>
+          <a:bodyPr/>
+          <a:lstStyle/>
+          <a:p>
+            <a:r>
+              <a:rPr lang="es-ES_tradnl"/>
+              <a:t>En la clase de hoy</a:t>
+            </a:r>
+          </a:p>
+        </p:txBody>
+      </p:sp>
+      <p:sp>
+        <p:nvSpPr>
+          <p:cNvPr id="3" name="Content Placeholder 2">
+            <a:extLst>
+              <a:ext uri="{FF2B5EF4-FFF2-40B4-BE49-F238E27FC236}">
+                <a16:creationId xmlns:a16="http://schemas.microsoft.com/office/drawing/2014/main" id="{F3A8327E-74B0-5F1D-D3E8-C9714B43F83E}"/>
+              </a:ext>
+            </a:extLst>
+          </p:cNvPr>
+          <p:cNvSpPr>
+            <a:spLocks noGrp="1"/>
+          </p:cNvSpPr>
+          <p:nvPr>
+            <p:ph idx="1"/>
+          </p:nvPr>
+        </p:nvSpPr>
+        <p:spPr/>
+        <p:txBody>
+          <a:bodyPr>
+            <a:normAutofit fontScale="92500" lnSpcReduction="20000"/>
+          </a:bodyPr>
+          <a:lstStyle/>
+          <a:p>
+            <a:pPr marL="0" indent="0">
+              <a:lnSpc>
+                <a:spcPct val="150000"/>
+              </a:lnSpc>
+              <a:buNone/>
+            </a:pPr>
+            <a:r>
+              <a:rPr lang="es-ES_tradnl" dirty="0"/>
+              <a:t>0. Repaso y Preguntas</a:t>
+            </a:r>
+          </a:p>
+          <a:p>
+            <a:pPr marL="514350" indent="-514350">
+              <a:lnSpc>
+                <a:spcPct val="150000"/>
+              </a:lnSpc>
+              <a:buAutoNum type="arabicPeriod"/>
+            </a:pPr>
+            <a:r>
+              <a:rPr lang="es-ES_tradnl" dirty="0"/>
+              <a:t>Motivación: Clasificación </a:t>
+            </a:r>
+          </a:p>
+          <a:p>
+            <a:pPr marL="514350" indent="-514350">
+              <a:lnSpc>
+                <a:spcPct val="150000"/>
+              </a:lnSpc>
+              <a:buAutoNum type="arabicPeriod"/>
+            </a:pPr>
+            <a:r>
+              <a:rPr lang="es-ES_tradnl" dirty="0"/>
+              <a:t>Clasificador de Bayes -&gt; Intuitivamente</a:t>
+            </a:r>
+          </a:p>
+          <a:p>
+            <a:pPr marL="514350" indent="-514350">
+              <a:lnSpc>
+                <a:spcPct val="150000"/>
+              </a:lnSpc>
+              <a:buAutoNum type="arabicPeriod"/>
+            </a:pPr>
+            <a:r>
+              <a:rPr lang="es-ES_tradnl" dirty="0"/>
+              <a:t>Regresión logística -&gt; Repaso de MV &amp; Aplicación</a:t>
+            </a:r>
+          </a:p>
+          <a:p>
+            <a:pPr marL="514350" indent="-514350">
+              <a:lnSpc>
+                <a:spcPct val="150000"/>
+              </a:lnSpc>
+              <a:buAutoNum type="arabicPeriod"/>
+            </a:pPr>
+            <a:r>
+              <a:rPr lang="es-ES_tradnl" dirty="0"/>
+              <a:t>Vecinos cercanos -&gt; Aplicación</a:t>
+            </a:r>
+          </a:p>
+          <a:p>
+            <a:pPr marL="514350" indent="-514350">
+              <a:lnSpc>
+                <a:spcPct val="150000"/>
+              </a:lnSpc>
+              <a:buAutoNum type="arabicPeriod"/>
+            </a:pPr>
+            <a:r>
+              <a:rPr lang="es-ES_tradnl" dirty="0"/>
+              <a:t>Introducción al análisis discriminante</a:t>
+            </a:r>
+          </a:p>
+          <a:p>
+            <a:pPr marL="0" indent="0">
+              <a:lnSpc>
+                <a:spcPct val="150000"/>
+              </a:lnSpc>
+              <a:buNone/>
+            </a:pPr>
+            <a:endParaRPr lang="es-ES_tradnl" dirty="0"/>
+          </a:p>
+        </p:txBody>
+      </p:sp>
+    </p:spTree>
+    <p:extLst>
+      <p:ext uri="{BB962C8B-B14F-4D97-AF65-F5344CB8AC3E}">
+        <p14:creationId xmlns:p14="http://schemas.microsoft.com/office/powerpoint/2010/main" val="4169880411"/>
+      </p:ext>
+    </p:extLst>
+  </p:cSld>
+  <p:clrMapOvr>
+    <a:masterClrMapping/>
+  </p:clrMapOvr>
+</p:sld>
+</file>
+
+<file path=ppt/slides/slide30.xml><?xml version="1.0" encoding="utf-8"?>
 <p:sld xmlns:a="http://schemas.openxmlformats.org/drawingml/2006/main" xmlns:r="http://schemas.openxmlformats.org/officeDocument/2006/relationships" xmlns:p="http://schemas.openxmlformats.org/presentationml/2006/main">
   <p:cSld>
     <p:spTree>
@@ -20843,170 +21346,7 @@
 </p:sld>
 </file>
 
-<file path=ppt/slides/slide3.xml><?xml version="1.0" encoding="utf-8"?>
-<p:sld xmlns:a="http://schemas.openxmlformats.org/drawingml/2006/main" xmlns:r="http://schemas.openxmlformats.org/officeDocument/2006/relationships" xmlns:p="http://schemas.openxmlformats.org/presentationml/2006/main">
-  <p:cSld>
-    <p:spTree>
-      <p:nvGrpSpPr>
-        <p:cNvPr id="1" name=""/>
-        <p:cNvGrpSpPr/>
-        <p:nvPr/>
-      </p:nvGrpSpPr>
-      <p:grpSpPr>
-        <a:xfrm>
-          <a:off x="0" y="0"/>
-          <a:ext cx="0" cy="0"/>
-          <a:chOff x="0" y="0"/>
-          <a:chExt cx="0" cy="0"/>
-        </a:xfrm>
-      </p:grpSpPr>
-      <p:sp>
-        <p:nvSpPr>
-          <p:cNvPr id="2" name="Title 1">
-            <a:extLst>
-              <a:ext uri="{FF2B5EF4-FFF2-40B4-BE49-F238E27FC236}">
-                <a16:creationId xmlns:a16="http://schemas.microsoft.com/office/drawing/2014/main" id="{EDAE00F5-C7EE-2CC9-E9BA-CD7EB57AFC01}"/>
-              </a:ext>
-            </a:extLst>
-          </p:cNvPr>
-          <p:cNvSpPr>
-            <a:spLocks noGrp="1"/>
-          </p:cNvSpPr>
-          <p:nvPr>
-            <p:ph type="title"/>
-          </p:nvPr>
-        </p:nvSpPr>
-        <p:spPr/>
-        <p:txBody>
-          <a:bodyPr/>
-          <a:lstStyle/>
-          <a:p>
-            <a:r>
-              <a:rPr lang="es-ES_tradnl"/>
-              <a:t>En la clase de hoy</a:t>
-            </a:r>
-          </a:p>
-        </p:txBody>
-      </p:sp>
-      <p:sp>
-        <p:nvSpPr>
-          <p:cNvPr id="3" name="Content Placeholder 2">
-            <a:extLst>
-              <a:ext uri="{FF2B5EF4-FFF2-40B4-BE49-F238E27FC236}">
-                <a16:creationId xmlns:a16="http://schemas.microsoft.com/office/drawing/2014/main" id="{F3A8327E-74B0-5F1D-D3E8-C9714B43F83E}"/>
-              </a:ext>
-            </a:extLst>
-          </p:cNvPr>
-          <p:cNvSpPr>
-            <a:spLocks noGrp="1"/>
-          </p:cNvSpPr>
-          <p:nvPr>
-            <p:ph idx="1"/>
-          </p:nvPr>
-        </p:nvSpPr>
-        <p:spPr/>
-        <p:txBody>
-          <a:bodyPr>
-            <a:normAutofit fontScale="92500" lnSpcReduction="20000"/>
-          </a:bodyPr>
-          <a:lstStyle/>
-          <a:p>
-            <a:pPr marL="0" indent="0">
-              <a:lnSpc>
-                <a:spcPct val="150000"/>
-              </a:lnSpc>
-              <a:buNone/>
-            </a:pPr>
-            <a:r>
-              <a:rPr lang="es-ES_tradnl" dirty="0"/>
-              <a:t>0. Repaso y Preguntas</a:t>
-            </a:r>
-          </a:p>
-          <a:p>
-            <a:pPr marL="514350" indent="-514350">
-              <a:lnSpc>
-                <a:spcPct val="150000"/>
-              </a:lnSpc>
-              <a:buAutoNum type="arabicPeriod"/>
-            </a:pPr>
-            <a:r>
-              <a:rPr lang="es-ES_tradnl" dirty="0"/>
-              <a:t>Motivación: Clasificación </a:t>
-            </a:r>
-          </a:p>
-          <a:p>
-            <a:pPr marL="514350" indent="-514350">
-              <a:lnSpc>
-                <a:spcPct val="150000"/>
-              </a:lnSpc>
-              <a:buAutoNum type="arabicPeriod"/>
-            </a:pPr>
-            <a:r>
-              <a:rPr lang="es-ES_tradnl" dirty="0"/>
-              <a:t>Clasificador de Bayes -&gt; Intuitivamente</a:t>
-            </a:r>
-          </a:p>
-          <a:p>
-            <a:pPr marL="514350" indent="-514350">
-              <a:lnSpc>
-                <a:spcPct val="150000"/>
-              </a:lnSpc>
-              <a:buAutoNum type="arabicPeriod"/>
-            </a:pPr>
-            <a:r>
-              <a:rPr lang="es-ES_tradnl" dirty="0"/>
-              <a:t>Regresión logística -&gt; Repaso de MV &amp; Aplicación</a:t>
-            </a:r>
-          </a:p>
-          <a:p>
-            <a:pPr marL="514350" indent="-514350">
-              <a:lnSpc>
-                <a:spcPct val="150000"/>
-              </a:lnSpc>
-              <a:buAutoNum type="arabicPeriod"/>
-            </a:pPr>
-            <a:r>
-              <a:rPr lang="es-ES_tradnl" dirty="0"/>
-              <a:t>Vecinos cercanos -&gt; Aplicación</a:t>
-            </a:r>
-          </a:p>
-          <a:p>
-            <a:pPr marL="514350" indent="-514350">
-              <a:lnSpc>
-                <a:spcPct val="150000"/>
-              </a:lnSpc>
-              <a:buAutoNum type="arabicPeriod"/>
-            </a:pPr>
-            <a:r>
-              <a:rPr lang="es-ES_tradnl" dirty="0"/>
-              <a:t>Introducción al análisis discriminante</a:t>
-            </a:r>
-          </a:p>
-          <a:p>
-            <a:pPr marL="0" indent="0">
-              <a:lnSpc>
-                <a:spcPct val="150000"/>
-              </a:lnSpc>
-              <a:buNone/>
-            </a:pPr>
-            <a:endParaRPr lang="es-ES_tradnl" dirty="0"/>
-          </a:p>
-        </p:txBody>
-      </p:sp>
-    </p:spTree>
-    <p:extLst>
-      <p:ext uri="{BB962C8B-B14F-4D97-AF65-F5344CB8AC3E}">
-        <p14:creationId xmlns:p14="http://schemas.microsoft.com/office/powerpoint/2010/main" val="4169880411"/>
-      </p:ext>
-    </p:extLst>
-  </p:cSld>
-  <p:clrMapOvr>
-    <a:masterClrMapping/>
-  </p:clrMapOvr>
-</p:sld>
-</file>
-
-<file path=ppt/slides/slide30.xml><?xml version="1.0" encoding="utf-8"?>
+<file path=ppt/slides/slide31.xml><?xml version="1.0" encoding="utf-8"?>
 <p:sld xmlns:a="http://schemas.openxmlformats.org/drawingml/2006/main" xmlns:r="http://schemas.openxmlformats.org/officeDocument/2006/relationships" xmlns:p="http://schemas.openxmlformats.org/presentationml/2006/main">
   <p:cSld>
     <p:spTree>
@@ -21093,7 +21433,7 @@
 </p:sld>
 </file>
 
-<file path=ppt/slides/slide31.xml><?xml version="1.0" encoding="utf-8"?>
+<file path=ppt/slides/slide32.xml><?xml version="1.0" encoding="utf-8"?>
 <p:sld xmlns:a="http://schemas.openxmlformats.org/drawingml/2006/main" xmlns:r="http://schemas.openxmlformats.org/officeDocument/2006/relationships" xmlns:p="http://schemas.openxmlformats.org/presentationml/2006/main">
   <p:cSld>
     <p:spTree>
@@ -21509,7 +21849,7 @@
 </p:sld>
 </file>
 
-<file path=ppt/slides/slide32.xml><?xml version="1.0" encoding="utf-8"?>
+<file path=ppt/slides/slide33.xml><?xml version="1.0" encoding="utf-8"?>
 <p:sld xmlns:a="http://schemas.openxmlformats.org/drawingml/2006/main" xmlns:r="http://schemas.openxmlformats.org/officeDocument/2006/relationships" xmlns:p="http://schemas.openxmlformats.org/presentationml/2006/main">
   <p:cSld>
     <p:spTree>
@@ -21629,7 +21969,7 @@
 </p:sld>
 </file>
 
-<file path=ppt/slides/slide33.xml><?xml version="1.0" encoding="utf-8"?>
+<file path=ppt/slides/slide34.xml><?xml version="1.0" encoding="utf-8"?>
 <p:sld xmlns:a="http://schemas.openxmlformats.org/drawingml/2006/main" xmlns:r="http://schemas.openxmlformats.org/officeDocument/2006/relationships" xmlns:p="http://schemas.openxmlformats.org/presentationml/2006/main">
   <p:cSld>
     <p:spTree>
@@ -21913,7 +22253,7 @@
 </p:sld>
 </file>
 
-<file path=ppt/slides/slide34.xml><?xml version="1.0" encoding="utf-8"?>
+<file path=ppt/slides/slide35.xml><?xml version="1.0" encoding="utf-8"?>
 <p:sld xmlns:a="http://schemas.openxmlformats.org/drawingml/2006/main" xmlns:r="http://schemas.openxmlformats.org/officeDocument/2006/relationships" xmlns:p="http://schemas.openxmlformats.org/presentationml/2006/main">
   <p:cSld>
     <p:spTree>
@@ -23477,7 +23817,7 @@
           <a:p>
             <a:fld id="{278C1CC4-2077-434E-BCF1-5D01C08A9B17}" type="slidenum">
               <a:rPr lang="en-US" smtClean="0"/>
-              <a:t>34</a:t>
+              <a:t>35</a:t>
             </a:fld>
             <a:endParaRPr lang="en-US"/>
           </a:p>
@@ -23975,7 +24315,7 @@
 </p:sld>
 </file>
 
-<file path=ppt/slides/slide35.xml><?xml version="1.0" encoding="utf-8"?>
+<file path=ppt/slides/slide36.xml><?xml version="1.0" encoding="utf-8"?>
 <p:sld xmlns:a="http://schemas.openxmlformats.org/drawingml/2006/main" xmlns:r="http://schemas.openxmlformats.org/officeDocument/2006/relationships" xmlns:p="http://schemas.openxmlformats.org/presentationml/2006/main">
   <p:cSld>
     <p:spTree>
@@ -24111,7 +24451,7 @@
           <a:p>
             <a:fld id="{278C1CC4-2077-434E-BCF1-5D01C08A9B17}" type="slidenum">
               <a:rPr lang="en-US" smtClean="0"/>
-              <a:t>35</a:t>
+              <a:t>36</a:t>
             </a:fld>
             <a:endParaRPr lang="en-US"/>
           </a:p>
@@ -24130,7 +24470,7 @@
 </p:sld>
 </file>
 
-<file path=ppt/slides/slide36.xml><?xml version="1.0" encoding="utf-8"?>
+<file path=ppt/slides/slide37.xml><?xml version="1.0" encoding="utf-8"?>
 <p:sld xmlns:a="http://schemas.openxmlformats.org/drawingml/2006/main" xmlns:r="http://schemas.openxmlformats.org/officeDocument/2006/relationships" xmlns:p="http://schemas.openxmlformats.org/presentationml/2006/main">
   <p:cSld>
     <p:spTree>
@@ -24452,7 +24792,7 @@
           <a:p>
             <a:fld id="{278C1CC4-2077-434E-BCF1-5D01C08A9B17}" type="slidenum">
               <a:rPr lang="en-US" smtClean="0"/>
-              <a:t>36</a:t>
+              <a:t>37</a:t>
             </a:fld>
             <a:endParaRPr lang="en-US"/>
           </a:p>
@@ -24471,7 +24811,7 @@
 </p:sld>
 </file>
 
-<file path=ppt/slides/slide37.xml><?xml version="1.0" encoding="utf-8"?>
+<file path=ppt/slides/slide38.xml><?xml version="1.0" encoding="utf-8"?>
 <p:sld xmlns:a="http://schemas.openxmlformats.org/drawingml/2006/main" xmlns:r="http://schemas.openxmlformats.org/officeDocument/2006/relationships" xmlns:p="http://schemas.openxmlformats.org/presentationml/2006/main">
   <p:cSld>
     <p:spTree>
@@ -24859,7 +25199,7 @@
           <a:p>
             <a:fld id="{278C1CC4-2077-434E-BCF1-5D01C08A9B17}" type="slidenum">
               <a:rPr lang="en-US" smtClean="0"/>
-              <a:t>37</a:t>
+              <a:t>38</a:t>
             </a:fld>
             <a:endParaRPr lang="en-US"/>
           </a:p>
@@ -25830,7 +26170,7 @@
 </p:sld>
 </file>
 
-<file path=ppt/slides/slide38.xml><?xml version="1.0" encoding="utf-8"?>
+<file path=ppt/slides/slide39.xml><?xml version="1.0" encoding="utf-8"?>
 <p:sld xmlns:a="http://schemas.openxmlformats.org/drawingml/2006/main" xmlns:r="http://schemas.openxmlformats.org/officeDocument/2006/relationships" xmlns:p="http://schemas.openxmlformats.org/presentationml/2006/main">
   <p:cSld>
     <p:spTree>
@@ -26079,7 +26419,7 @@
           <a:p>
             <a:fld id="{278C1CC4-2077-434E-BCF1-5D01C08A9B17}" type="slidenum">
               <a:rPr lang="en-US" smtClean="0"/>
-              <a:t>38</a:t>
+              <a:t>39</a:t>
             </a:fld>
             <a:endParaRPr lang="en-US"/>
           </a:p>
@@ -26098,7 +26438,2214 @@
 </p:sld>
 </file>
 
-<file path=ppt/slides/slide39.xml><?xml version="1.0" encoding="utf-8"?>
+<file path=ppt/slides/slide4.xml><?xml version="1.0" encoding="utf-8"?>
+<p:sld xmlns:a="http://schemas.openxmlformats.org/drawingml/2006/main" xmlns:r="http://schemas.openxmlformats.org/officeDocument/2006/relationships" xmlns:p="http://schemas.openxmlformats.org/presentationml/2006/main">
+  <p:cSld>
+    <p:spTree>
+      <p:nvGrpSpPr>
+        <p:cNvPr id="1" name=""/>
+        <p:cNvGrpSpPr/>
+        <p:nvPr/>
+      </p:nvGrpSpPr>
+      <p:grpSpPr>
+        <a:xfrm>
+          <a:off x="0" y="0"/>
+          <a:ext cx="0" cy="0"/>
+          <a:chOff x="0" y="0"/>
+          <a:chExt cx="0" cy="0"/>
+        </a:xfrm>
+      </p:grpSpPr>
+      <p:sp>
+        <p:nvSpPr>
+          <p:cNvPr id="2" name="Title 1">
+            <a:extLst>
+              <a:ext uri="{FF2B5EF4-FFF2-40B4-BE49-F238E27FC236}">
+                <a16:creationId xmlns:a16="http://schemas.microsoft.com/office/drawing/2014/main" id="{8729A790-8125-0419-9C63-AD7B89D79279}"/>
+              </a:ext>
+            </a:extLst>
+          </p:cNvPr>
+          <p:cNvSpPr>
+            <a:spLocks noGrp="1"/>
+          </p:cNvSpPr>
+          <p:nvPr>
+            <p:ph type="title"/>
+          </p:nvPr>
+        </p:nvSpPr>
+        <p:spPr/>
+        <p:txBody>
+          <a:bodyPr/>
+          <a:lstStyle/>
+          <a:p>
+            <a:r>
+              <a:rPr lang="es-ES_tradnl" dirty="0"/>
+              <a:t>De la Etapa Explorativa a la Predicción</a:t>
+            </a:r>
+          </a:p>
+        </p:txBody>
+      </p:sp>
+      <mc:AlternateContent xmlns:mc="http://schemas.openxmlformats.org/markup-compatibility/2006" xmlns:a14="http://schemas.microsoft.com/office/drawing/2010/main">
+        <mc:Choice Requires="a14">
+          <p:graphicFrame>
+            <p:nvGraphicFramePr>
+              <p:cNvPr id="4" name="Content Placeholder 3">
+                <a:extLst>
+                  <a:ext uri="{FF2B5EF4-FFF2-40B4-BE49-F238E27FC236}">
+                    <a16:creationId xmlns:a16="http://schemas.microsoft.com/office/drawing/2014/main" id="{08559E05-DBC3-8301-D584-275312741E4C}"/>
+                  </a:ext>
+                </a:extLst>
+              </p:cNvPr>
+              <p:cNvGraphicFramePr>
+                <a:graphicFrameLocks noGrp="1"/>
+              </p:cNvGraphicFramePr>
+              <p:nvPr>
+                <p:ph idx="1"/>
+              </p:nvPr>
+            </p:nvGraphicFramePr>
+            <p:xfrm>
+              <a:off x="617621" y="1496447"/>
+              <a:ext cx="10956757" cy="4724400"/>
+            </p:xfrm>
+            <a:graphic>
+              <a:graphicData uri="http://schemas.openxmlformats.org/drawingml/2006/table">
+                <a:tbl>
+                  <a:tblPr firstRow="1" bandRow="1">
+                    <a:tableStyleId>{F2DE63D5-997A-4646-A377-4702673A728D}</a:tableStyleId>
+                  </a:tblPr>
+                  <a:tblGrid>
+                    <a:gridCol w="1540043">
+                      <a:extLst>
+                        <a:ext uri="{9D8B030D-6E8A-4147-A177-3AD203B41FA5}">
+                          <a16:colId xmlns:a16="http://schemas.microsoft.com/office/drawing/2014/main" val="1029663632"/>
+                        </a:ext>
+                      </a:extLst>
+                    </a:gridCol>
+                    <a:gridCol w="1915804">
+                      <a:extLst>
+                        <a:ext uri="{9D8B030D-6E8A-4147-A177-3AD203B41FA5}">
+                          <a16:colId xmlns:a16="http://schemas.microsoft.com/office/drawing/2014/main" val="3989478329"/>
+                        </a:ext>
+                      </a:extLst>
+                    </a:gridCol>
+                    <a:gridCol w="5265262">
+                      <a:extLst>
+                        <a:ext uri="{9D8B030D-6E8A-4147-A177-3AD203B41FA5}">
+                          <a16:colId xmlns:a16="http://schemas.microsoft.com/office/drawing/2014/main" val="1368382703"/>
+                        </a:ext>
+                      </a:extLst>
+                    </a:gridCol>
+                    <a:gridCol w="2235648">
+                      <a:extLst>
+                        <a:ext uri="{9D8B030D-6E8A-4147-A177-3AD203B41FA5}">
+                          <a16:colId xmlns:a16="http://schemas.microsoft.com/office/drawing/2014/main" val="995975348"/>
+                        </a:ext>
+                      </a:extLst>
+                    </a:gridCol>
+                  </a:tblGrid>
+                  <a:tr h="749448">
+                    <a:tc>
+                      <a:txBody>
+                        <a:bodyPr/>
+                        <a:lstStyle/>
+                        <a:p>
+                          <a:pPr algn="ctr"/>
+                          <a:r>
+                            <a:rPr lang="es-ES_tradnl" sz="2200" dirty="0">
+                              <a:latin typeface="Gill Sans Nova Light" panose="020B0302020104020203" pitchFamily="34" charset="0"/>
+                            </a:rPr>
+                            <a:t>Etapas</a:t>
+                          </a:r>
+                        </a:p>
+                      </a:txBody>
+                      <a:tcPr anchor="ctr">
+                        <a:lnL w="12700" cap="flat" cmpd="sng" algn="ctr">
+                          <a:solidFill>
+                            <a:schemeClr val="tx1"/>
+                          </a:solidFill>
+                          <a:prstDash val="solid"/>
+                          <a:round/>
+                          <a:headEnd type="none" w="med" len="med"/>
+                          <a:tailEnd type="none" w="med" len="med"/>
+                        </a:lnL>
+                        <a:lnT w="12700" cap="flat" cmpd="sng" algn="ctr">
+                          <a:solidFill>
+                            <a:schemeClr val="tx1"/>
+                          </a:solidFill>
+                          <a:prstDash val="solid"/>
+                          <a:round/>
+                          <a:headEnd type="none" w="med" len="med"/>
+                          <a:tailEnd type="none" w="med" len="med"/>
+                        </a:lnT>
+                        <a:solidFill>
+                          <a:srgbClr val="002060"/>
+                        </a:solidFill>
+                      </a:tcPr>
+                    </a:tc>
+                    <a:tc>
+                      <a:txBody>
+                        <a:bodyPr/>
+                        <a:lstStyle/>
+                        <a:p>
+                          <a:pPr algn="ctr"/>
+                          <a:r>
+                            <a:rPr lang="es-ES_tradnl" sz="2200" dirty="0">
+                              <a:latin typeface="Gill Sans Nova Light" panose="020B0302020104020203" pitchFamily="34" charset="0"/>
+                            </a:rPr>
+                            <a:t>Tipo de Aprendizaje</a:t>
+                          </a:r>
+                        </a:p>
+                      </a:txBody>
+                      <a:tcPr anchor="ctr">
+                        <a:lnT w="12700" cap="flat" cmpd="sng" algn="ctr">
+                          <a:solidFill>
+                            <a:schemeClr val="tx1"/>
+                          </a:solidFill>
+                          <a:prstDash val="solid"/>
+                          <a:round/>
+                          <a:headEnd type="none" w="med" len="med"/>
+                          <a:tailEnd type="none" w="med" len="med"/>
+                        </a:lnT>
+                        <a:solidFill>
+                          <a:srgbClr val="002060"/>
+                        </a:solidFill>
+                      </a:tcPr>
+                    </a:tc>
+                    <a:tc>
+                      <a:txBody>
+                        <a:bodyPr/>
+                        <a:lstStyle/>
+                        <a:p>
+                          <a:pPr algn="ctr"/>
+                          <a:r>
+                            <a:rPr lang="es-ES_tradnl" sz="2200" dirty="0">
+                              <a:latin typeface="Gill Sans Nova Light" panose="020B0302020104020203" pitchFamily="34" charset="0"/>
+                            </a:rPr>
+                            <a:t>Idea</a:t>
+                          </a:r>
+                        </a:p>
+                      </a:txBody>
+                      <a:tcPr anchor="ctr">
+                        <a:lnT w="12700" cap="flat" cmpd="sng" algn="ctr">
+                          <a:solidFill>
+                            <a:schemeClr val="tx1"/>
+                          </a:solidFill>
+                          <a:prstDash val="solid"/>
+                          <a:round/>
+                          <a:headEnd type="none" w="med" len="med"/>
+                          <a:tailEnd type="none" w="med" len="med"/>
+                        </a:lnT>
+                        <a:solidFill>
+                          <a:srgbClr val="002060"/>
+                        </a:solidFill>
+                      </a:tcPr>
+                    </a:tc>
+                    <a:tc>
+                      <a:txBody>
+                        <a:bodyPr/>
+                        <a:lstStyle/>
+                        <a:p>
+                          <a:pPr algn="ctr"/>
+                          <a:r>
+                            <a:rPr lang="es-ES_tradnl" sz="2200" dirty="0">
+                              <a:latin typeface="Gill Sans Nova Light" panose="020B0302020104020203" pitchFamily="34" charset="0"/>
+                            </a:rPr>
+                            <a:t>Métodos</a:t>
+                          </a:r>
+                        </a:p>
+                      </a:txBody>
+                      <a:tcPr anchor="ctr">
+                        <a:lnR w="12700" cap="flat" cmpd="sng" algn="ctr">
+                          <a:solidFill>
+                            <a:schemeClr val="tx1"/>
+                          </a:solidFill>
+                          <a:prstDash val="solid"/>
+                          <a:round/>
+                          <a:headEnd type="none" w="med" len="med"/>
+                          <a:tailEnd type="none" w="med" len="med"/>
+                        </a:lnR>
+                        <a:lnT w="12700" cap="flat" cmpd="sng" algn="ctr">
+                          <a:solidFill>
+                            <a:schemeClr val="tx1"/>
+                          </a:solidFill>
+                          <a:prstDash val="solid"/>
+                          <a:round/>
+                          <a:headEnd type="none" w="med" len="med"/>
+                          <a:tailEnd type="none" w="med" len="med"/>
+                        </a:lnT>
+                        <a:solidFill>
+                          <a:srgbClr val="002060"/>
+                        </a:solidFill>
+                      </a:tcPr>
+                    </a:tc>
+                    <a:extLst>
+                      <a:ext uri="{0D108BD9-81ED-4DB2-BD59-A6C34878D82A}">
+                        <a16:rowId xmlns:a16="http://schemas.microsoft.com/office/drawing/2014/main" val="11467572"/>
+                      </a:ext>
+                    </a:extLst>
+                  </a:tr>
+                  <a:tr h="899255">
+                    <a:tc rowSpan="2">
+                      <a:txBody>
+                        <a:bodyPr/>
+                        <a:lstStyle/>
+                        <a:p>
+                          <a:r>
+                            <a:rPr lang="es-ES_tradnl" sz="2200" dirty="0">
+                              <a:latin typeface="Gill Sans Nova Light" panose="020B0302020104020203" pitchFamily="34" charset="0"/>
+                            </a:rPr>
+                            <a:t>Explorativa</a:t>
+                          </a:r>
+                        </a:p>
+                        <a:p>
+                          <a:pPr marL="0" marR="0" lvl="0" indent="0" algn="l" defTabSz="914400" rtl="0" eaLnBrk="1" fontAlgn="auto" latinLnBrk="0" hangingPunct="1">
+                            <a:lnSpc>
+                              <a:spcPct val="100000"/>
+                            </a:lnSpc>
+                            <a:spcBef>
+                              <a:spcPts val="0"/>
+                            </a:spcBef>
+                            <a:spcAft>
+                              <a:spcPts val="0"/>
+                            </a:spcAft>
+                            <a:buClrTx/>
+                            <a:buSzTx/>
+                            <a:buFontTx/>
+                            <a:buNone/>
+                            <a:tabLst/>
+                            <a:defRPr/>
+                          </a:pPr>
+                          <a:endParaRPr lang="es-ES_tradnl" sz="2200" dirty="0">
+                            <a:latin typeface="Gill Sans Nova Light" panose="020B0302020104020203" pitchFamily="34" charset="0"/>
+                          </a:endParaRPr>
+                        </a:p>
+                        <a:p>
+                          <a:endParaRPr lang="es-ES_tradnl" sz="2200" dirty="0">
+                            <a:latin typeface="Gill Sans Nova Light" panose="020B0302020104020203" pitchFamily="34" charset="0"/>
+                          </a:endParaRPr>
+                        </a:p>
+                      </a:txBody>
+                      <a:tcPr anchor="ctr">
+                        <a:lnL w="12700" cap="flat" cmpd="sng" algn="ctr">
+                          <a:solidFill>
+                            <a:schemeClr val="tx1"/>
+                          </a:solidFill>
+                          <a:prstDash val="solid"/>
+                          <a:round/>
+                          <a:headEnd type="none" w="med" len="med"/>
+                          <a:tailEnd type="none" w="med" len="med"/>
+                        </a:lnL>
+                        <a:lnB w="12700" cap="flat" cmpd="sng" algn="ctr">
+                          <a:solidFill>
+                            <a:schemeClr val="tx1"/>
+                          </a:solidFill>
+                          <a:prstDash val="solid"/>
+                          <a:round/>
+                          <a:headEnd type="none" w="med" len="med"/>
+                          <a:tailEnd type="none" w="med" len="med"/>
+                        </a:lnB>
+                      </a:tcPr>
+                    </a:tc>
+                    <a:tc>
+                      <a:txBody>
+                        <a:bodyPr/>
+                        <a:lstStyle/>
+                        <a:p>
+                          <a:r>
+                            <a:rPr lang="es-ES_tradnl" sz="2200" dirty="0">
+                              <a:latin typeface="Gill Sans Nova Light" panose="020B0302020104020203" pitchFamily="34" charset="0"/>
+                            </a:rPr>
+                            <a:t>Aprendizaje No Supervisado</a:t>
+                          </a:r>
+                        </a:p>
+                      </a:txBody>
+                      <a:tcPr anchor="ctr"/>
+                    </a:tc>
+                    <a:tc>
+                      <a:txBody>
+                        <a:bodyPr/>
+                        <a:lstStyle/>
+                        <a:p>
+                          <a:r>
+                            <a:rPr lang="es-ES_tradnl" sz="2200" dirty="0">
+                              <a:latin typeface="Gill Sans Nova Light" panose="020B0302020104020203" pitchFamily="34" charset="0"/>
+                            </a:rPr>
+                            <a:t>No hay un </a:t>
+                          </a:r>
+                          <a:r>
+                            <a:rPr lang="es-ES_tradnl" sz="2200" dirty="0">
+                              <a:solidFill>
+                                <a:srgbClr val="002060"/>
+                              </a:solidFill>
+                              <a:latin typeface="Gill Sans Nova Light" panose="020B0302020104020203" pitchFamily="34" charset="0"/>
+                            </a:rPr>
+                            <a:t>output</a:t>
+                          </a:r>
+                          <a:r>
+                            <a:rPr lang="es-ES_tradnl" sz="2200" dirty="0">
+                              <a:latin typeface="Gill Sans Nova Light" panose="020B0302020104020203" pitchFamily="34" charset="0"/>
+                            </a:rPr>
+                            <a:t> que se busca predecir</a:t>
+                          </a:r>
+                        </a:p>
+                        <a:p>
+                          <a:r>
+                            <a:rPr lang="es-ES_tradnl" sz="2200" dirty="0">
+                              <a:latin typeface="Gill Sans Nova Light" panose="020B0302020104020203" pitchFamily="34" charset="0"/>
+                            </a:rPr>
+                            <a:t>N observaciones </a:t>
+                          </a:r>
+                          <a14:m>
+                            <m:oMath xmlns:m="http://schemas.openxmlformats.org/officeDocument/2006/math">
+                              <m:d>
+                                <m:dPr>
+                                  <m:ctrlPr>
+                                    <a:rPr lang="en-US" sz="2200" b="0" i="1" dirty="0" smtClean="0">
+                                      <a:latin typeface="Cambria Math" panose="02040503050406030204" pitchFamily="18" charset="0"/>
+                                    </a:rPr>
+                                  </m:ctrlPr>
+                                </m:dPr>
+                                <m:e>
+                                  <m:sSub>
+                                    <m:sSubPr>
+                                      <m:ctrlPr>
+                                        <a:rPr lang="en-US" sz="2200" b="0" i="1" dirty="0" smtClean="0">
+                                          <a:latin typeface="Cambria Math" panose="02040503050406030204" pitchFamily="18" charset="0"/>
+                                        </a:rPr>
+                                      </m:ctrlPr>
+                                    </m:sSubPr>
+                                    <m:e>
+                                      <m:r>
+                                        <a:rPr lang="en-US" sz="2200" b="0" dirty="0" smtClean="0">
+                                          <a:latin typeface="Cambria Math" panose="02040503050406030204" pitchFamily="18" charset="0"/>
+                                        </a:rPr>
+                                        <m:t>𝑥</m:t>
+                                      </m:r>
+                                    </m:e>
+                                    <m:sub>
+                                      <m:r>
+                                        <a:rPr lang="en-US" sz="2200" b="0" dirty="0" smtClean="0">
+                                          <a:latin typeface="Cambria Math" panose="02040503050406030204" pitchFamily="18" charset="0"/>
+                                        </a:rPr>
+                                        <m:t>1</m:t>
+                                      </m:r>
+                                    </m:sub>
+                                  </m:sSub>
+                                  <m:r>
+                                    <a:rPr lang="en-US" sz="2200" b="0" dirty="0" smtClean="0">
+                                      <a:latin typeface="Cambria Math" panose="02040503050406030204" pitchFamily="18" charset="0"/>
+                                    </a:rPr>
+                                    <m:t>, …,</m:t>
+                                  </m:r>
+                                  <m:sSub>
+                                    <m:sSubPr>
+                                      <m:ctrlPr>
+                                        <a:rPr lang="en-US" sz="2200" b="0" i="1" dirty="0" smtClean="0">
+                                          <a:latin typeface="Cambria Math" panose="02040503050406030204" pitchFamily="18" charset="0"/>
+                                        </a:rPr>
+                                      </m:ctrlPr>
+                                    </m:sSubPr>
+                                    <m:e>
+                                      <m:r>
+                                        <a:rPr lang="en-US" sz="2200" b="0" dirty="0" smtClean="0">
+                                          <a:latin typeface="Cambria Math" panose="02040503050406030204" pitchFamily="18" charset="0"/>
+                                        </a:rPr>
+                                        <m:t>𝑥</m:t>
+                                      </m:r>
+                                    </m:e>
+                                    <m:sub>
+                                      <m:r>
+                                        <a:rPr lang="en-US" sz="2200" b="0" dirty="0" smtClean="0">
+                                          <a:latin typeface="Cambria Math" panose="02040503050406030204" pitchFamily="18" charset="0"/>
+                                        </a:rPr>
+                                        <m:t>𝑛</m:t>
+                                      </m:r>
+                                    </m:sub>
+                                  </m:sSub>
+                                </m:e>
+                              </m:d>
+                            </m:oMath>
+                          </a14:m>
+                          <a:endParaRPr lang="es-ES_tradnl" sz="2200" dirty="0">
+                            <a:latin typeface="Gill Sans Nova Light" panose="020B0302020104020203" pitchFamily="34" charset="0"/>
+                          </a:endParaRPr>
+                        </a:p>
+                      </a:txBody>
+                      <a:tcPr anchor="ctr"/>
+                    </a:tc>
+                    <a:tc>
+                      <a:txBody>
+                        <a:bodyPr/>
+                        <a:lstStyle/>
+                        <a:p>
+                          <a:pPr marL="285750" lvl="0" indent="-285750">
+                            <a:buFont typeface="Arial" panose="020B0604020202020204" pitchFamily="34" charset="0"/>
+                            <a:buChar char="•"/>
+                          </a:pPr>
+                          <a:r>
+                            <a:rPr lang="es-ES_tradnl" sz="2200" dirty="0">
+                              <a:latin typeface="Gill Sans Nova Light" panose="020B0302020104020203" pitchFamily="34" charset="0"/>
+                            </a:rPr>
+                            <a:t>PCA</a:t>
+                          </a:r>
+                        </a:p>
+                        <a:p>
+                          <a:pPr marL="285750" lvl="0" indent="-285750">
+                            <a:buFont typeface="Arial" panose="020B0604020202020204" pitchFamily="34" charset="0"/>
+                            <a:buChar char="•"/>
+                          </a:pPr>
+                          <a:r>
+                            <a:rPr lang="es-ES_tradnl" sz="2200" dirty="0">
+                              <a:latin typeface="Gill Sans Nova Light" panose="020B0302020104020203" pitchFamily="34" charset="0"/>
+                            </a:rPr>
+                            <a:t>Clusters</a:t>
+                          </a:r>
+                        </a:p>
+                        <a:p>
+                          <a:endParaRPr lang="es-ES_tradnl" sz="2200" dirty="0">
+                            <a:latin typeface="Gill Sans Nova Light" panose="020B0302020104020203" pitchFamily="34" charset="0"/>
+                          </a:endParaRPr>
+                        </a:p>
+                      </a:txBody>
+                      <a:tcPr anchor="ctr">
+                        <a:lnR w="12700" cap="flat" cmpd="sng" algn="ctr">
+                          <a:solidFill>
+                            <a:schemeClr val="tx1"/>
+                          </a:solidFill>
+                          <a:prstDash val="solid"/>
+                          <a:round/>
+                          <a:headEnd type="none" w="med" len="med"/>
+                          <a:tailEnd type="none" w="med" len="med"/>
+                        </a:lnR>
+                      </a:tcPr>
+                    </a:tc>
+                    <a:extLst>
+                      <a:ext uri="{0D108BD9-81ED-4DB2-BD59-A6C34878D82A}">
+                        <a16:rowId xmlns:a16="http://schemas.microsoft.com/office/drawing/2014/main" val="2145790582"/>
+                      </a:ext>
+                    </a:extLst>
+                  </a:tr>
+                  <a:tr h="1039834">
+                    <a:tc vMerge="1">
+                      <a:txBody>
+                        <a:bodyPr/>
+                        <a:lstStyle/>
+                        <a:p>
+                          <a:pPr marL="0" marR="0" lvl="0" indent="0" algn="l" defTabSz="914400" rtl="0" eaLnBrk="1" fontAlgn="auto" latinLnBrk="0" hangingPunct="1">
+                            <a:lnSpc>
+                              <a:spcPct val="100000"/>
+                            </a:lnSpc>
+                            <a:spcBef>
+                              <a:spcPts val="0"/>
+                            </a:spcBef>
+                            <a:spcAft>
+                              <a:spcPts val="0"/>
+                            </a:spcAft>
+                            <a:buClrTx/>
+                            <a:buSzTx/>
+                            <a:buFontTx/>
+                            <a:buNone/>
+                            <a:tabLst/>
+                            <a:defRPr/>
+                          </a:pPr>
+                          <a:r>
+                            <a:rPr lang="es-ES_tradnl" sz="2200" dirty="0">
+                              <a:latin typeface="Gill Sans Nova Light" panose="020B0302020104020203" pitchFamily="34" charset="0"/>
+                            </a:rPr>
+                            <a:t>Explorativa</a:t>
+                          </a:r>
+                        </a:p>
+                        <a:p>
+                          <a:endParaRPr lang="es-ES_tradnl" sz="2200" dirty="0">
+                            <a:latin typeface="Gill Sans Nova Light" panose="020B0302020104020203" pitchFamily="34" charset="0"/>
+                          </a:endParaRPr>
+                        </a:p>
+                      </a:txBody>
+                      <a:tcPr/>
+                    </a:tc>
+                    <a:tc>
+                      <a:txBody>
+                        <a:bodyPr/>
+                        <a:lstStyle/>
+                        <a:p>
+                          <a:r>
+                            <a:rPr lang="es-ES_tradnl" sz="2200" dirty="0">
+                              <a:latin typeface="Gill Sans Nova Light" panose="020B0302020104020203" pitchFamily="34" charset="0"/>
+                            </a:rPr>
+                            <a:t>Aprendizaje Supervisado</a:t>
+                          </a:r>
+                        </a:p>
+                      </a:txBody>
+                      <a:tcPr anchor="ctr">
+                        <a:lnB w="12700" cap="flat" cmpd="sng" algn="ctr">
+                          <a:solidFill>
+                            <a:schemeClr val="tx1"/>
+                          </a:solidFill>
+                          <a:prstDash val="solid"/>
+                          <a:round/>
+                          <a:headEnd type="none" w="med" len="med"/>
+                          <a:tailEnd type="none" w="med" len="med"/>
+                        </a:lnB>
+                      </a:tcPr>
+                    </a:tc>
+                    <a:tc>
+                      <a:txBody>
+                        <a:bodyPr/>
+                        <a:lstStyle/>
+                        <a:p>
+                          <a:r>
+                            <a:rPr lang="es-ES_tradnl" sz="2200" dirty="0">
+                              <a:latin typeface="Gill Sans Nova Light" panose="020B0302020104020203" pitchFamily="34" charset="0"/>
+                            </a:rPr>
+                            <a:t>Predecir distribución de un variable de interés </a:t>
+                          </a:r>
+                        </a:p>
+                        <a:p>
+                          <a:pPr marL="285750" lvl="0" indent="-285750">
+                            <a:buFont typeface="Arial" panose="020B0604020202020204" pitchFamily="34" charset="0"/>
+                            <a:buChar char="•"/>
+                          </a:pPr>
+                          <a14:m>
+                            <m:oMath xmlns:m="http://schemas.openxmlformats.org/officeDocument/2006/math">
+                              <m:r>
+                                <a:rPr lang="es-ES_tradnl" sz="2200" b="0" dirty="0" smtClean="0">
+                                  <a:latin typeface="Cambria Math" panose="02040503050406030204" pitchFamily="18" charset="0"/>
+                                </a:rPr>
+                                <m:t>𝑌</m:t>
+                              </m:r>
+                            </m:oMath>
+                          </a14:m>
+                          <a:r>
+                            <a:rPr lang="es-ES_tradnl" sz="2200" dirty="0">
+                              <a:latin typeface="Gill Sans Nova Light" panose="020B0302020104020203" pitchFamily="34" charset="0"/>
+                            </a:rPr>
+                            <a:t> variable de interés</a:t>
+                          </a:r>
+                        </a:p>
+                        <a:p>
+                          <a:pPr marL="285750" lvl="0" indent="-285750">
+                            <a:buFont typeface="Arial" panose="020B0604020202020204" pitchFamily="34" charset="0"/>
+                            <a:buChar char="•"/>
+                          </a:pPr>
+                          <a14:m>
+                            <m:oMath xmlns:m="http://schemas.openxmlformats.org/officeDocument/2006/math">
+                              <m:r>
+                                <a:rPr lang="en-US" sz="2200" b="0" dirty="0" smtClean="0">
+                                  <a:latin typeface="Cambria Math" panose="02040503050406030204" pitchFamily="18" charset="0"/>
+                                </a:rPr>
+                                <m:t>𝑓</m:t>
+                              </m:r>
+                              <m:d>
+                                <m:dPr>
+                                  <m:ctrlPr>
+                                    <a:rPr lang="en-US" sz="2200" b="0" i="1" dirty="0" smtClean="0">
+                                      <a:latin typeface="Cambria Math" panose="02040503050406030204" pitchFamily="18" charset="0"/>
+                                    </a:rPr>
+                                  </m:ctrlPr>
+                                </m:dPr>
+                                <m:e>
+                                  <m:r>
+                                    <a:rPr lang="es-ES_tradnl" sz="2200" b="0" dirty="0" smtClean="0">
+                                      <a:latin typeface="Cambria Math" panose="02040503050406030204" pitchFamily="18" charset="0"/>
+                                    </a:rPr>
+                                    <m:t>𝑌</m:t>
+                                  </m:r>
+                                </m:e>
+                              </m:d>
+                            </m:oMath>
+                          </a14:m>
+                          <a:r>
+                            <a:rPr lang="es-ES_tradnl" sz="2200" dirty="0">
+                              <a:latin typeface="Gill Sans Nova Light" panose="020B0302020104020203" pitchFamily="34" charset="0"/>
+                            </a:rPr>
+                            <a:t> distribución de </a:t>
+                          </a:r>
+                          <a14:m>
+                            <m:oMath xmlns:m="http://schemas.openxmlformats.org/officeDocument/2006/math">
+                              <m:r>
+                                <a:rPr lang="es-ES_tradnl" sz="2200" dirty="0">
+                                  <a:latin typeface="Cambria Math" panose="02040503050406030204" pitchFamily="18" charset="0"/>
+                                </a:rPr>
+                                <m:t>𝑌</m:t>
+                              </m:r>
+                            </m:oMath>
+                          </a14:m>
+                          <a:endParaRPr lang="es-ES_tradnl" sz="2200" dirty="0">
+                            <a:latin typeface="Gill Sans Nova Light" panose="020B0302020104020203" pitchFamily="34" charset="0"/>
+                          </a:endParaRPr>
+                        </a:p>
+                      </a:txBody>
+                      <a:tcPr anchor="ctr">
+                        <a:lnB w="12700" cap="flat" cmpd="sng" algn="ctr">
+                          <a:solidFill>
+                            <a:schemeClr val="tx1"/>
+                          </a:solidFill>
+                          <a:prstDash val="solid"/>
+                          <a:round/>
+                          <a:headEnd type="none" w="med" len="med"/>
+                          <a:tailEnd type="none" w="med" len="med"/>
+                        </a:lnB>
+                      </a:tcPr>
+                    </a:tc>
+                    <a:tc>
+                      <a:txBody>
+                        <a:bodyPr/>
+                        <a:lstStyle/>
+                        <a:p>
+                          <a:pPr marL="285750" lvl="0" indent="-285750">
+                            <a:buFont typeface="Arial" panose="020B0604020202020204" pitchFamily="34" charset="0"/>
+                            <a:buChar char="•"/>
+                          </a:pPr>
+                          <a:r>
+                            <a:rPr lang="es-ES_tradnl" sz="2200" dirty="0">
+                              <a:latin typeface="Gill Sans Nova Light" panose="020B0302020104020203" pitchFamily="34" charset="0"/>
+                            </a:rPr>
+                            <a:t>Histogramas</a:t>
+                          </a:r>
+                        </a:p>
+                        <a:p>
+                          <a:pPr marL="285750" lvl="0" indent="-285750">
+                            <a:buFont typeface="Arial" panose="020B0604020202020204" pitchFamily="34" charset="0"/>
+                            <a:buChar char="•"/>
+                          </a:pPr>
+                          <a:r>
+                            <a:rPr lang="es-ES_tradnl" sz="2200" dirty="0">
+                              <a:latin typeface="Gill Sans Nova Light" panose="020B0302020104020203" pitchFamily="34" charset="0"/>
+                            </a:rPr>
+                            <a:t>Kernels</a:t>
+                          </a:r>
+                        </a:p>
+                        <a:p>
+                          <a:endParaRPr lang="es-ES_tradnl" sz="2200" dirty="0">
+                            <a:latin typeface="Gill Sans Nova Light" panose="020B0302020104020203" pitchFamily="34" charset="0"/>
+                          </a:endParaRPr>
+                        </a:p>
+                      </a:txBody>
+                      <a:tcPr anchor="ctr">
+                        <a:lnR w="12700" cap="flat" cmpd="sng" algn="ctr">
+                          <a:solidFill>
+                            <a:schemeClr val="tx1"/>
+                          </a:solidFill>
+                          <a:prstDash val="solid"/>
+                          <a:round/>
+                          <a:headEnd type="none" w="med" len="med"/>
+                          <a:tailEnd type="none" w="med" len="med"/>
+                        </a:lnR>
+                        <a:lnB w="12700" cap="flat" cmpd="sng" algn="ctr">
+                          <a:solidFill>
+                            <a:schemeClr val="tx1"/>
+                          </a:solidFill>
+                          <a:prstDash val="solid"/>
+                          <a:round/>
+                          <a:headEnd type="none" w="med" len="med"/>
+                          <a:tailEnd type="none" w="med" len="med"/>
+                        </a:lnB>
+                      </a:tcPr>
+                    </a:tc>
+                    <a:extLst>
+                      <a:ext uri="{0D108BD9-81ED-4DB2-BD59-A6C34878D82A}">
+                        <a16:rowId xmlns:a16="http://schemas.microsoft.com/office/drawing/2014/main" val="933332684"/>
+                      </a:ext>
+                    </a:extLst>
+                  </a:tr>
+                  <a:tr h="1723164">
+                    <a:tc>
+                      <a:txBody>
+                        <a:bodyPr/>
+                        <a:lstStyle/>
+                        <a:p>
+                          <a:r>
+                            <a:rPr lang="es-ES_tradnl" sz="2200" dirty="0">
+                              <a:latin typeface="Gill Sans Nova Light" panose="020B0302020104020203" pitchFamily="34" charset="0"/>
+                            </a:rPr>
+                            <a:t>Modelos y Predicción</a:t>
+                          </a:r>
+                        </a:p>
+                      </a:txBody>
+                      <a:tcPr anchor="ctr">
+                        <a:lnL w="12700" cap="flat" cmpd="sng" algn="ctr">
+                          <a:solidFill>
+                            <a:schemeClr val="tx1"/>
+                          </a:solidFill>
+                          <a:prstDash val="solid"/>
+                          <a:round/>
+                          <a:headEnd type="none" w="med" len="med"/>
+                          <a:tailEnd type="none" w="med" len="med"/>
+                        </a:lnL>
+                        <a:lnT w="12700" cap="flat" cmpd="sng" algn="ctr">
+                          <a:solidFill>
+                            <a:schemeClr val="tx1"/>
+                          </a:solidFill>
+                          <a:prstDash val="solid"/>
+                          <a:round/>
+                          <a:headEnd type="none" w="med" len="med"/>
+                          <a:tailEnd type="none" w="med" len="med"/>
+                        </a:lnT>
+                        <a:lnB w="12700" cap="flat" cmpd="sng" algn="ctr">
+                          <a:solidFill>
+                            <a:schemeClr val="tx1"/>
+                          </a:solidFill>
+                          <a:prstDash val="solid"/>
+                          <a:round/>
+                          <a:headEnd type="none" w="med" len="med"/>
+                          <a:tailEnd type="none" w="med" len="med"/>
+                        </a:lnB>
+                      </a:tcPr>
+                    </a:tc>
+                    <a:tc>
+                      <a:txBody>
+                        <a:bodyPr/>
+                        <a:lstStyle/>
+                        <a:p>
+                          <a:pPr marL="0" marR="0" lvl="0" indent="0" algn="l" defTabSz="914400" rtl="0" eaLnBrk="1" fontAlgn="auto" latinLnBrk="0" hangingPunct="1">
+                            <a:lnSpc>
+                              <a:spcPct val="100000"/>
+                            </a:lnSpc>
+                            <a:spcBef>
+                              <a:spcPts val="0"/>
+                            </a:spcBef>
+                            <a:spcAft>
+                              <a:spcPts val="0"/>
+                            </a:spcAft>
+                            <a:buClrTx/>
+                            <a:buSzTx/>
+                            <a:buFontTx/>
+                            <a:buNone/>
+                            <a:tabLst/>
+                            <a:defRPr/>
+                          </a:pPr>
+                          <a:r>
+                            <a:rPr lang="es-ES_tradnl" sz="2200" dirty="0">
+                              <a:latin typeface="Gill Sans Nova Light" panose="020B0302020104020203" pitchFamily="34" charset="0"/>
+                            </a:rPr>
+                            <a:t>Aprendizaje Supervisado</a:t>
+                          </a:r>
+                        </a:p>
+                        <a:p>
+                          <a:endParaRPr lang="es-ES_tradnl" sz="2200" dirty="0">
+                            <a:latin typeface="Gill Sans Nova Light" panose="020B0302020104020203" pitchFamily="34" charset="0"/>
+                          </a:endParaRPr>
+                        </a:p>
+                      </a:txBody>
+                      <a:tcPr anchor="ctr">
+                        <a:lnT w="12700" cap="flat" cmpd="sng" algn="ctr">
+                          <a:solidFill>
+                            <a:schemeClr val="tx1"/>
+                          </a:solidFill>
+                          <a:prstDash val="solid"/>
+                          <a:round/>
+                          <a:headEnd type="none" w="med" len="med"/>
+                          <a:tailEnd type="none" w="med" len="med"/>
+                        </a:lnT>
+                        <a:lnB w="12700" cap="flat" cmpd="sng" algn="ctr">
+                          <a:solidFill>
+                            <a:schemeClr val="tx1"/>
+                          </a:solidFill>
+                          <a:prstDash val="solid"/>
+                          <a:round/>
+                          <a:headEnd type="none" w="med" len="med"/>
+                          <a:tailEnd type="none" w="med" len="med"/>
+                        </a:lnB>
+                      </a:tcPr>
+                    </a:tc>
+                    <a:tc>
+                      <a:txBody>
+                        <a:bodyPr/>
+                        <a:lstStyle/>
+                        <a:p>
+                          <a:r>
+                            <a:rPr lang="es-ES_tradnl" sz="2200" b="1" dirty="0">
+                              <a:latin typeface="Gill Sans Nova Light" panose="020B0302020104020203" pitchFamily="34" charset="0"/>
+                            </a:rPr>
+                            <a:t>Predecir</a:t>
+                          </a:r>
+                          <a:r>
+                            <a:rPr lang="es-ES_tradnl" sz="2200" dirty="0">
+                              <a:latin typeface="Gill Sans Nova Light" panose="020B0302020104020203" pitchFamily="34" charset="0"/>
+                            </a:rPr>
+                            <a:t>: </a:t>
+                          </a:r>
+                          <a14:m>
+                            <m:oMath xmlns:m="http://schemas.openxmlformats.org/officeDocument/2006/math">
+                              <m:r>
+                                <a:rPr lang="es-ES_tradnl" sz="2200" b="0" dirty="0" smtClean="0">
+                                  <a:latin typeface="Cambria Math" panose="02040503050406030204" pitchFamily="18" charset="0"/>
+                                </a:rPr>
+                                <m:t>𝑌</m:t>
+                              </m:r>
+                              <m:r>
+                                <a:rPr lang="es-ES_tradnl" sz="2200" b="0" dirty="0" smtClean="0">
+                                  <a:latin typeface="Cambria Math" panose="02040503050406030204" pitchFamily="18" charset="0"/>
+                                </a:rPr>
+                                <m:t>= (</m:t>
+                              </m:r>
+                              <m:sSub>
+                                <m:sSubPr>
+                                  <m:ctrlPr>
+                                    <a:rPr lang="en-US" sz="2200" i="1" dirty="0" smtClean="0">
+                                      <a:latin typeface="Cambria Math" panose="02040503050406030204" pitchFamily="18" charset="0"/>
+                                    </a:rPr>
+                                  </m:ctrlPr>
+                                </m:sSubPr>
+                                <m:e>
+                                  <m:r>
+                                    <a:rPr lang="es-ES_tradnl" sz="2200" b="0" dirty="0" smtClean="0">
+                                      <a:latin typeface="Cambria Math" panose="02040503050406030204" pitchFamily="18" charset="0"/>
+                                    </a:rPr>
+                                    <m:t>𝑌</m:t>
+                                  </m:r>
+                                </m:e>
+                                <m:sub>
+                                  <m:r>
+                                    <a:rPr lang="en-US" sz="2200" b="0" dirty="0" smtClean="0">
+                                      <a:latin typeface="Cambria Math" panose="02040503050406030204" pitchFamily="18" charset="0"/>
+                                    </a:rPr>
+                                    <m:t>1</m:t>
+                                  </m:r>
+                                </m:sub>
+                              </m:sSub>
+                              <m:r>
+                                <a:rPr lang="en-US" sz="2200" b="0" dirty="0" smtClean="0">
+                                  <a:latin typeface="Cambria Math" panose="02040503050406030204" pitchFamily="18" charset="0"/>
+                                </a:rPr>
+                                <m:t>,…, </m:t>
+                              </m:r>
+                              <m:sSub>
+                                <m:sSubPr>
+                                  <m:ctrlPr>
+                                    <a:rPr lang="en-US" sz="2200" i="1" dirty="0" smtClean="0">
+                                      <a:latin typeface="Cambria Math" panose="02040503050406030204" pitchFamily="18" charset="0"/>
+                                    </a:rPr>
+                                  </m:ctrlPr>
+                                </m:sSubPr>
+                                <m:e>
+                                  <m:r>
+                                    <a:rPr lang="en-US" sz="2200" b="0" dirty="0" smtClean="0">
+                                      <a:latin typeface="Cambria Math" panose="02040503050406030204" pitchFamily="18" charset="0"/>
+                                    </a:rPr>
+                                    <m:t>𝑌</m:t>
+                                  </m:r>
+                                </m:e>
+                                <m:sub>
+                                  <m:r>
+                                    <a:rPr lang="en-US" sz="2200" b="0" dirty="0" smtClean="0">
+                                      <a:latin typeface="Cambria Math" panose="02040503050406030204" pitchFamily="18" charset="0"/>
+                                    </a:rPr>
+                                    <m:t>𝑛</m:t>
+                                  </m:r>
+                                </m:sub>
+                              </m:sSub>
+                              <m:r>
+                                <a:rPr lang="es-ES_tradnl" sz="2200" b="0" dirty="0" smtClean="0">
+                                  <a:latin typeface="Cambria Math" panose="02040503050406030204" pitchFamily="18" charset="0"/>
+                                </a:rPr>
+                                <m:t>)</m:t>
+                              </m:r>
+                            </m:oMath>
+                          </a14:m>
+                          <a:endParaRPr lang="es-ES_tradnl" sz="2200" dirty="0">
+                            <a:latin typeface="Gill Sans Nova Light" panose="020B0302020104020203" pitchFamily="34" charset="0"/>
+                          </a:endParaRPr>
+                        </a:p>
+                        <a:p>
+                          <a:r>
+                            <a:rPr lang="es-ES_tradnl" sz="2200" dirty="0">
+                              <a:latin typeface="Gill Sans Nova Light" panose="020B0302020104020203" pitchFamily="34" charset="0"/>
+                            </a:rPr>
+                            <a:t>Inputs: </a:t>
+                          </a:r>
+                          <a14:m>
+                            <m:oMath xmlns:m="http://schemas.openxmlformats.org/officeDocument/2006/math">
+                              <m:sSup>
+                                <m:sSupPr>
+                                  <m:ctrlPr>
+                                    <a:rPr lang="en-US" sz="2200" b="0" i="1" dirty="0" smtClean="0">
+                                      <a:latin typeface="Cambria Math" panose="02040503050406030204" pitchFamily="18" charset="0"/>
+                                    </a:rPr>
+                                  </m:ctrlPr>
+                                </m:sSupPr>
+                                <m:e>
+                                  <m:r>
+                                    <a:rPr lang="en-US" sz="2200" b="0" dirty="0" smtClean="0">
+                                      <a:latin typeface="Cambria Math" panose="02040503050406030204" pitchFamily="18" charset="0"/>
+                                    </a:rPr>
+                                    <m:t>𝑋</m:t>
+                                  </m:r>
+                                </m:e>
+                                <m:sup>
+                                  <m:r>
+                                    <a:rPr lang="en-US" sz="2200" b="0" dirty="0" smtClean="0">
+                                      <a:latin typeface="Cambria Math" panose="02040503050406030204" pitchFamily="18" charset="0"/>
+                                    </a:rPr>
+                                    <m:t>′</m:t>
+                                  </m:r>
+                                </m:sup>
+                              </m:sSup>
+                              <m:r>
+                                <a:rPr lang="es-ES_tradnl" sz="2200" b="0" dirty="0" smtClean="0">
+                                  <a:latin typeface="Cambria Math" panose="02040503050406030204" pitchFamily="18" charset="0"/>
+                                </a:rPr>
+                                <m:t>= (</m:t>
+                              </m:r>
+                              <m:sSub>
+                                <m:sSubPr>
+                                  <m:ctrlPr>
+                                    <a:rPr lang="en-US" sz="2200" i="1" dirty="0" smtClean="0">
+                                      <a:latin typeface="Cambria Math" panose="02040503050406030204" pitchFamily="18" charset="0"/>
+                                    </a:rPr>
+                                  </m:ctrlPr>
+                                </m:sSubPr>
+                                <m:e>
+                                  <m:r>
+                                    <a:rPr lang="en-US" sz="2200" b="0" dirty="0" smtClean="0">
+                                      <a:latin typeface="Cambria Math" panose="02040503050406030204" pitchFamily="18" charset="0"/>
+                                    </a:rPr>
+                                    <m:t>𝑋</m:t>
+                                  </m:r>
+                                </m:e>
+                                <m:sub>
+                                  <m:r>
+                                    <a:rPr lang="en-US" sz="2200" b="0" dirty="0" smtClean="0">
+                                      <a:latin typeface="Cambria Math" panose="02040503050406030204" pitchFamily="18" charset="0"/>
+                                    </a:rPr>
+                                    <m:t>1</m:t>
+                                  </m:r>
+                                </m:sub>
+                              </m:sSub>
+                              <m:r>
+                                <a:rPr lang="en-US" sz="2200" b="0" dirty="0" smtClean="0">
+                                  <a:latin typeface="Cambria Math" panose="02040503050406030204" pitchFamily="18" charset="0"/>
+                                </a:rPr>
+                                <m:t>,…, </m:t>
+                              </m:r>
+                              <m:sSub>
+                                <m:sSubPr>
+                                  <m:ctrlPr>
+                                    <a:rPr lang="en-US" sz="2200" i="1" dirty="0" smtClean="0">
+                                      <a:latin typeface="Cambria Math" panose="02040503050406030204" pitchFamily="18" charset="0"/>
+                                    </a:rPr>
+                                  </m:ctrlPr>
+                                </m:sSubPr>
+                                <m:e>
+                                  <m:r>
+                                    <a:rPr lang="en-US" sz="2200" b="0" dirty="0" smtClean="0">
+                                      <a:latin typeface="Cambria Math" panose="02040503050406030204" pitchFamily="18" charset="0"/>
+                                    </a:rPr>
+                                    <m:t>𝑋</m:t>
+                                  </m:r>
+                                </m:e>
+                                <m:sub>
+                                  <m:r>
+                                    <a:rPr lang="en-US" sz="2200" b="0" dirty="0" smtClean="0">
+                                      <a:latin typeface="Cambria Math" panose="02040503050406030204" pitchFamily="18" charset="0"/>
+                                    </a:rPr>
+                                    <m:t>𝑝</m:t>
+                                  </m:r>
+                                </m:sub>
+                              </m:sSub>
+                              <m:r>
+                                <a:rPr lang="es-ES_tradnl" sz="2200" b="0" dirty="0" smtClean="0">
+                                  <a:latin typeface="Cambria Math" panose="02040503050406030204" pitchFamily="18" charset="0"/>
+                                </a:rPr>
+                                <m:t>)</m:t>
+                              </m:r>
+                            </m:oMath>
+                          </a14:m>
+                          <a:endParaRPr lang="es-ES_tradnl" sz="2200" dirty="0">
+                            <a:latin typeface="Gill Sans Nova Light" panose="020B0302020104020203" pitchFamily="34" charset="0"/>
+                          </a:endParaRPr>
+                        </a:p>
+                        <a:p>
+                          <a:endParaRPr lang="es-ES_tradnl" sz="1200" dirty="0">
+                            <a:latin typeface="Gill Sans Nova Light" panose="020B0302020104020203" pitchFamily="34" charset="0"/>
+                          </a:endParaRPr>
+                        </a:p>
+                        <a:p>
+                          <a:r>
+                            <a:rPr lang="es-ES_tradnl" sz="2200" dirty="0">
+                              <a:latin typeface="Gill Sans Nova Light" panose="020B0302020104020203" pitchFamily="34" charset="0"/>
+                            </a:rPr>
+                            <a:t> </a:t>
+                          </a:r>
+                          <a14:m>
+                            <m:oMath xmlns:m="http://schemas.openxmlformats.org/officeDocument/2006/math">
+                              <m:r>
+                                <a:rPr lang="es-ES_tradnl" sz="2200" b="0" dirty="0" smtClean="0">
+                                  <a:latin typeface="Cambria Math" panose="02040503050406030204" pitchFamily="18" charset="0"/>
+                                </a:rPr>
+                                <m:t>𝑌</m:t>
+                              </m:r>
+                            </m:oMath>
+                          </a14:m>
+                          <a:r>
+                            <a:rPr lang="es-ES_tradnl" sz="2200" dirty="0">
+                              <a:latin typeface="Gill Sans Nova Light" panose="020B0302020104020203" pitchFamily="34" charset="0"/>
+                            </a:rPr>
+                            <a:t> cuantitativo -&gt;</a:t>
+                          </a:r>
+                          <a:r>
+                            <a:rPr lang="es-ES_tradnl" sz="2200" baseline="0" dirty="0">
+                              <a:latin typeface="Gill Sans Nova Light" panose="020B0302020104020203" pitchFamily="34" charset="0"/>
+                            </a:rPr>
+                            <a:t> Regresión</a:t>
+                          </a:r>
+                        </a:p>
+                        <a:p>
+                          <a:r>
+                            <a:rPr lang="es-ES_tradnl" sz="2200" dirty="0">
+                              <a:latin typeface="Gill Sans Nova Light" panose="020B0302020104020203" pitchFamily="34" charset="0"/>
+                            </a:rPr>
+                            <a:t> </a:t>
+                          </a:r>
+                          <a14:m>
+                            <m:oMath xmlns:m="http://schemas.openxmlformats.org/officeDocument/2006/math">
+                              <m:r>
+                                <a:rPr lang="es-ES_tradnl" sz="2200" b="0" dirty="0" smtClean="0">
+                                  <a:latin typeface="Cambria Math" panose="02040503050406030204" pitchFamily="18" charset="0"/>
+                                </a:rPr>
+                                <m:t>𝑌</m:t>
+                              </m:r>
+                            </m:oMath>
+                          </a14:m>
+                          <a:r>
+                            <a:rPr lang="es-ES_tradnl" sz="2200" dirty="0">
+                              <a:latin typeface="Gill Sans Nova Light" panose="020B0302020104020203" pitchFamily="34" charset="0"/>
+                            </a:rPr>
+                            <a:t> binaria</a:t>
+                          </a:r>
+                          <a:r>
+                            <a:rPr lang="es-ES_tradnl" sz="2200" baseline="0" dirty="0">
+                              <a:latin typeface="Gill Sans Nova Light" panose="020B0302020104020203" pitchFamily="34" charset="0"/>
+                            </a:rPr>
+                            <a:t> o categórica -&gt; Clasificación</a:t>
+                          </a:r>
+                          <a:endParaRPr lang="es-ES_tradnl" sz="2200" dirty="0">
+                            <a:latin typeface="Gill Sans Nova Light" panose="020B0302020104020203" pitchFamily="34" charset="0"/>
+                          </a:endParaRPr>
+                        </a:p>
+                      </a:txBody>
+                      <a:tcPr anchor="ctr">
+                        <a:lnT w="12700" cap="flat" cmpd="sng" algn="ctr">
+                          <a:solidFill>
+                            <a:schemeClr val="tx1"/>
+                          </a:solidFill>
+                          <a:prstDash val="solid"/>
+                          <a:round/>
+                          <a:headEnd type="none" w="med" len="med"/>
+                          <a:tailEnd type="none" w="med" len="med"/>
+                        </a:lnT>
+                        <a:lnB w="12700" cap="flat" cmpd="sng" algn="ctr">
+                          <a:solidFill>
+                            <a:schemeClr val="tx1"/>
+                          </a:solidFill>
+                          <a:prstDash val="solid"/>
+                          <a:round/>
+                          <a:headEnd type="none" w="med" len="med"/>
+                          <a:tailEnd type="none" w="med" len="med"/>
+                        </a:lnB>
+                      </a:tcPr>
+                    </a:tc>
+                    <a:tc>
+                      <a:txBody>
+                        <a:bodyPr/>
+                        <a:lstStyle/>
+                        <a:p>
+                          <a:pPr marL="285750" indent="-285750">
+                            <a:buFont typeface="Arial" panose="020B0604020202020204" pitchFamily="34" charset="0"/>
+                            <a:buChar char="•"/>
+                          </a:pPr>
+                          <a:r>
+                            <a:rPr lang="es-ES_tradnl" sz="2200" dirty="0">
+                              <a:latin typeface="Gill Sans Nova Light" panose="020B0302020104020203" pitchFamily="34" charset="0"/>
+                            </a:rPr>
+                            <a:t>MCO</a:t>
+                          </a:r>
+                        </a:p>
+                        <a:p>
+                          <a:pPr marL="285750" indent="-285750">
+                            <a:buFont typeface="Arial" panose="020B0604020202020204" pitchFamily="34" charset="0"/>
+                            <a:buChar char="•"/>
+                          </a:pPr>
+                          <a:r>
+                            <a:rPr lang="es-ES_tradnl" sz="2200" dirty="0" err="1">
+                              <a:latin typeface="Gill Sans Nova Light" panose="020B0302020104020203" pitchFamily="34" charset="0"/>
+                            </a:rPr>
+                            <a:t>Logit</a:t>
+                          </a:r>
+                          <a:r>
+                            <a:rPr lang="es-ES_tradnl" sz="2200" dirty="0">
+                              <a:latin typeface="Gill Sans Nova Light" panose="020B0302020104020203" pitchFamily="34" charset="0"/>
+                            </a:rPr>
+                            <a:t>, LDA, QDA, KNN</a:t>
+                          </a:r>
+                        </a:p>
+                        <a:p>
+                          <a:pPr marL="285750" indent="-285750">
+                            <a:buFont typeface="Arial" panose="020B0604020202020204" pitchFamily="34" charset="0"/>
+                            <a:buChar char="•"/>
+                          </a:pPr>
+                          <a:r>
+                            <a:rPr lang="es-ES_tradnl" sz="2200" dirty="0">
+                              <a:latin typeface="Gill Sans Nova Light" panose="020B0302020104020203" pitchFamily="34" charset="0"/>
+                            </a:rPr>
+                            <a:t>Y otros…</a:t>
+                          </a:r>
+                        </a:p>
+                        <a:p>
+                          <a:pPr marL="285750" indent="-285750">
+                            <a:buFont typeface="Arial" panose="020B0604020202020204" pitchFamily="34" charset="0"/>
+                            <a:buChar char="•"/>
+                          </a:pPr>
+                          <a:endParaRPr lang="es-ES_tradnl" sz="2200" dirty="0">
+                            <a:latin typeface="Gill Sans Nova Light" panose="020B0302020104020203" pitchFamily="34" charset="0"/>
+                          </a:endParaRPr>
+                        </a:p>
+                      </a:txBody>
+                      <a:tcPr anchor="ctr">
+                        <a:lnR w="12700" cap="flat" cmpd="sng" algn="ctr">
+                          <a:solidFill>
+                            <a:schemeClr val="tx1"/>
+                          </a:solidFill>
+                          <a:prstDash val="solid"/>
+                          <a:round/>
+                          <a:headEnd type="none" w="med" len="med"/>
+                          <a:tailEnd type="none" w="med" len="med"/>
+                        </a:lnR>
+                        <a:lnT w="12700" cap="flat" cmpd="sng" algn="ctr">
+                          <a:solidFill>
+                            <a:schemeClr val="tx1"/>
+                          </a:solidFill>
+                          <a:prstDash val="solid"/>
+                          <a:round/>
+                          <a:headEnd type="none" w="med" len="med"/>
+                          <a:tailEnd type="none" w="med" len="med"/>
+                        </a:lnT>
+                        <a:lnB w="12700" cap="flat" cmpd="sng" algn="ctr">
+                          <a:solidFill>
+                            <a:schemeClr val="tx1"/>
+                          </a:solidFill>
+                          <a:prstDash val="solid"/>
+                          <a:round/>
+                          <a:headEnd type="none" w="med" len="med"/>
+                          <a:tailEnd type="none" w="med" len="med"/>
+                        </a:lnB>
+                      </a:tcPr>
+                    </a:tc>
+                    <a:extLst>
+                      <a:ext uri="{0D108BD9-81ED-4DB2-BD59-A6C34878D82A}">
+                        <a16:rowId xmlns:a16="http://schemas.microsoft.com/office/drawing/2014/main" val="715415779"/>
+                      </a:ext>
+                    </a:extLst>
+                  </a:tr>
+                </a:tbl>
+              </a:graphicData>
+            </a:graphic>
+          </p:graphicFrame>
+        </mc:Choice>
+        <mc:Fallback xmlns="">
+          <p:graphicFrame>
+            <p:nvGraphicFramePr>
+              <p:cNvPr id="4" name="Content Placeholder 3">
+                <a:extLst>
+                  <a:ext uri="{FF2B5EF4-FFF2-40B4-BE49-F238E27FC236}">
+                    <a16:creationId xmlns:a16="http://schemas.microsoft.com/office/drawing/2014/main" id="{08559E05-DBC3-8301-D584-275312741E4C}"/>
+                  </a:ext>
+                </a:extLst>
+              </p:cNvPr>
+              <p:cNvGraphicFramePr>
+                <a:graphicFrameLocks noGrp="1"/>
+              </p:cNvGraphicFramePr>
+              <p:nvPr>
+                <p:ph idx="1"/>
+                <p:extLst>
+                  <p:ext uri="{D42A27DB-BD31-4B8C-83A1-F6EECF244321}">
+                    <p14:modId xmlns:p14="http://schemas.microsoft.com/office/powerpoint/2010/main" val="3431141794"/>
+                  </p:ext>
+                </p:extLst>
+              </p:nvPr>
+            </p:nvGraphicFramePr>
+            <p:xfrm>
+              <a:off x="617621" y="1496447"/>
+              <a:ext cx="10956757" cy="4724400"/>
+            </p:xfrm>
+            <a:graphic>
+              <a:graphicData uri="http://schemas.openxmlformats.org/drawingml/2006/table">
+                <a:tbl>
+                  <a:tblPr firstRow="1" bandRow="1">
+                    <a:tableStyleId>{F2DE63D5-997A-4646-A377-4702673A728D}</a:tableStyleId>
+                  </a:tblPr>
+                  <a:tblGrid>
+                    <a:gridCol w="1540043">
+                      <a:extLst>
+                        <a:ext uri="{9D8B030D-6E8A-4147-A177-3AD203B41FA5}">
+                          <a16:colId xmlns:a16="http://schemas.microsoft.com/office/drawing/2014/main" val="1029663632"/>
+                        </a:ext>
+                      </a:extLst>
+                    </a:gridCol>
+                    <a:gridCol w="1915804">
+                      <a:extLst>
+                        <a:ext uri="{9D8B030D-6E8A-4147-A177-3AD203B41FA5}">
+                          <a16:colId xmlns:a16="http://schemas.microsoft.com/office/drawing/2014/main" val="3989478329"/>
+                        </a:ext>
+                      </a:extLst>
+                    </a:gridCol>
+                    <a:gridCol w="5265262">
+                      <a:extLst>
+                        <a:ext uri="{9D8B030D-6E8A-4147-A177-3AD203B41FA5}">
+                          <a16:colId xmlns:a16="http://schemas.microsoft.com/office/drawing/2014/main" val="1368382703"/>
+                        </a:ext>
+                      </a:extLst>
+                    </a:gridCol>
+                    <a:gridCol w="2235648">
+                      <a:extLst>
+                        <a:ext uri="{9D8B030D-6E8A-4147-A177-3AD203B41FA5}">
+                          <a16:colId xmlns:a16="http://schemas.microsoft.com/office/drawing/2014/main" val="995975348"/>
+                        </a:ext>
+                      </a:extLst>
+                    </a:gridCol>
+                  </a:tblGrid>
+                  <a:tr h="762000">
+                    <a:tc>
+                      <a:txBody>
+                        <a:bodyPr/>
+                        <a:lstStyle/>
+                        <a:p>
+                          <a:pPr algn="ctr"/>
+                          <a:r>
+                            <a:rPr lang="es-ES_tradnl" sz="2200" dirty="0">
+                              <a:latin typeface="Gill Sans Nova Light" panose="020B0302020104020203" pitchFamily="34" charset="0"/>
+                            </a:rPr>
+                            <a:t>Etapas</a:t>
+                          </a:r>
+                        </a:p>
+                      </a:txBody>
+                      <a:tcPr anchor="ctr">
+                        <a:lnL w="12700" cap="flat" cmpd="sng" algn="ctr">
+                          <a:solidFill>
+                            <a:schemeClr val="tx1"/>
+                          </a:solidFill>
+                          <a:prstDash val="solid"/>
+                          <a:round/>
+                          <a:headEnd type="none" w="med" len="med"/>
+                          <a:tailEnd type="none" w="med" len="med"/>
+                        </a:lnL>
+                        <a:lnT w="12700" cap="flat" cmpd="sng" algn="ctr">
+                          <a:solidFill>
+                            <a:schemeClr val="tx1"/>
+                          </a:solidFill>
+                          <a:prstDash val="solid"/>
+                          <a:round/>
+                          <a:headEnd type="none" w="med" len="med"/>
+                          <a:tailEnd type="none" w="med" len="med"/>
+                        </a:lnT>
+                        <a:solidFill>
+                          <a:srgbClr val="002060"/>
+                        </a:solidFill>
+                      </a:tcPr>
+                    </a:tc>
+                    <a:tc>
+                      <a:txBody>
+                        <a:bodyPr/>
+                        <a:lstStyle/>
+                        <a:p>
+                          <a:pPr algn="ctr"/>
+                          <a:r>
+                            <a:rPr lang="es-ES_tradnl" sz="2200" dirty="0">
+                              <a:latin typeface="Gill Sans Nova Light" panose="020B0302020104020203" pitchFamily="34" charset="0"/>
+                            </a:rPr>
+                            <a:t>Tipo de Aprendizaje</a:t>
+                          </a:r>
+                        </a:p>
+                      </a:txBody>
+                      <a:tcPr anchor="ctr">
+                        <a:lnT w="12700" cap="flat" cmpd="sng" algn="ctr">
+                          <a:solidFill>
+                            <a:schemeClr val="tx1"/>
+                          </a:solidFill>
+                          <a:prstDash val="solid"/>
+                          <a:round/>
+                          <a:headEnd type="none" w="med" len="med"/>
+                          <a:tailEnd type="none" w="med" len="med"/>
+                        </a:lnT>
+                        <a:solidFill>
+                          <a:srgbClr val="002060"/>
+                        </a:solidFill>
+                      </a:tcPr>
+                    </a:tc>
+                    <a:tc>
+                      <a:txBody>
+                        <a:bodyPr/>
+                        <a:lstStyle/>
+                        <a:p>
+                          <a:pPr algn="ctr"/>
+                          <a:r>
+                            <a:rPr lang="es-ES_tradnl" sz="2200" dirty="0">
+                              <a:latin typeface="Gill Sans Nova Light" panose="020B0302020104020203" pitchFamily="34" charset="0"/>
+                            </a:rPr>
+                            <a:t>Idea</a:t>
+                          </a:r>
+                        </a:p>
+                      </a:txBody>
+                      <a:tcPr anchor="ctr">
+                        <a:lnT w="12700" cap="flat" cmpd="sng" algn="ctr">
+                          <a:solidFill>
+                            <a:schemeClr val="tx1"/>
+                          </a:solidFill>
+                          <a:prstDash val="solid"/>
+                          <a:round/>
+                          <a:headEnd type="none" w="med" len="med"/>
+                          <a:tailEnd type="none" w="med" len="med"/>
+                        </a:lnT>
+                        <a:solidFill>
+                          <a:srgbClr val="002060"/>
+                        </a:solidFill>
+                      </a:tcPr>
+                    </a:tc>
+                    <a:tc>
+                      <a:txBody>
+                        <a:bodyPr/>
+                        <a:lstStyle/>
+                        <a:p>
+                          <a:pPr algn="ctr"/>
+                          <a:r>
+                            <a:rPr lang="es-ES_tradnl" sz="2200" dirty="0">
+                              <a:latin typeface="Gill Sans Nova Light" panose="020B0302020104020203" pitchFamily="34" charset="0"/>
+                            </a:rPr>
+                            <a:t>Métodos</a:t>
+                          </a:r>
+                        </a:p>
+                      </a:txBody>
+                      <a:tcPr anchor="ctr">
+                        <a:lnR w="12700" cap="flat" cmpd="sng" algn="ctr">
+                          <a:solidFill>
+                            <a:schemeClr val="tx1"/>
+                          </a:solidFill>
+                          <a:prstDash val="solid"/>
+                          <a:round/>
+                          <a:headEnd type="none" w="med" len="med"/>
+                          <a:tailEnd type="none" w="med" len="med"/>
+                        </a:lnR>
+                        <a:lnT w="12700" cap="flat" cmpd="sng" algn="ctr">
+                          <a:solidFill>
+                            <a:schemeClr val="tx1"/>
+                          </a:solidFill>
+                          <a:prstDash val="solid"/>
+                          <a:round/>
+                          <a:headEnd type="none" w="med" len="med"/>
+                          <a:tailEnd type="none" w="med" len="med"/>
+                        </a:lnT>
+                        <a:solidFill>
+                          <a:srgbClr val="002060"/>
+                        </a:solidFill>
+                      </a:tcPr>
+                    </a:tc>
+                    <a:extLst>
+                      <a:ext uri="{0D108BD9-81ED-4DB2-BD59-A6C34878D82A}">
+                        <a16:rowId xmlns:a16="http://schemas.microsoft.com/office/drawing/2014/main" val="11467572"/>
+                      </a:ext>
+                    </a:extLst>
+                  </a:tr>
+                  <a:tr h="1097280">
+                    <a:tc rowSpan="2">
+                      <a:txBody>
+                        <a:bodyPr/>
+                        <a:lstStyle/>
+                        <a:p>
+                          <a:r>
+                            <a:rPr lang="es-ES_tradnl" sz="2200" dirty="0">
+                              <a:latin typeface="Gill Sans Nova Light" panose="020B0302020104020203" pitchFamily="34" charset="0"/>
+                            </a:rPr>
+                            <a:t>Explorativa</a:t>
+                          </a:r>
+                        </a:p>
+                        <a:p>
+                          <a:pPr marL="0" marR="0" lvl="0" indent="0" algn="l" defTabSz="914400" rtl="0" eaLnBrk="1" fontAlgn="auto" latinLnBrk="0" hangingPunct="1">
+                            <a:lnSpc>
+                              <a:spcPct val="100000"/>
+                            </a:lnSpc>
+                            <a:spcBef>
+                              <a:spcPts val="0"/>
+                            </a:spcBef>
+                            <a:spcAft>
+                              <a:spcPts val="0"/>
+                            </a:spcAft>
+                            <a:buClrTx/>
+                            <a:buSzTx/>
+                            <a:buFontTx/>
+                            <a:buNone/>
+                            <a:tabLst/>
+                            <a:defRPr/>
+                          </a:pPr>
+                          <a:endParaRPr lang="es-ES_tradnl" sz="2200" dirty="0">
+                            <a:latin typeface="Gill Sans Nova Light" panose="020B0302020104020203" pitchFamily="34" charset="0"/>
+                          </a:endParaRPr>
+                        </a:p>
+                        <a:p>
+                          <a:endParaRPr lang="es-ES_tradnl" sz="2200" dirty="0">
+                            <a:latin typeface="Gill Sans Nova Light" panose="020B0302020104020203" pitchFamily="34" charset="0"/>
+                          </a:endParaRPr>
+                        </a:p>
+                      </a:txBody>
+                      <a:tcPr anchor="ctr">
+                        <a:lnL w="12700" cap="flat" cmpd="sng" algn="ctr">
+                          <a:solidFill>
+                            <a:schemeClr val="tx1"/>
+                          </a:solidFill>
+                          <a:prstDash val="solid"/>
+                          <a:round/>
+                          <a:headEnd type="none" w="med" len="med"/>
+                          <a:tailEnd type="none" w="med" len="med"/>
+                        </a:lnL>
+                        <a:lnB w="12700" cap="flat" cmpd="sng" algn="ctr">
+                          <a:solidFill>
+                            <a:schemeClr val="tx1"/>
+                          </a:solidFill>
+                          <a:prstDash val="solid"/>
+                          <a:round/>
+                          <a:headEnd type="none" w="med" len="med"/>
+                          <a:tailEnd type="none" w="med" len="med"/>
+                        </a:lnB>
+                      </a:tcPr>
+                    </a:tc>
+                    <a:tc>
+                      <a:txBody>
+                        <a:bodyPr/>
+                        <a:lstStyle/>
+                        <a:p>
+                          <a:r>
+                            <a:rPr lang="es-ES_tradnl" sz="2200" dirty="0">
+                              <a:latin typeface="Gill Sans Nova Light" panose="020B0302020104020203" pitchFamily="34" charset="0"/>
+                            </a:rPr>
+                            <a:t>Aprendizaje No Supervisado</a:t>
+                          </a:r>
+                        </a:p>
+                      </a:txBody>
+                      <a:tcPr anchor="ctr"/>
+                    </a:tc>
+                    <a:tc>
+                      <a:txBody>
+                        <a:bodyPr/>
+                        <a:lstStyle/>
+                        <a:p>
+                          <a:endParaRPr lang="en-US"/>
+                        </a:p>
+                      </a:txBody>
+                      <a:tcPr anchor="ctr">
+                        <a:blipFill>
+                          <a:blip r:embed="rId2"/>
+                          <a:stretch>
+                            <a:fillRect l="-65783" t="-72414" r="-42651" b="-265517"/>
+                          </a:stretch>
+                        </a:blipFill>
+                      </a:tcPr>
+                    </a:tc>
+                    <a:tc>
+                      <a:txBody>
+                        <a:bodyPr/>
+                        <a:lstStyle/>
+                        <a:p>
+                          <a:pPr marL="285750" lvl="0" indent="-285750">
+                            <a:buFont typeface="Arial" panose="020B0604020202020204" pitchFamily="34" charset="0"/>
+                            <a:buChar char="•"/>
+                          </a:pPr>
+                          <a:r>
+                            <a:rPr lang="es-ES_tradnl" sz="2200" dirty="0">
+                              <a:latin typeface="Gill Sans Nova Light" panose="020B0302020104020203" pitchFamily="34" charset="0"/>
+                            </a:rPr>
+                            <a:t>PCA</a:t>
+                          </a:r>
+                        </a:p>
+                        <a:p>
+                          <a:pPr marL="285750" lvl="0" indent="-285750">
+                            <a:buFont typeface="Arial" panose="020B0604020202020204" pitchFamily="34" charset="0"/>
+                            <a:buChar char="•"/>
+                          </a:pPr>
+                          <a:r>
+                            <a:rPr lang="es-ES_tradnl" sz="2200" dirty="0">
+                              <a:latin typeface="Gill Sans Nova Light" panose="020B0302020104020203" pitchFamily="34" charset="0"/>
+                            </a:rPr>
+                            <a:t>Clusters</a:t>
+                          </a:r>
+                        </a:p>
+                        <a:p>
+                          <a:endParaRPr lang="es-ES_tradnl" sz="2200" dirty="0">
+                            <a:latin typeface="Gill Sans Nova Light" panose="020B0302020104020203" pitchFamily="34" charset="0"/>
+                          </a:endParaRPr>
+                        </a:p>
+                      </a:txBody>
+                      <a:tcPr anchor="ctr">
+                        <a:lnR w="12700" cap="flat" cmpd="sng" algn="ctr">
+                          <a:solidFill>
+                            <a:schemeClr val="tx1"/>
+                          </a:solidFill>
+                          <a:prstDash val="solid"/>
+                          <a:round/>
+                          <a:headEnd type="none" w="med" len="med"/>
+                          <a:tailEnd type="none" w="med" len="med"/>
+                        </a:lnR>
+                      </a:tcPr>
+                    </a:tc>
+                    <a:extLst>
+                      <a:ext uri="{0D108BD9-81ED-4DB2-BD59-A6C34878D82A}">
+                        <a16:rowId xmlns:a16="http://schemas.microsoft.com/office/drawing/2014/main" val="2145790582"/>
+                      </a:ext>
+                    </a:extLst>
+                  </a:tr>
+                  <a:tr h="1097280">
+                    <a:tc vMerge="1">
+                      <a:txBody>
+                        <a:bodyPr/>
+                        <a:lstStyle/>
+                        <a:p>
+                          <a:pPr marL="0" marR="0" lvl="0" indent="0" algn="l" defTabSz="914400" rtl="0" eaLnBrk="1" fontAlgn="auto" latinLnBrk="0" hangingPunct="1">
+                            <a:lnSpc>
+                              <a:spcPct val="100000"/>
+                            </a:lnSpc>
+                            <a:spcBef>
+                              <a:spcPts val="0"/>
+                            </a:spcBef>
+                            <a:spcAft>
+                              <a:spcPts val="0"/>
+                            </a:spcAft>
+                            <a:buClrTx/>
+                            <a:buSzTx/>
+                            <a:buFontTx/>
+                            <a:buNone/>
+                            <a:tabLst/>
+                            <a:defRPr/>
+                          </a:pPr>
+                          <a:r>
+                            <a:rPr lang="es-ES_tradnl" sz="2200" dirty="0">
+                              <a:latin typeface="Gill Sans Nova Light" panose="020B0302020104020203" pitchFamily="34" charset="0"/>
+                            </a:rPr>
+                            <a:t>Explorativa</a:t>
+                          </a:r>
+                        </a:p>
+                        <a:p>
+                          <a:endParaRPr lang="es-ES_tradnl" sz="2200" dirty="0">
+                            <a:latin typeface="Gill Sans Nova Light" panose="020B0302020104020203" pitchFamily="34" charset="0"/>
+                          </a:endParaRPr>
+                        </a:p>
+                      </a:txBody>
+                      <a:tcPr/>
+                    </a:tc>
+                    <a:tc>
+                      <a:txBody>
+                        <a:bodyPr/>
+                        <a:lstStyle/>
+                        <a:p>
+                          <a:r>
+                            <a:rPr lang="es-ES_tradnl" sz="2200" dirty="0">
+                              <a:latin typeface="Gill Sans Nova Light" panose="020B0302020104020203" pitchFamily="34" charset="0"/>
+                            </a:rPr>
+                            <a:t>Aprendizaje Supervisado</a:t>
+                          </a:r>
+                        </a:p>
+                      </a:txBody>
+                      <a:tcPr anchor="ctr">
+                        <a:lnB w="12700" cap="flat" cmpd="sng" algn="ctr">
+                          <a:solidFill>
+                            <a:schemeClr val="tx1"/>
+                          </a:solidFill>
+                          <a:prstDash val="solid"/>
+                          <a:round/>
+                          <a:headEnd type="none" w="med" len="med"/>
+                          <a:tailEnd type="none" w="med" len="med"/>
+                        </a:lnB>
+                      </a:tcPr>
+                    </a:tc>
+                    <a:tc>
+                      <a:txBody>
+                        <a:bodyPr/>
+                        <a:lstStyle/>
+                        <a:p>
+                          <a:endParaRPr lang="en-US"/>
+                        </a:p>
+                      </a:txBody>
+                      <a:tcPr anchor="ctr">
+                        <a:lnB w="12700" cap="flat" cmpd="sng" algn="ctr">
+                          <a:solidFill>
+                            <a:schemeClr val="tx1"/>
+                          </a:solidFill>
+                          <a:prstDash val="solid"/>
+                          <a:round/>
+                          <a:headEnd type="none" w="med" len="med"/>
+                          <a:tailEnd type="none" w="med" len="med"/>
+                        </a:lnB>
+                        <a:blipFill>
+                          <a:blip r:embed="rId2"/>
+                          <a:stretch>
+                            <a:fillRect l="-65783" t="-174419" r="-42651" b="-168605"/>
+                          </a:stretch>
+                        </a:blipFill>
+                      </a:tcPr>
+                    </a:tc>
+                    <a:tc>
+                      <a:txBody>
+                        <a:bodyPr/>
+                        <a:lstStyle/>
+                        <a:p>
+                          <a:pPr marL="285750" lvl="0" indent="-285750">
+                            <a:buFont typeface="Arial" panose="020B0604020202020204" pitchFamily="34" charset="0"/>
+                            <a:buChar char="•"/>
+                          </a:pPr>
+                          <a:r>
+                            <a:rPr lang="es-ES_tradnl" sz="2200" dirty="0">
+                              <a:latin typeface="Gill Sans Nova Light" panose="020B0302020104020203" pitchFamily="34" charset="0"/>
+                            </a:rPr>
+                            <a:t>Histogramas</a:t>
+                          </a:r>
+                        </a:p>
+                        <a:p>
+                          <a:pPr marL="285750" lvl="0" indent="-285750">
+                            <a:buFont typeface="Arial" panose="020B0604020202020204" pitchFamily="34" charset="0"/>
+                            <a:buChar char="•"/>
+                          </a:pPr>
+                          <a:r>
+                            <a:rPr lang="es-ES_tradnl" sz="2200" dirty="0">
+                              <a:latin typeface="Gill Sans Nova Light" panose="020B0302020104020203" pitchFamily="34" charset="0"/>
+                            </a:rPr>
+                            <a:t>Kernels</a:t>
+                          </a:r>
+                        </a:p>
+                        <a:p>
+                          <a:endParaRPr lang="es-ES_tradnl" sz="2200" dirty="0">
+                            <a:latin typeface="Gill Sans Nova Light" panose="020B0302020104020203" pitchFamily="34" charset="0"/>
+                          </a:endParaRPr>
+                        </a:p>
+                      </a:txBody>
+                      <a:tcPr anchor="ctr">
+                        <a:lnR w="12700" cap="flat" cmpd="sng" algn="ctr">
+                          <a:solidFill>
+                            <a:schemeClr val="tx1"/>
+                          </a:solidFill>
+                          <a:prstDash val="solid"/>
+                          <a:round/>
+                          <a:headEnd type="none" w="med" len="med"/>
+                          <a:tailEnd type="none" w="med" len="med"/>
+                        </a:lnR>
+                        <a:lnB w="12700" cap="flat" cmpd="sng" algn="ctr">
+                          <a:solidFill>
+                            <a:schemeClr val="tx1"/>
+                          </a:solidFill>
+                          <a:prstDash val="solid"/>
+                          <a:round/>
+                          <a:headEnd type="none" w="med" len="med"/>
+                          <a:tailEnd type="none" w="med" len="med"/>
+                        </a:lnB>
+                      </a:tcPr>
+                    </a:tc>
+                    <a:extLst>
+                      <a:ext uri="{0D108BD9-81ED-4DB2-BD59-A6C34878D82A}">
+                        <a16:rowId xmlns:a16="http://schemas.microsoft.com/office/drawing/2014/main" val="933332684"/>
+                      </a:ext>
+                    </a:extLst>
+                  </a:tr>
+                  <a:tr h="1767840">
+                    <a:tc>
+                      <a:txBody>
+                        <a:bodyPr/>
+                        <a:lstStyle/>
+                        <a:p>
+                          <a:r>
+                            <a:rPr lang="es-ES_tradnl" sz="2200" dirty="0">
+                              <a:latin typeface="Gill Sans Nova Light" panose="020B0302020104020203" pitchFamily="34" charset="0"/>
+                            </a:rPr>
+                            <a:t>Modelos y Predicción</a:t>
+                          </a:r>
+                        </a:p>
+                      </a:txBody>
+                      <a:tcPr anchor="ctr">
+                        <a:lnL w="12700" cap="flat" cmpd="sng" algn="ctr">
+                          <a:solidFill>
+                            <a:schemeClr val="tx1"/>
+                          </a:solidFill>
+                          <a:prstDash val="solid"/>
+                          <a:round/>
+                          <a:headEnd type="none" w="med" len="med"/>
+                          <a:tailEnd type="none" w="med" len="med"/>
+                        </a:lnL>
+                        <a:lnT w="12700" cap="flat" cmpd="sng" algn="ctr">
+                          <a:solidFill>
+                            <a:schemeClr val="tx1"/>
+                          </a:solidFill>
+                          <a:prstDash val="solid"/>
+                          <a:round/>
+                          <a:headEnd type="none" w="med" len="med"/>
+                          <a:tailEnd type="none" w="med" len="med"/>
+                        </a:lnT>
+                        <a:lnB w="12700" cap="flat" cmpd="sng" algn="ctr">
+                          <a:solidFill>
+                            <a:schemeClr val="tx1"/>
+                          </a:solidFill>
+                          <a:prstDash val="solid"/>
+                          <a:round/>
+                          <a:headEnd type="none" w="med" len="med"/>
+                          <a:tailEnd type="none" w="med" len="med"/>
+                        </a:lnB>
+                      </a:tcPr>
+                    </a:tc>
+                    <a:tc>
+                      <a:txBody>
+                        <a:bodyPr/>
+                        <a:lstStyle/>
+                        <a:p>
+                          <a:pPr marL="0" marR="0" lvl="0" indent="0" algn="l" defTabSz="914400" rtl="0" eaLnBrk="1" fontAlgn="auto" latinLnBrk="0" hangingPunct="1">
+                            <a:lnSpc>
+                              <a:spcPct val="100000"/>
+                            </a:lnSpc>
+                            <a:spcBef>
+                              <a:spcPts val="0"/>
+                            </a:spcBef>
+                            <a:spcAft>
+                              <a:spcPts val="0"/>
+                            </a:spcAft>
+                            <a:buClrTx/>
+                            <a:buSzTx/>
+                            <a:buFontTx/>
+                            <a:buNone/>
+                            <a:tabLst/>
+                            <a:defRPr/>
+                          </a:pPr>
+                          <a:r>
+                            <a:rPr lang="es-ES_tradnl" sz="2200" dirty="0">
+                              <a:latin typeface="Gill Sans Nova Light" panose="020B0302020104020203" pitchFamily="34" charset="0"/>
+                            </a:rPr>
+                            <a:t>Aprendizaje Supervisado</a:t>
+                          </a:r>
+                        </a:p>
+                        <a:p>
+                          <a:endParaRPr lang="es-ES_tradnl" sz="2200" dirty="0">
+                            <a:latin typeface="Gill Sans Nova Light" panose="020B0302020104020203" pitchFamily="34" charset="0"/>
+                          </a:endParaRPr>
+                        </a:p>
+                      </a:txBody>
+                      <a:tcPr anchor="ctr">
+                        <a:lnT w="12700" cap="flat" cmpd="sng" algn="ctr">
+                          <a:solidFill>
+                            <a:schemeClr val="tx1"/>
+                          </a:solidFill>
+                          <a:prstDash val="solid"/>
+                          <a:round/>
+                          <a:headEnd type="none" w="med" len="med"/>
+                          <a:tailEnd type="none" w="med" len="med"/>
+                        </a:lnT>
+                        <a:lnB w="12700" cap="flat" cmpd="sng" algn="ctr">
+                          <a:solidFill>
+                            <a:schemeClr val="tx1"/>
+                          </a:solidFill>
+                          <a:prstDash val="solid"/>
+                          <a:round/>
+                          <a:headEnd type="none" w="med" len="med"/>
+                          <a:tailEnd type="none" w="med" len="med"/>
+                        </a:lnB>
+                      </a:tcPr>
+                    </a:tc>
+                    <a:tc>
+                      <a:txBody>
+                        <a:bodyPr/>
+                        <a:lstStyle/>
+                        <a:p>
+                          <a:endParaRPr lang="en-US"/>
+                        </a:p>
+                      </a:txBody>
+                      <a:tcPr anchor="ctr">
+                        <a:lnT w="12700" cap="flat" cmpd="sng" algn="ctr">
+                          <a:solidFill>
+                            <a:schemeClr val="tx1"/>
+                          </a:solidFill>
+                          <a:prstDash val="solid"/>
+                          <a:round/>
+                          <a:headEnd type="none" w="med" len="med"/>
+                          <a:tailEnd type="none" w="med" len="med"/>
+                        </a:lnT>
+                        <a:lnB w="12700" cap="flat" cmpd="sng" algn="ctr">
+                          <a:solidFill>
+                            <a:schemeClr val="tx1"/>
+                          </a:solidFill>
+                          <a:prstDash val="solid"/>
+                          <a:round/>
+                          <a:headEnd type="none" w="med" len="med"/>
+                          <a:tailEnd type="none" w="med" len="med"/>
+                        </a:lnB>
+                        <a:blipFill>
+                          <a:blip r:embed="rId2"/>
+                          <a:stretch>
+                            <a:fillRect l="-65783" t="-168571" r="-42651" b="-3571"/>
+                          </a:stretch>
+                        </a:blipFill>
+                      </a:tcPr>
+                    </a:tc>
+                    <a:tc>
+                      <a:txBody>
+                        <a:bodyPr/>
+                        <a:lstStyle/>
+                        <a:p>
+                          <a:pPr marL="285750" indent="-285750">
+                            <a:buFont typeface="Arial" panose="020B0604020202020204" pitchFamily="34" charset="0"/>
+                            <a:buChar char="•"/>
+                          </a:pPr>
+                          <a:r>
+                            <a:rPr lang="es-ES_tradnl" sz="2200" dirty="0">
+                              <a:latin typeface="Gill Sans Nova Light" panose="020B0302020104020203" pitchFamily="34" charset="0"/>
+                            </a:rPr>
+                            <a:t>MCO</a:t>
+                          </a:r>
+                        </a:p>
+                        <a:p>
+                          <a:pPr marL="285750" indent="-285750">
+                            <a:buFont typeface="Arial" panose="020B0604020202020204" pitchFamily="34" charset="0"/>
+                            <a:buChar char="•"/>
+                          </a:pPr>
+                          <a:r>
+                            <a:rPr lang="es-ES_tradnl" sz="2200" dirty="0" err="1">
+                              <a:latin typeface="Gill Sans Nova Light" panose="020B0302020104020203" pitchFamily="34" charset="0"/>
+                            </a:rPr>
+                            <a:t>Logit</a:t>
+                          </a:r>
+                          <a:r>
+                            <a:rPr lang="es-ES_tradnl" sz="2200" dirty="0">
+                              <a:latin typeface="Gill Sans Nova Light" panose="020B0302020104020203" pitchFamily="34" charset="0"/>
+                            </a:rPr>
+                            <a:t>, LDA, QDA, KNN</a:t>
+                          </a:r>
+                        </a:p>
+                        <a:p>
+                          <a:pPr marL="285750" indent="-285750">
+                            <a:buFont typeface="Arial" panose="020B0604020202020204" pitchFamily="34" charset="0"/>
+                            <a:buChar char="•"/>
+                          </a:pPr>
+                          <a:r>
+                            <a:rPr lang="es-ES_tradnl" sz="2200" dirty="0">
+                              <a:latin typeface="Gill Sans Nova Light" panose="020B0302020104020203" pitchFamily="34" charset="0"/>
+                            </a:rPr>
+                            <a:t>Y otros…</a:t>
+                          </a:r>
+                        </a:p>
+                        <a:p>
+                          <a:pPr marL="285750" indent="-285750">
+                            <a:buFont typeface="Arial" panose="020B0604020202020204" pitchFamily="34" charset="0"/>
+                            <a:buChar char="•"/>
+                          </a:pPr>
+                          <a:endParaRPr lang="es-ES_tradnl" sz="2200" dirty="0">
+                            <a:latin typeface="Gill Sans Nova Light" panose="020B0302020104020203" pitchFamily="34" charset="0"/>
+                          </a:endParaRPr>
+                        </a:p>
+                      </a:txBody>
+                      <a:tcPr anchor="ctr">
+                        <a:lnR w="12700" cap="flat" cmpd="sng" algn="ctr">
+                          <a:solidFill>
+                            <a:schemeClr val="tx1"/>
+                          </a:solidFill>
+                          <a:prstDash val="solid"/>
+                          <a:round/>
+                          <a:headEnd type="none" w="med" len="med"/>
+                          <a:tailEnd type="none" w="med" len="med"/>
+                        </a:lnR>
+                        <a:lnT w="12700" cap="flat" cmpd="sng" algn="ctr">
+                          <a:solidFill>
+                            <a:schemeClr val="tx1"/>
+                          </a:solidFill>
+                          <a:prstDash val="solid"/>
+                          <a:round/>
+                          <a:headEnd type="none" w="med" len="med"/>
+                          <a:tailEnd type="none" w="med" len="med"/>
+                        </a:lnT>
+                        <a:lnB w="12700" cap="flat" cmpd="sng" algn="ctr">
+                          <a:solidFill>
+                            <a:schemeClr val="tx1"/>
+                          </a:solidFill>
+                          <a:prstDash val="solid"/>
+                          <a:round/>
+                          <a:headEnd type="none" w="med" len="med"/>
+                          <a:tailEnd type="none" w="med" len="med"/>
+                        </a:lnB>
+                      </a:tcPr>
+                    </a:tc>
+                    <a:extLst>
+                      <a:ext uri="{0D108BD9-81ED-4DB2-BD59-A6C34878D82A}">
+                        <a16:rowId xmlns:a16="http://schemas.microsoft.com/office/drawing/2014/main" val="715415779"/>
+                      </a:ext>
+                    </a:extLst>
+                  </a:tr>
+                </a:tbl>
+              </a:graphicData>
+            </a:graphic>
+          </p:graphicFrame>
+        </mc:Fallback>
+      </mc:AlternateContent>
+      <p:sp>
+        <p:nvSpPr>
+          <p:cNvPr id="5" name="Slide Number Placeholder 4">
+            <a:extLst>
+              <a:ext uri="{FF2B5EF4-FFF2-40B4-BE49-F238E27FC236}">
+                <a16:creationId xmlns:a16="http://schemas.microsoft.com/office/drawing/2014/main" id="{D4B742BB-420A-39A8-1250-F8C947C8F619}"/>
+              </a:ext>
+            </a:extLst>
+          </p:cNvPr>
+          <p:cNvSpPr>
+            <a:spLocks noGrp="1"/>
+          </p:cNvSpPr>
+          <p:nvPr>
+            <p:ph type="sldNum" sz="quarter" idx="12"/>
+          </p:nvPr>
+        </p:nvSpPr>
+        <p:spPr/>
+        <p:txBody>
+          <a:bodyPr/>
+          <a:lstStyle/>
+          <a:p>
+            <a:fld id="{278C1CC4-2077-434E-BCF1-5D01C08A9B17}" type="slidenum">
+              <a:rPr lang="en-US" smtClean="0"/>
+              <a:t>4</a:t>
+            </a:fld>
+            <a:endParaRPr lang="en-US"/>
+          </a:p>
+        </p:txBody>
+      </p:sp>
+      <p:sp>
+        <p:nvSpPr>
+          <p:cNvPr id="6" name="Rectangle 5">
+            <a:extLst>
+              <a:ext uri="{FF2B5EF4-FFF2-40B4-BE49-F238E27FC236}">
+                <a16:creationId xmlns:a16="http://schemas.microsoft.com/office/drawing/2014/main" id="{06411E09-9C93-2937-FA98-0414F500111B}"/>
+              </a:ext>
+            </a:extLst>
+          </p:cNvPr>
+          <p:cNvSpPr/>
+          <p:nvPr/>
+        </p:nvSpPr>
+        <p:spPr>
+          <a:xfrm>
+            <a:off x="4058653" y="5727338"/>
+            <a:ext cx="4812631" cy="417095"/>
+          </a:xfrm>
+          <a:prstGeom prst="rect">
+            <a:avLst/>
+          </a:prstGeom>
+          <a:noFill/>
+          <a:ln w="28575">
+            <a:solidFill>
+              <a:srgbClr val="FF0000"/>
+            </a:solidFill>
+          </a:ln>
+        </p:spPr>
+        <p:style>
+          <a:lnRef idx="2">
+            <a:schemeClr val="accent1">
+              <a:shade val="15000"/>
+            </a:schemeClr>
+          </a:lnRef>
+          <a:fillRef idx="1">
+            <a:schemeClr val="accent1"/>
+          </a:fillRef>
+          <a:effectRef idx="0">
+            <a:schemeClr val="accent1"/>
+          </a:effectRef>
+          <a:fontRef idx="minor">
+            <a:schemeClr val="lt1"/>
+          </a:fontRef>
+        </p:style>
+        <p:txBody>
+          <a:bodyPr rtlCol="0" anchor="ctr"/>
+          <a:lstStyle/>
+          <a:p>
+            <a:pPr algn="ctr"/>
+            <a:r>
+              <a:rPr lang="es-ES_tradnl" dirty="0"/>
+              <a:t>x</a:t>
+            </a:r>
+          </a:p>
+        </p:txBody>
+      </p:sp>
+      <p:sp>
+        <p:nvSpPr>
+          <p:cNvPr id="3" name="Rectangle 2">
+            <a:extLst>
+              <a:ext uri="{FF2B5EF4-FFF2-40B4-BE49-F238E27FC236}">
+                <a16:creationId xmlns:a16="http://schemas.microsoft.com/office/drawing/2014/main" id="{7151059B-F693-3AB2-5ECB-B9BC8A48F24B}"/>
+              </a:ext>
+            </a:extLst>
+          </p:cNvPr>
+          <p:cNvSpPr/>
+          <p:nvPr/>
+        </p:nvSpPr>
+        <p:spPr>
+          <a:xfrm>
+            <a:off x="9648281" y="4812184"/>
+            <a:ext cx="1535534" cy="691801"/>
+          </a:xfrm>
+          <a:prstGeom prst="rect">
+            <a:avLst/>
+          </a:prstGeom>
+          <a:noFill/>
+          <a:ln w="28575">
+            <a:solidFill>
+              <a:srgbClr val="FF0000"/>
+            </a:solidFill>
+          </a:ln>
+        </p:spPr>
+        <p:style>
+          <a:lnRef idx="2">
+            <a:schemeClr val="accent1">
+              <a:shade val="15000"/>
+            </a:schemeClr>
+          </a:lnRef>
+          <a:fillRef idx="1">
+            <a:schemeClr val="accent1"/>
+          </a:fillRef>
+          <a:effectRef idx="0">
+            <a:schemeClr val="accent1"/>
+          </a:effectRef>
+          <a:fontRef idx="minor">
+            <a:schemeClr val="lt1"/>
+          </a:fontRef>
+        </p:style>
+        <p:txBody>
+          <a:bodyPr rtlCol="0" anchor="ctr"/>
+          <a:lstStyle/>
+          <a:p>
+            <a:pPr algn="ctr"/>
+            <a:endParaRPr lang="es-ES_tradnl"/>
+          </a:p>
+        </p:txBody>
+      </p:sp>
+    </p:spTree>
+    <p:extLst>
+      <p:ext uri="{BB962C8B-B14F-4D97-AF65-F5344CB8AC3E}">
+        <p14:creationId xmlns:p14="http://schemas.microsoft.com/office/powerpoint/2010/main" val="3894729846"/>
+      </p:ext>
+    </p:extLst>
+  </p:cSld>
+  <p:clrMapOvr>
+    <a:masterClrMapping/>
+  </p:clrMapOvr>
+  <p:timing>
+    <p:tnLst>
+      <p:par>
+        <p:cTn id="1" dur="indefinite" restart="never" nodeType="tmRoot">
+          <p:childTnLst>
+            <p:seq concurrent="1" nextAc="seek">
+              <p:cTn id="2" dur="indefinite" nodeType="mainSeq">
+                <p:childTnLst>
+                  <p:par>
+                    <p:cTn id="3" fill="hold">
+                      <p:stCondLst>
+                        <p:cond delay="indefinite"/>
+                      </p:stCondLst>
+                      <p:childTnLst>
+                        <p:par>
+                          <p:cTn id="4" fill="hold">
+                            <p:stCondLst>
+                              <p:cond delay="0"/>
+                            </p:stCondLst>
+                            <p:childTnLst>
+                              <p:par>
+                                <p:cTn id="5" presetID="1" presetClass="entr" presetSubtype="0" fill="hold" grpId="0" nodeType="clickEffect">
+                                  <p:stCondLst>
+                                    <p:cond delay="0"/>
+                                  </p:stCondLst>
+                                  <p:childTnLst>
+                                    <p:set>
+                                      <p:cBhvr>
+                                        <p:cTn id="6" dur="1" fill="hold">
+                                          <p:stCondLst>
+                                            <p:cond delay="0"/>
+                                          </p:stCondLst>
+                                        </p:cTn>
+                                        <p:tgtEl>
+                                          <p:spTgt spid="6"/>
+                                        </p:tgtEl>
+                                        <p:attrNameLst>
+                                          <p:attrName>style.visibility</p:attrName>
+                                        </p:attrNameLst>
+                                      </p:cBhvr>
+                                      <p:to>
+                                        <p:strVal val="visible"/>
+                                      </p:to>
+                                    </p:set>
+                                  </p:childTnLst>
+                                </p:cTn>
+                              </p:par>
+                            </p:childTnLst>
+                          </p:cTn>
+                        </p:par>
+                      </p:childTnLst>
+                    </p:cTn>
+                  </p:par>
+                  <p:par>
+                    <p:cTn id="7" fill="hold">
+                      <p:stCondLst>
+                        <p:cond delay="indefinite"/>
+                      </p:stCondLst>
+                      <p:childTnLst>
+                        <p:par>
+                          <p:cTn id="8" fill="hold">
+                            <p:stCondLst>
+                              <p:cond delay="0"/>
+                            </p:stCondLst>
+                            <p:childTnLst>
+                              <p:par>
+                                <p:cTn id="9" presetID="1" presetClass="entr" presetSubtype="0" fill="hold" grpId="0" nodeType="clickEffect">
+                                  <p:stCondLst>
+                                    <p:cond delay="0"/>
+                                  </p:stCondLst>
+                                  <p:childTnLst>
+                                    <p:set>
+                                      <p:cBhvr>
+                                        <p:cTn id="10" dur="1" fill="hold">
+                                          <p:stCondLst>
+                                            <p:cond delay="0"/>
+                                          </p:stCondLst>
+                                        </p:cTn>
+                                        <p:tgtEl>
+                                          <p:spTgt spid="3"/>
+                                        </p:tgtEl>
+                                        <p:attrNameLst>
+                                          <p:attrName>style.visibility</p:attrName>
+                                        </p:attrNameLst>
+                                      </p:cBhvr>
+                                      <p:to>
+                                        <p:strVal val="visible"/>
+                                      </p:to>
+                                    </p:set>
+                                  </p:childTnLst>
+                                </p:cTn>
+                              </p:par>
+                            </p:childTnLst>
+                          </p:cTn>
+                        </p:par>
+                      </p:childTnLst>
+                    </p:cTn>
+                  </p:par>
+                </p:childTnLst>
+              </p:cTn>
+              <p:prevCondLst>
+                <p:cond evt="onPrev" delay="0">
+                  <p:tgtEl>
+                    <p:sldTgt/>
+                  </p:tgtEl>
+                </p:cond>
+              </p:prevCondLst>
+              <p:nextCondLst>
+                <p:cond evt="onNext" delay="0">
+                  <p:tgtEl>
+                    <p:sldTgt/>
+                  </p:tgtEl>
+                </p:cond>
+              </p:nextCondLst>
+            </p:seq>
+          </p:childTnLst>
+        </p:cTn>
+      </p:par>
+    </p:tnLst>
+    <p:bldLst>
+      <p:bldP spid="6" grpId="0" animBg="1"/>
+      <p:bldP spid="3" grpId="0" animBg="1"/>
+    </p:bldLst>
+  </p:timing>
+</p:sld>
+</file>
+
+<file path=ppt/slides/slide40.xml><?xml version="1.0" encoding="utf-8"?>
 <p:sld xmlns:a="http://schemas.openxmlformats.org/drawingml/2006/main" xmlns:r="http://schemas.openxmlformats.org/officeDocument/2006/relationships" xmlns:p="http://schemas.openxmlformats.org/presentationml/2006/main">
   <p:cSld>
     <p:spTree>
@@ -26744,7 +29291,7 @@
           <a:p>
             <a:fld id="{278C1CC4-2077-434E-BCF1-5D01C08A9B17}" type="slidenum">
               <a:rPr lang="en-US" smtClean="0"/>
-              <a:t>39</a:t>
+              <a:t>40</a:t>
             </a:fld>
             <a:endParaRPr lang="en-US"/>
           </a:p>
@@ -26763,2214 +29310,7 @@
 </p:sld>
 </file>
 
-<file path=ppt/slides/slide4.xml><?xml version="1.0" encoding="utf-8"?>
-<p:sld xmlns:a="http://schemas.openxmlformats.org/drawingml/2006/main" xmlns:r="http://schemas.openxmlformats.org/officeDocument/2006/relationships" xmlns:p="http://schemas.openxmlformats.org/presentationml/2006/main">
-  <p:cSld>
-    <p:spTree>
-      <p:nvGrpSpPr>
-        <p:cNvPr id="1" name=""/>
-        <p:cNvGrpSpPr/>
-        <p:nvPr/>
-      </p:nvGrpSpPr>
-      <p:grpSpPr>
-        <a:xfrm>
-          <a:off x="0" y="0"/>
-          <a:ext cx="0" cy="0"/>
-          <a:chOff x="0" y="0"/>
-          <a:chExt cx="0" cy="0"/>
-        </a:xfrm>
-      </p:grpSpPr>
-      <p:sp>
-        <p:nvSpPr>
-          <p:cNvPr id="2" name="Title 1">
-            <a:extLst>
-              <a:ext uri="{FF2B5EF4-FFF2-40B4-BE49-F238E27FC236}">
-                <a16:creationId xmlns:a16="http://schemas.microsoft.com/office/drawing/2014/main" id="{8729A790-8125-0419-9C63-AD7B89D79279}"/>
-              </a:ext>
-            </a:extLst>
-          </p:cNvPr>
-          <p:cNvSpPr>
-            <a:spLocks noGrp="1"/>
-          </p:cNvSpPr>
-          <p:nvPr>
-            <p:ph type="title"/>
-          </p:nvPr>
-        </p:nvSpPr>
-        <p:spPr/>
-        <p:txBody>
-          <a:bodyPr/>
-          <a:lstStyle/>
-          <a:p>
-            <a:r>
-              <a:rPr lang="es-ES_tradnl" dirty="0"/>
-              <a:t>De la Etapa Explorativa a la Predicción</a:t>
-            </a:r>
-          </a:p>
-        </p:txBody>
-      </p:sp>
-      <mc:AlternateContent xmlns:mc="http://schemas.openxmlformats.org/markup-compatibility/2006" xmlns:a14="http://schemas.microsoft.com/office/drawing/2010/main">
-        <mc:Choice Requires="a14">
-          <p:graphicFrame>
-            <p:nvGraphicFramePr>
-              <p:cNvPr id="4" name="Content Placeholder 3">
-                <a:extLst>
-                  <a:ext uri="{FF2B5EF4-FFF2-40B4-BE49-F238E27FC236}">
-                    <a16:creationId xmlns:a16="http://schemas.microsoft.com/office/drawing/2014/main" id="{08559E05-DBC3-8301-D584-275312741E4C}"/>
-                  </a:ext>
-                </a:extLst>
-              </p:cNvPr>
-              <p:cNvGraphicFramePr>
-                <a:graphicFrameLocks noGrp="1"/>
-              </p:cNvGraphicFramePr>
-              <p:nvPr>
-                <p:ph idx="1"/>
-              </p:nvPr>
-            </p:nvGraphicFramePr>
-            <p:xfrm>
-              <a:off x="617621" y="1496447"/>
-              <a:ext cx="10956757" cy="4724400"/>
-            </p:xfrm>
-            <a:graphic>
-              <a:graphicData uri="http://schemas.openxmlformats.org/drawingml/2006/table">
-                <a:tbl>
-                  <a:tblPr firstRow="1" bandRow="1">
-                    <a:tableStyleId>{F2DE63D5-997A-4646-A377-4702673A728D}</a:tableStyleId>
-                  </a:tblPr>
-                  <a:tblGrid>
-                    <a:gridCol w="1540043">
-                      <a:extLst>
-                        <a:ext uri="{9D8B030D-6E8A-4147-A177-3AD203B41FA5}">
-                          <a16:colId xmlns:a16="http://schemas.microsoft.com/office/drawing/2014/main" val="1029663632"/>
-                        </a:ext>
-                      </a:extLst>
-                    </a:gridCol>
-                    <a:gridCol w="1915804">
-                      <a:extLst>
-                        <a:ext uri="{9D8B030D-6E8A-4147-A177-3AD203B41FA5}">
-                          <a16:colId xmlns:a16="http://schemas.microsoft.com/office/drawing/2014/main" val="3989478329"/>
-                        </a:ext>
-                      </a:extLst>
-                    </a:gridCol>
-                    <a:gridCol w="5265262">
-                      <a:extLst>
-                        <a:ext uri="{9D8B030D-6E8A-4147-A177-3AD203B41FA5}">
-                          <a16:colId xmlns:a16="http://schemas.microsoft.com/office/drawing/2014/main" val="1368382703"/>
-                        </a:ext>
-                      </a:extLst>
-                    </a:gridCol>
-                    <a:gridCol w="2235648">
-                      <a:extLst>
-                        <a:ext uri="{9D8B030D-6E8A-4147-A177-3AD203B41FA5}">
-                          <a16:colId xmlns:a16="http://schemas.microsoft.com/office/drawing/2014/main" val="995975348"/>
-                        </a:ext>
-                      </a:extLst>
-                    </a:gridCol>
-                  </a:tblGrid>
-                  <a:tr h="749448">
-                    <a:tc>
-                      <a:txBody>
-                        <a:bodyPr/>
-                        <a:lstStyle/>
-                        <a:p>
-                          <a:pPr algn="ctr"/>
-                          <a:r>
-                            <a:rPr lang="es-ES_tradnl" sz="2200" dirty="0">
-                              <a:latin typeface="Gill Sans Nova Light" panose="020B0302020104020203" pitchFamily="34" charset="0"/>
-                            </a:rPr>
-                            <a:t>Etapas</a:t>
-                          </a:r>
-                        </a:p>
-                      </a:txBody>
-                      <a:tcPr anchor="ctr">
-                        <a:lnL w="12700" cap="flat" cmpd="sng" algn="ctr">
-                          <a:solidFill>
-                            <a:schemeClr val="tx1"/>
-                          </a:solidFill>
-                          <a:prstDash val="solid"/>
-                          <a:round/>
-                          <a:headEnd type="none" w="med" len="med"/>
-                          <a:tailEnd type="none" w="med" len="med"/>
-                        </a:lnL>
-                        <a:lnT w="12700" cap="flat" cmpd="sng" algn="ctr">
-                          <a:solidFill>
-                            <a:schemeClr val="tx1"/>
-                          </a:solidFill>
-                          <a:prstDash val="solid"/>
-                          <a:round/>
-                          <a:headEnd type="none" w="med" len="med"/>
-                          <a:tailEnd type="none" w="med" len="med"/>
-                        </a:lnT>
-                        <a:solidFill>
-                          <a:srgbClr val="002060"/>
-                        </a:solidFill>
-                      </a:tcPr>
-                    </a:tc>
-                    <a:tc>
-                      <a:txBody>
-                        <a:bodyPr/>
-                        <a:lstStyle/>
-                        <a:p>
-                          <a:pPr algn="ctr"/>
-                          <a:r>
-                            <a:rPr lang="es-ES_tradnl" sz="2200" dirty="0">
-                              <a:latin typeface="Gill Sans Nova Light" panose="020B0302020104020203" pitchFamily="34" charset="0"/>
-                            </a:rPr>
-                            <a:t>Tipo de Aprendizaje</a:t>
-                          </a:r>
-                        </a:p>
-                      </a:txBody>
-                      <a:tcPr anchor="ctr">
-                        <a:lnT w="12700" cap="flat" cmpd="sng" algn="ctr">
-                          <a:solidFill>
-                            <a:schemeClr val="tx1"/>
-                          </a:solidFill>
-                          <a:prstDash val="solid"/>
-                          <a:round/>
-                          <a:headEnd type="none" w="med" len="med"/>
-                          <a:tailEnd type="none" w="med" len="med"/>
-                        </a:lnT>
-                        <a:solidFill>
-                          <a:srgbClr val="002060"/>
-                        </a:solidFill>
-                      </a:tcPr>
-                    </a:tc>
-                    <a:tc>
-                      <a:txBody>
-                        <a:bodyPr/>
-                        <a:lstStyle/>
-                        <a:p>
-                          <a:pPr algn="ctr"/>
-                          <a:r>
-                            <a:rPr lang="es-ES_tradnl" sz="2200" dirty="0">
-                              <a:latin typeface="Gill Sans Nova Light" panose="020B0302020104020203" pitchFamily="34" charset="0"/>
-                            </a:rPr>
-                            <a:t>Idea</a:t>
-                          </a:r>
-                        </a:p>
-                      </a:txBody>
-                      <a:tcPr anchor="ctr">
-                        <a:lnT w="12700" cap="flat" cmpd="sng" algn="ctr">
-                          <a:solidFill>
-                            <a:schemeClr val="tx1"/>
-                          </a:solidFill>
-                          <a:prstDash val="solid"/>
-                          <a:round/>
-                          <a:headEnd type="none" w="med" len="med"/>
-                          <a:tailEnd type="none" w="med" len="med"/>
-                        </a:lnT>
-                        <a:solidFill>
-                          <a:srgbClr val="002060"/>
-                        </a:solidFill>
-                      </a:tcPr>
-                    </a:tc>
-                    <a:tc>
-                      <a:txBody>
-                        <a:bodyPr/>
-                        <a:lstStyle/>
-                        <a:p>
-                          <a:pPr algn="ctr"/>
-                          <a:r>
-                            <a:rPr lang="es-ES_tradnl" sz="2200" dirty="0">
-                              <a:latin typeface="Gill Sans Nova Light" panose="020B0302020104020203" pitchFamily="34" charset="0"/>
-                            </a:rPr>
-                            <a:t>Métodos</a:t>
-                          </a:r>
-                        </a:p>
-                      </a:txBody>
-                      <a:tcPr anchor="ctr">
-                        <a:lnR w="12700" cap="flat" cmpd="sng" algn="ctr">
-                          <a:solidFill>
-                            <a:schemeClr val="tx1"/>
-                          </a:solidFill>
-                          <a:prstDash val="solid"/>
-                          <a:round/>
-                          <a:headEnd type="none" w="med" len="med"/>
-                          <a:tailEnd type="none" w="med" len="med"/>
-                        </a:lnR>
-                        <a:lnT w="12700" cap="flat" cmpd="sng" algn="ctr">
-                          <a:solidFill>
-                            <a:schemeClr val="tx1"/>
-                          </a:solidFill>
-                          <a:prstDash val="solid"/>
-                          <a:round/>
-                          <a:headEnd type="none" w="med" len="med"/>
-                          <a:tailEnd type="none" w="med" len="med"/>
-                        </a:lnT>
-                        <a:solidFill>
-                          <a:srgbClr val="002060"/>
-                        </a:solidFill>
-                      </a:tcPr>
-                    </a:tc>
-                    <a:extLst>
-                      <a:ext uri="{0D108BD9-81ED-4DB2-BD59-A6C34878D82A}">
-                        <a16:rowId xmlns:a16="http://schemas.microsoft.com/office/drawing/2014/main" val="11467572"/>
-                      </a:ext>
-                    </a:extLst>
-                  </a:tr>
-                  <a:tr h="899255">
-                    <a:tc rowSpan="2">
-                      <a:txBody>
-                        <a:bodyPr/>
-                        <a:lstStyle/>
-                        <a:p>
-                          <a:r>
-                            <a:rPr lang="es-ES_tradnl" sz="2200" dirty="0">
-                              <a:latin typeface="Gill Sans Nova Light" panose="020B0302020104020203" pitchFamily="34" charset="0"/>
-                            </a:rPr>
-                            <a:t>Explorativa</a:t>
-                          </a:r>
-                        </a:p>
-                        <a:p>
-                          <a:pPr marL="0" marR="0" lvl="0" indent="0" algn="l" defTabSz="914400" rtl="0" eaLnBrk="1" fontAlgn="auto" latinLnBrk="0" hangingPunct="1">
-                            <a:lnSpc>
-                              <a:spcPct val="100000"/>
-                            </a:lnSpc>
-                            <a:spcBef>
-                              <a:spcPts val="0"/>
-                            </a:spcBef>
-                            <a:spcAft>
-                              <a:spcPts val="0"/>
-                            </a:spcAft>
-                            <a:buClrTx/>
-                            <a:buSzTx/>
-                            <a:buFontTx/>
-                            <a:buNone/>
-                            <a:tabLst/>
-                            <a:defRPr/>
-                          </a:pPr>
-                          <a:endParaRPr lang="es-ES_tradnl" sz="2200" dirty="0">
-                            <a:latin typeface="Gill Sans Nova Light" panose="020B0302020104020203" pitchFamily="34" charset="0"/>
-                          </a:endParaRPr>
-                        </a:p>
-                        <a:p>
-                          <a:endParaRPr lang="es-ES_tradnl" sz="2200" dirty="0">
-                            <a:latin typeface="Gill Sans Nova Light" panose="020B0302020104020203" pitchFamily="34" charset="0"/>
-                          </a:endParaRPr>
-                        </a:p>
-                      </a:txBody>
-                      <a:tcPr anchor="ctr">
-                        <a:lnL w="12700" cap="flat" cmpd="sng" algn="ctr">
-                          <a:solidFill>
-                            <a:schemeClr val="tx1"/>
-                          </a:solidFill>
-                          <a:prstDash val="solid"/>
-                          <a:round/>
-                          <a:headEnd type="none" w="med" len="med"/>
-                          <a:tailEnd type="none" w="med" len="med"/>
-                        </a:lnL>
-                        <a:lnB w="12700" cap="flat" cmpd="sng" algn="ctr">
-                          <a:solidFill>
-                            <a:schemeClr val="tx1"/>
-                          </a:solidFill>
-                          <a:prstDash val="solid"/>
-                          <a:round/>
-                          <a:headEnd type="none" w="med" len="med"/>
-                          <a:tailEnd type="none" w="med" len="med"/>
-                        </a:lnB>
-                      </a:tcPr>
-                    </a:tc>
-                    <a:tc>
-                      <a:txBody>
-                        <a:bodyPr/>
-                        <a:lstStyle/>
-                        <a:p>
-                          <a:r>
-                            <a:rPr lang="es-ES_tradnl" sz="2200" dirty="0">
-                              <a:latin typeface="Gill Sans Nova Light" panose="020B0302020104020203" pitchFamily="34" charset="0"/>
-                            </a:rPr>
-                            <a:t>Aprendizaje No Supervisado</a:t>
-                          </a:r>
-                        </a:p>
-                      </a:txBody>
-                      <a:tcPr anchor="ctr"/>
-                    </a:tc>
-                    <a:tc>
-                      <a:txBody>
-                        <a:bodyPr/>
-                        <a:lstStyle/>
-                        <a:p>
-                          <a:r>
-                            <a:rPr lang="es-ES_tradnl" sz="2200" dirty="0">
-                              <a:latin typeface="Gill Sans Nova Light" panose="020B0302020104020203" pitchFamily="34" charset="0"/>
-                            </a:rPr>
-                            <a:t>No hay un </a:t>
-                          </a:r>
-                          <a:r>
-                            <a:rPr lang="es-ES_tradnl" sz="2200" dirty="0">
-                              <a:solidFill>
-                                <a:srgbClr val="002060"/>
-                              </a:solidFill>
-                              <a:latin typeface="Gill Sans Nova Light" panose="020B0302020104020203" pitchFamily="34" charset="0"/>
-                            </a:rPr>
-                            <a:t>output</a:t>
-                          </a:r>
-                          <a:r>
-                            <a:rPr lang="es-ES_tradnl" sz="2200" dirty="0">
-                              <a:latin typeface="Gill Sans Nova Light" panose="020B0302020104020203" pitchFamily="34" charset="0"/>
-                            </a:rPr>
-                            <a:t> que se busca predecir</a:t>
-                          </a:r>
-                        </a:p>
-                        <a:p>
-                          <a:r>
-                            <a:rPr lang="es-ES_tradnl" sz="2200" dirty="0">
-                              <a:latin typeface="Gill Sans Nova Light" panose="020B0302020104020203" pitchFamily="34" charset="0"/>
-                            </a:rPr>
-                            <a:t>N observaciones </a:t>
-                          </a:r>
-                          <a14:m>
-                            <m:oMath xmlns:m="http://schemas.openxmlformats.org/officeDocument/2006/math">
-                              <m:d>
-                                <m:dPr>
-                                  <m:ctrlPr>
-                                    <a:rPr lang="en-US" sz="2200" b="0" i="1" dirty="0" smtClean="0">
-                                      <a:latin typeface="Cambria Math" panose="02040503050406030204" pitchFamily="18" charset="0"/>
-                                    </a:rPr>
-                                  </m:ctrlPr>
-                                </m:dPr>
-                                <m:e>
-                                  <m:sSub>
-                                    <m:sSubPr>
-                                      <m:ctrlPr>
-                                        <a:rPr lang="en-US" sz="2200" b="0" i="1" dirty="0" smtClean="0">
-                                          <a:latin typeface="Cambria Math" panose="02040503050406030204" pitchFamily="18" charset="0"/>
-                                        </a:rPr>
-                                      </m:ctrlPr>
-                                    </m:sSubPr>
-                                    <m:e>
-                                      <m:r>
-                                        <a:rPr lang="en-US" sz="2200" b="0" dirty="0" smtClean="0">
-                                          <a:latin typeface="Cambria Math" panose="02040503050406030204" pitchFamily="18" charset="0"/>
-                                        </a:rPr>
-                                        <m:t>𝑥</m:t>
-                                      </m:r>
-                                    </m:e>
-                                    <m:sub>
-                                      <m:r>
-                                        <a:rPr lang="en-US" sz="2200" b="0" dirty="0" smtClean="0">
-                                          <a:latin typeface="Cambria Math" panose="02040503050406030204" pitchFamily="18" charset="0"/>
-                                        </a:rPr>
-                                        <m:t>1</m:t>
-                                      </m:r>
-                                    </m:sub>
-                                  </m:sSub>
-                                  <m:r>
-                                    <a:rPr lang="en-US" sz="2200" b="0" dirty="0" smtClean="0">
-                                      <a:latin typeface="Cambria Math" panose="02040503050406030204" pitchFamily="18" charset="0"/>
-                                    </a:rPr>
-                                    <m:t>, …,</m:t>
-                                  </m:r>
-                                  <m:sSub>
-                                    <m:sSubPr>
-                                      <m:ctrlPr>
-                                        <a:rPr lang="en-US" sz="2200" b="0" i="1" dirty="0" smtClean="0">
-                                          <a:latin typeface="Cambria Math" panose="02040503050406030204" pitchFamily="18" charset="0"/>
-                                        </a:rPr>
-                                      </m:ctrlPr>
-                                    </m:sSubPr>
-                                    <m:e>
-                                      <m:r>
-                                        <a:rPr lang="en-US" sz="2200" b="0" dirty="0" smtClean="0">
-                                          <a:latin typeface="Cambria Math" panose="02040503050406030204" pitchFamily="18" charset="0"/>
-                                        </a:rPr>
-                                        <m:t>𝑥</m:t>
-                                      </m:r>
-                                    </m:e>
-                                    <m:sub>
-                                      <m:r>
-                                        <a:rPr lang="en-US" sz="2200" b="0" dirty="0" smtClean="0">
-                                          <a:latin typeface="Cambria Math" panose="02040503050406030204" pitchFamily="18" charset="0"/>
-                                        </a:rPr>
-                                        <m:t>𝑛</m:t>
-                                      </m:r>
-                                    </m:sub>
-                                  </m:sSub>
-                                </m:e>
-                              </m:d>
-                            </m:oMath>
-                          </a14:m>
-                          <a:endParaRPr lang="es-ES_tradnl" sz="2200" dirty="0">
-                            <a:latin typeface="Gill Sans Nova Light" panose="020B0302020104020203" pitchFamily="34" charset="0"/>
-                          </a:endParaRPr>
-                        </a:p>
-                      </a:txBody>
-                      <a:tcPr anchor="ctr"/>
-                    </a:tc>
-                    <a:tc>
-                      <a:txBody>
-                        <a:bodyPr/>
-                        <a:lstStyle/>
-                        <a:p>
-                          <a:pPr marL="285750" lvl="0" indent="-285750">
-                            <a:buFont typeface="Arial" panose="020B0604020202020204" pitchFamily="34" charset="0"/>
-                            <a:buChar char="•"/>
-                          </a:pPr>
-                          <a:r>
-                            <a:rPr lang="es-ES_tradnl" sz="2200" dirty="0">
-                              <a:latin typeface="Gill Sans Nova Light" panose="020B0302020104020203" pitchFamily="34" charset="0"/>
-                            </a:rPr>
-                            <a:t>PCA</a:t>
-                          </a:r>
-                        </a:p>
-                        <a:p>
-                          <a:pPr marL="285750" lvl="0" indent="-285750">
-                            <a:buFont typeface="Arial" panose="020B0604020202020204" pitchFamily="34" charset="0"/>
-                            <a:buChar char="•"/>
-                          </a:pPr>
-                          <a:r>
-                            <a:rPr lang="es-ES_tradnl" sz="2200" dirty="0">
-                              <a:latin typeface="Gill Sans Nova Light" panose="020B0302020104020203" pitchFamily="34" charset="0"/>
-                            </a:rPr>
-                            <a:t>Clusters</a:t>
-                          </a:r>
-                        </a:p>
-                        <a:p>
-                          <a:endParaRPr lang="es-ES_tradnl" sz="2200" dirty="0">
-                            <a:latin typeface="Gill Sans Nova Light" panose="020B0302020104020203" pitchFamily="34" charset="0"/>
-                          </a:endParaRPr>
-                        </a:p>
-                      </a:txBody>
-                      <a:tcPr anchor="ctr">
-                        <a:lnR w="12700" cap="flat" cmpd="sng" algn="ctr">
-                          <a:solidFill>
-                            <a:schemeClr val="tx1"/>
-                          </a:solidFill>
-                          <a:prstDash val="solid"/>
-                          <a:round/>
-                          <a:headEnd type="none" w="med" len="med"/>
-                          <a:tailEnd type="none" w="med" len="med"/>
-                        </a:lnR>
-                      </a:tcPr>
-                    </a:tc>
-                    <a:extLst>
-                      <a:ext uri="{0D108BD9-81ED-4DB2-BD59-A6C34878D82A}">
-                        <a16:rowId xmlns:a16="http://schemas.microsoft.com/office/drawing/2014/main" val="2145790582"/>
-                      </a:ext>
-                    </a:extLst>
-                  </a:tr>
-                  <a:tr h="1039834">
-                    <a:tc vMerge="1">
-                      <a:txBody>
-                        <a:bodyPr/>
-                        <a:lstStyle/>
-                        <a:p>
-                          <a:pPr marL="0" marR="0" lvl="0" indent="0" algn="l" defTabSz="914400" rtl="0" eaLnBrk="1" fontAlgn="auto" latinLnBrk="0" hangingPunct="1">
-                            <a:lnSpc>
-                              <a:spcPct val="100000"/>
-                            </a:lnSpc>
-                            <a:spcBef>
-                              <a:spcPts val="0"/>
-                            </a:spcBef>
-                            <a:spcAft>
-                              <a:spcPts val="0"/>
-                            </a:spcAft>
-                            <a:buClrTx/>
-                            <a:buSzTx/>
-                            <a:buFontTx/>
-                            <a:buNone/>
-                            <a:tabLst/>
-                            <a:defRPr/>
-                          </a:pPr>
-                          <a:r>
-                            <a:rPr lang="es-ES_tradnl" sz="2200" dirty="0">
-                              <a:latin typeface="Gill Sans Nova Light" panose="020B0302020104020203" pitchFamily="34" charset="0"/>
-                            </a:rPr>
-                            <a:t>Explorativa</a:t>
-                          </a:r>
-                        </a:p>
-                        <a:p>
-                          <a:endParaRPr lang="es-ES_tradnl" sz="2200" dirty="0">
-                            <a:latin typeface="Gill Sans Nova Light" panose="020B0302020104020203" pitchFamily="34" charset="0"/>
-                          </a:endParaRPr>
-                        </a:p>
-                      </a:txBody>
-                      <a:tcPr/>
-                    </a:tc>
-                    <a:tc>
-                      <a:txBody>
-                        <a:bodyPr/>
-                        <a:lstStyle/>
-                        <a:p>
-                          <a:r>
-                            <a:rPr lang="es-ES_tradnl" sz="2200" dirty="0">
-                              <a:latin typeface="Gill Sans Nova Light" panose="020B0302020104020203" pitchFamily="34" charset="0"/>
-                            </a:rPr>
-                            <a:t>Aprendizaje Supervisado</a:t>
-                          </a:r>
-                        </a:p>
-                      </a:txBody>
-                      <a:tcPr anchor="ctr">
-                        <a:lnB w="12700" cap="flat" cmpd="sng" algn="ctr">
-                          <a:solidFill>
-                            <a:schemeClr val="tx1"/>
-                          </a:solidFill>
-                          <a:prstDash val="solid"/>
-                          <a:round/>
-                          <a:headEnd type="none" w="med" len="med"/>
-                          <a:tailEnd type="none" w="med" len="med"/>
-                        </a:lnB>
-                      </a:tcPr>
-                    </a:tc>
-                    <a:tc>
-                      <a:txBody>
-                        <a:bodyPr/>
-                        <a:lstStyle/>
-                        <a:p>
-                          <a:r>
-                            <a:rPr lang="es-ES_tradnl" sz="2200" dirty="0">
-                              <a:latin typeface="Gill Sans Nova Light" panose="020B0302020104020203" pitchFamily="34" charset="0"/>
-                            </a:rPr>
-                            <a:t>Predecir distribución de un variable de interés </a:t>
-                          </a:r>
-                        </a:p>
-                        <a:p>
-                          <a:pPr marL="285750" lvl="0" indent="-285750">
-                            <a:buFont typeface="Arial" panose="020B0604020202020204" pitchFamily="34" charset="0"/>
-                            <a:buChar char="•"/>
-                          </a:pPr>
-                          <a14:m>
-                            <m:oMath xmlns:m="http://schemas.openxmlformats.org/officeDocument/2006/math">
-                              <m:r>
-                                <a:rPr lang="es-ES_tradnl" sz="2200" b="0" dirty="0" smtClean="0">
-                                  <a:latin typeface="Cambria Math" panose="02040503050406030204" pitchFamily="18" charset="0"/>
-                                </a:rPr>
-                                <m:t>𝑌</m:t>
-                              </m:r>
-                            </m:oMath>
-                          </a14:m>
-                          <a:r>
-                            <a:rPr lang="es-ES_tradnl" sz="2200" dirty="0">
-                              <a:latin typeface="Gill Sans Nova Light" panose="020B0302020104020203" pitchFamily="34" charset="0"/>
-                            </a:rPr>
-                            <a:t> variable de interés</a:t>
-                          </a:r>
-                        </a:p>
-                        <a:p>
-                          <a:pPr marL="285750" lvl="0" indent="-285750">
-                            <a:buFont typeface="Arial" panose="020B0604020202020204" pitchFamily="34" charset="0"/>
-                            <a:buChar char="•"/>
-                          </a:pPr>
-                          <a14:m>
-                            <m:oMath xmlns:m="http://schemas.openxmlformats.org/officeDocument/2006/math">
-                              <m:r>
-                                <a:rPr lang="en-US" sz="2200" b="0" dirty="0" smtClean="0">
-                                  <a:latin typeface="Cambria Math" panose="02040503050406030204" pitchFamily="18" charset="0"/>
-                                </a:rPr>
-                                <m:t>𝑓</m:t>
-                              </m:r>
-                              <m:d>
-                                <m:dPr>
-                                  <m:ctrlPr>
-                                    <a:rPr lang="en-US" sz="2200" b="0" i="1" dirty="0" smtClean="0">
-                                      <a:latin typeface="Cambria Math" panose="02040503050406030204" pitchFamily="18" charset="0"/>
-                                    </a:rPr>
-                                  </m:ctrlPr>
-                                </m:dPr>
-                                <m:e>
-                                  <m:r>
-                                    <a:rPr lang="es-ES_tradnl" sz="2200" b="0" dirty="0" smtClean="0">
-                                      <a:latin typeface="Cambria Math" panose="02040503050406030204" pitchFamily="18" charset="0"/>
-                                    </a:rPr>
-                                    <m:t>𝑌</m:t>
-                                  </m:r>
-                                </m:e>
-                              </m:d>
-                            </m:oMath>
-                          </a14:m>
-                          <a:r>
-                            <a:rPr lang="es-ES_tradnl" sz="2200" dirty="0">
-                              <a:latin typeface="Gill Sans Nova Light" panose="020B0302020104020203" pitchFamily="34" charset="0"/>
-                            </a:rPr>
-                            <a:t> distribución de </a:t>
-                          </a:r>
-                          <a14:m>
-                            <m:oMath xmlns:m="http://schemas.openxmlformats.org/officeDocument/2006/math">
-                              <m:r>
-                                <a:rPr lang="es-ES_tradnl" sz="2200" dirty="0">
-                                  <a:latin typeface="Cambria Math" panose="02040503050406030204" pitchFamily="18" charset="0"/>
-                                </a:rPr>
-                                <m:t>𝑌</m:t>
-                              </m:r>
-                            </m:oMath>
-                          </a14:m>
-                          <a:endParaRPr lang="es-ES_tradnl" sz="2200" dirty="0">
-                            <a:latin typeface="Gill Sans Nova Light" panose="020B0302020104020203" pitchFamily="34" charset="0"/>
-                          </a:endParaRPr>
-                        </a:p>
-                      </a:txBody>
-                      <a:tcPr anchor="ctr">
-                        <a:lnB w="12700" cap="flat" cmpd="sng" algn="ctr">
-                          <a:solidFill>
-                            <a:schemeClr val="tx1"/>
-                          </a:solidFill>
-                          <a:prstDash val="solid"/>
-                          <a:round/>
-                          <a:headEnd type="none" w="med" len="med"/>
-                          <a:tailEnd type="none" w="med" len="med"/>
-                        </a:lnB>
-                      </a:tcPr>
-                    </a:tc>
-                    <a:tc>
-                      <a:txBody>
-                        <a:bodyPr/>
-                        <a:lstStyle/>
-                        <a:p>
-                          <a:pPr marL="285750" lvl="0" indent="-285750">
-                            <a:buFont typeface="Arial" panose="020B0604020202020204" pitchFamily="34" charset="0"/>
-                            <a:buChar char="•"/>
-                          </a:pPr>
-                          <a:r>
-                            <a:rPr lang="es-ES_tradnl" sz="2200" dirty="0">
-                              <a:latin typeface="Gill Sans Nova Light" panose="020B0302020104020203" pitchFamily="34" charset="0"/>
-                            </a:rPr>
-                            <a:t>Histogramas</a:t>
-                          </a:r>
-                        </a:p>
-                        <a:p>
-                          <a:pPr marL="285750" lvl="0" indent="-285750">
-                            <a:buFont typeface="Arial" panose="020B0604020202020204" pitchFamily="34" charset="0"/>
-                            <a:buChar char="•"/>
-                          </a:pPr>
-                          <a:r>
-                            <a:rPr lang="es-ES_tradnl" sz="2200" dirty="0">
-                              <a:latin typeface="Gill Sans Nova Light" panose="020B0302020104020203" pitchFamily="34" charset="0"/>
-                            </a:rPr>
-                            <a:t>Kernels</a:t>
-                          </a:r>
-                        </a:p>
-                        <a:p>
-                          <a:endParaRPr lang="es-ES_tradnl" sz="2200" dirty="0">
-                            <a:latin typeface="Gill Sans Nova Light" panose="020B0302020104020203" pitchFamily="34" charset="0"/>
-                          </a:endParaRPr>
-                        </a:p>
-                      </a:txBody>
-                      <a:tcPr anchor="ctr">
-                        <a:lnR w="12700" cap="flat" cmpd="sng" algn="ctr">
-                          <a:solidFill>
-                            <a:schemeClr val="tx1"/>
-                          </a:solidFill>
-                          <a:prstDash val="solid"/>
-                          <a:round/>
-                          <a:headEnd type="none" w="med" len="med"/>
-                          <a:tailEnd type="none" w="med" len="med"/>
-                        </a:lnR>
-                        <a:lnB w="12700" cap="flat" cmpd="sng" algn="ctr">
-                          <a:solidFill>
-                            <a:schemeClr val="tx1"/>
-                          </a:solidFill>
-                          <a:prstDash val="solid"/>
-                          <a:round/>
-                          <a:headEnd type="none" w="med" len="med"/>
-                          <a:tailEnd type="none" w="med" len="med"/>
-                        </a:lnB>
-                      </a:tcPr>
-                    </a:tc>
-                    <a:extLst>
-                      <a:ext uri="{0D108BD9-81ED-4DB2-BD59-A6C34878D82A}">
-                        <a16:rowId xmlns:a16="http://schemas.microsoft.com/office/drawing/2014/main" val="933332684"/>
-                      </a:ext>
-                    </a:extLst>
-                  </a:tr>
-                  <a:tr h="1723164">
-                    <a:tc>
-                      <a:txBody>
-                        <a:bodyPr/>
-                        <a:lstStyle/>
-                        <a:p>
-                          <a:r>
-                            <a:rPr lang="es-ES_tradnl" sz="2200" dirty="0">
-                              <a:latin typeface="Gill Sans Nova Light" panose="020B0302020104020203" pitchFamily="34" charset="0"/>
-                            </a:rPr>
-                            <a:t>Modelos y Predicción</a:t>
-                          </a:r>
-                        </a:p>
-                      </a:txBody>
-                      <a:tcPr anchor="ctr">
-                        <a:lnL w="12700" cap="flat" cmpd="sng" algn="ctr">
-                          <a:solidFill>
-                            <a:schemeClr val="tx1"/>
-                          </a:solidFill>
-                          <a:prstDash val="solid"/>
-                          <a:round/>
-                          <a:headEnd type="none" w="med" len="med"/>
-                          <a:tailEnd type="none" w="med" len="med"/>
-                        </a:lnL>
-                        <a:lnT w="12700" cap="flat" cmpd="sng" algn="ctr">
-                          <a:solidFill>
-                            <a:schemeClr val="tx1"/>
-                          </a:solidFill>
-                          <a:prstDash val="solid"/>
-                          <a:round/>
-                          <a:headEnd type="none" w="med" len="med"/>
-                          <a:tailEnd type="none" w="med" len="med"/>
-                        </a:lnT>
-                        <a:lnB w="12700" cap="flat" cmpd="sng" algn="ctr">
-                          <a:solidFill>
-                            <a:schemeClr val="tx1"/>
-                          </a:solidFill>
-                          <a:prstDash val="solid"/>
-                          <a:round/>
-                          <a:headEnd type="none" w="med" len="med"/>
-                          <a:tailEnd type="none" w="med" len="med"/>
-                        </a:lnB>
-                      </a:tcPr>
-                    </a:tc>
-                    <a:tc>
-                      <a:txBody>
-                        <a:bodyPr/>
-                        <a:lstStyle/>
-                        <a:p>
-                          <a:pPr marL="0" marR="0" lvl="0" indent="0" algn="l" defTabSz="914400" rtl="0" eaLnBrk="1" fontAlgn="auto" latinLnBrk="0" hangingPunct="1">
-                            <a:lnSpc>
-                              <a:spcPct val="100000"/>
-                            </a:lnSpc>
-                            <a:spcBef>
-                              <a:spcPts val="0"/>
-                            </a:spcBef>
-                            <a:spcAft>
-                              <a:spcPts val="0"/>
-                            </a:spcAft>
-                            <a:buClrTx/>
-                            <a:buSzTx/>
-                            <a:buFontTx/>
-                            <a:buNone/>
-                            <a:tabLst/>
-                            <a:defRPr/>
-                          </a:pPr>
-                          <a:r>
-                            <a:rPr lang="es-ES_tradnl" sz="2200" dirty="0">
-                              <a:latin typeface="Gill Sans Nova Light" panose="020B0302020104020203" pitchFamily="34" charset="0"/>
-                            </a:rPr>
-                            <a:t>Aprendizaje Supervisado</a:t>
-                          </a:r>
-                        </a:p>
-                        <a:p>
-                          <a:endParaRPr lang="es-ES_tradnl" sz="2200" dirty="0">
-                            <a:latin typeface="Gill Sans Nova Light" panose="020B0302020104020203" pitchFamily="34" charset="0"/>
-                          </a:endParaRPr>
-                        </a:p>
-                      </a:txBody>
-                      <a:tcPr anchor="ctr">
-                        <a:lnT w="12700" cap="flat" cmpd="sng" algn="ctr">
-                          <a:solidFill>
-                            <a:schemeClr val="tx1"/>
-                          </a:solidFill>
-                          <a:prstDash val="solid"/>
-                          <a:round/>
-                          <a:headEnd type="none" w="med" len="med"/>
-                          <a:tailEnd type="none" w="med" len="med"/>
-                        </a:lnT>
-                        <a:lnB w="12700" cap="flat" cmpd="sng" algn="ctr">
-                          <a:solidFill>
-                            <a:schemeClr val="tx1"/>
-                          </a:solidFill>
-                          <a:prstDash val="solid"/>
-                          <a:round/>
-                          <a:headEnd type="none" w="med" len="med"/>
-                          <a:tailEnd type="none" w="med" len="med"/>
-                        </a:lnB>
-                      </a:tcPr>
-                    </a:tc>
-                    <a:tc>
-                      <a:txBody>
-                        <a:bodyPr/>
-                        <a:lstStyle/>
-                        <a:p>
-                          <a:r>
-                            <a:rPr lang="es-ES_tradnl" sz="2200" b="1" dirty="0">
-                              <a:latin typeface="Gill Sans Nova Light" panose="020B0302020104020203" pitchFamily="34" charset="0"/>
-                            </a:rPr>
-                            <a:t>Predecir</a:t>
-                          </a:r>
-                          <a:r>
-                            <a:rPr lang="es-ES_tradnl" sz="2200" dirty="0">
-                              <a:latin typeface="Gill Sans Nova Light" panose="020B0302020104020203" pitchFamily="34" charset="0"/>
-                            </a:rPr>
-                            <a:t>: </a:t>
-                          </a:r>
-                          <a14:m>
-                            <m:oMath xmlns:m="http://schemas.openxmlformats.org/officeDocument/2006/math">
-                              <m:r>
-                                <a:rPr lang="es-ES_tradnl" sz="2200" b="0" dirty="0" smtClean="0">
-                                  <a:latin typeface="Cambria Math" panose="02040503050406030204" pitchFamily="18" charset="0"/>
-                                </a:rPr>
-                                <m:t>𝑌</m:t>
-                              </m:r>
-                              <m:r>
-                                <a:rPr lang="es-ES_tradnl" sz="2200" b="0" dirty="0" smtClean="0">
-                                  <a:latin typeface="Cambria Math" panose="02040503050406030204" pitchFamily="18" charset="0"/>
-                                </a:rPr>
-                                <m:t>= (</m:t>
-                              </m:r>
-                              <m:sSub>
-                                <m:sSubPr>
-                                  <m:ctrlPr>
-                                    <a:rPr lang="en-US" sz="2200" i="1" dirty="0" smtClean="0">
-                                      <a:latin typeface="Cambria Math" panose="02040503050406030204" pitchFamily="18" charset="0"/>
-                                    </a:rPr>
-                                  </m:ctrlPr>
-                                </m:sSubPr>
-                                <m:e>
-                                  <m:r>
-                                    <a:rPr lang="es-ES_tradnl" sz="2200" b="0" dirty="0" smtClean="0">
-                                      <a:latin typeface="Cambria Math" panose="02040503050406030204" pitchFamily="18" charset="0"/>
-                                    </a:rPr>
-                                    <m:t>𝑌</m:t>
-                                  </m:r>
-                                </m:e>
-                                <m:sub>
-                                  <m:r>
-                                    <a:rPr lang="en-US" sz="2200" b="0" dirty="0" smtClean="0">
-                                      <a:latin typeface="Cambria Math" panose="02040503050406030204" pitchFamily="18" charset="0"/>
-                                    </a:rPr>
-                                    <m:t>1</m:t>
-                                  </m:r>
-                                </m:sub>
-                              </m:sSub>
-                              <m:r>
-                                <a:rPr lang="en-US" sz="2200" b="0" dirty="0" smtClean="0">
-                                  <a:latin typeface="Cambria Math" panose="02040503050406030204" pitchFamily="18" charset="0"/>
-                                </a:rPr>
-                                <m:t>,…, </m:t>
-                              </m:r>
-                              <m:sSub>
-                                <m:sSubPr>
-                                  <m:ctrlPr>
-                                    <a:rPr lang="en-US" sz="2200" i="1" dirty="0" smtClean="0">
-                                      <a:latin typeface="Cambria Math" panose="02040503050406030204" pitchFamily="18" charset="0"/>
-                                    </a:rPr>
-                                  </m:ctrlPr>
-                                </m:sSubPr>
-                                <m:e>
-                                  <m:r>
-                                    <a:rPr lang="en-US" sz="2200" b="0" dirty="0" smtClean="0">
-                                      <a:latin typeface="Cambria Math" panose="02040503050406030204" pitchFamily="18" charset="0"/>
-                                    </a:rPr>
-                                    <m:t>𝑌</m:t>
-                                  </m:r>
-                                </m:e>
-                                <m:sub>
-                                  <m:r>
-                                    <a:rPr lang="en-US" sz="2200" b="0" dirty="0" smtClean="0">
-                                      <a:latin typeface="Cambria Math" panose="02040503050406030204" pitchFamily="18" charset="0"/>
-                                    </a:rPr>
-                                    <m:t>𝑛</m:t>
-                                  </m:r>
-                                </m:sub>
-                              </m:sSub>
-                              <m:r>
-                                <a:rPr lang="es-ES_tradnl" sz="2200" b="0" dirty="0" smtClean="0">
-                                  <a:latin typeface="Cambria Math" panose="02040503050406030204" pitchFamily="18" charset="0"/>
-                                </a:rPr>
-                                <m:t>)</m:t>
-                              </m:r>
-                            </m:oMath>
-                          </a14:m>
-                          <a:endParaRPr lang="es-ES_tradnl" sz="2200" dirty="0">
-                            <a:latin typeface="Gill Sans Nova Light" panose="020B0302020104020203" pitchFamily="34" charset="0"/>
-                          </a:endParaRPr>
-                        </a:p>
-                        <a:p>
-                          <a:r>
-                            <a:rPr lang="es-ES_tradnl" sz="2200" dirty="0">
-                              <a:latin typeface="Gill Sans Nova Light" panose="020B0302020104020203" pitchFamily="34" charset="0"/>
-                            </a:rPr>
-                            <a:t>Inputs: </a:t>
-                          </a:r>
-                          <a14:m>
-                            <m:oMath xmlns:m="http://schemas.openxmlformats.org/officeDocument/2006/math">
-                              <m:sSup>
-                                <m:sSupPr>
-                                  <m:ctrlPr>
-                                    <a:rPr lang="en-US" sz="2200" b="0" i="1" dirty="0" smtClean="0">
-                                      <a:latin typeface="Cambria Math" panose="02040503050406030204" pitchFamily="18" charset="0"/>
-                                    </a:rPr>
-                                  </m:ctrlPr>
-                                </m:sSupPr>
-                                <m:e>
-                                  <m:r>
-                                    <a:rPr lang="en-US" sz="2200" b="0" dirty="0" smtClean="0">
-                                      <a:latin typeface="Cambria Math" panose="02040503050406030204" pitchFamily="18" charset="0"/>
-                                    </a:rPr>
-                                    <m:t>𝑋</m:t>
-                                  </m:r>
-                                </m:e>
-                                <m:sup>
-                                  <m:r>
-                                    <a:rPr lang="en-US" sz="2200" b="0" dirty="0" smtClean="0">
-                                      <a:latin typeface="Cambria Math" panose="02040503050406030204" pitchFamily="18" charset="0"/>
-                                    </a:rPr>
-                                    <m:t>′</m:t>
-                                  </m:r>
-                                </m:sup>
-                              </m:sSup>
-                              <m:r>
-                                <a:rPr lang="es-ES_tradnl" sz="2200" b="0" dirty="0" smtClean="0">
-                                  <a:latin typeface="Cambria Math" panose="02040503050406030204" pitchFamily="18" charset="0"/>
-                                </a:rPr>
-                                <m:t>= (</m:t>
-                              </m:r>
-                              <m:sSub>
-                                <m:sSubPr>
-                                  <m:ctrlPr>
-                                    <a:rPr lang="en-US" sz="2200" i="1" dirty="0" smtClean="0">
-                                      <a:latin typeface="Cambria Math" panose="02040503050406030204" pitchFamily="18" charset="0"/>
-                                    </a:rPr>
-                                  </m:ctrlPr>
-                                </m:sSubPr>
-                                <m:e>
-                                  <m:r>
-                                    <a:rPr lang="en-US" sz="2200" b="0" dirty="0" smtClean="0">
-                                      <a:latin typeface="Cambria Math" panose="02040503050406030204" pitchFamily="18" charset="0"/>
-                                    </a:rPr>
-                                    <m:t>𝑋</m:t>
-                                  </m:r>
-                                </m:e>
-                                <m:sub>
-                                  <m:r>
-                                    <a:rPr lang="en-US" sz="2200" b="0" dirty="0" smtClean="0">
-                                      <a:latin typeface="Cambria Math" panose="02040503050406030204" pitchFamily="18" charset="0"/>
-                                    </a:rPr>
-                                    <m:t>1</m:t>
-                                  </m:r>
-                                </m:sub>
-                              </m:sSub>
-                              <m:r>
-                                <a:rPr lang="en-US" sz="2200" b="0" dirty="0" smtClean="0">
-                                  <a:latin typeface="Cambria Math" panose="02040503050406030204" pitchFamily="18" charset="0"/>
-                                </a:rPr>
-                                <m:t>,…, </m:t>
-                              </m:r>
-                              <m:sSub>
-                                <m:sSubPr>
-                                  <m:ctrlPr>
-                                    <a:rPr lang="en-US" sz="2200" i="1" dirty="0" smtClean="0">
-                                      <a:latin typeface="Cambria Math" panose="02040503050406030204" pitchFamily="18" charset="0"/>
-                                    </a:rPr>
-                                  </m:ctrlPr>
-                                </m:sSubPr>
-                                <m:e>
-                                  <m:r>
-                                    <a:rPr lang="en-US" sz="2200" b="0" dirty="0" smtClean="0">
-                                      <a:latin typeface="Cambria Math" panose="02040503050406030204" pitchFamily="18" charset="0"/>
-                                    </a:rPr>
-                                    <m:t>𝑋</m:t>
-                                  </m:r>
-                                </m:e>
-                                <m:sub>
-                                  <m:r>
-                                    <a:rPr lang="en-US" sz="2200" b="0" dirty="0" smtClean="0">
-                                      <a:latin typeface="Cambria Math" panose="02040503050406030204" pitchFamily="18" charset="0"/>
-                                    </a:rPr>
-                                    <m:t>𝑝</m:t>
-                                  </m:r>
-                                </m:sub>
-                              </m:sSub>
-                              <m:r>
-                                <a:rPr lang="es-ES_tradnl" sz="2200" b="0" dirty="0" smtClean="0">
-                                  <a:latin typeface="Cambria Math" panose="02040503050406030204" pitchFamily="18" charset="0"/>
-                                </a:rPr>
-                                <m:t>)</m:t>
-                              </m:r>
-                            </m:oMath>
-                          </a14:m>
-                          <a:endParaRPr lang="es-ES_tradnl" sz="2200" dirty="0">
-                            <a:latin typeface="Gill Sans Nova Light" panose="020B0302020104020203" pitchFamily="34" charset="0"/>
-                          </a:endParaRPr>
-                        </a:p>
-                        <a:p>
-                          <a:endParaRPr lang="es-ES_tradnl" sz="1200" dirty="0">
-                            <a:latin typeface="Gill Sans Nova Light" panose="020B0302020104020203" pitchFamily="34" charset="0"/>
-                          </a:endParaRPr>
-                        </a:p>
-                        <a:p>
-                          <a:r>
-                            <a:rPr lang="es-ES_tradnl" sz="2200" dirty="0">
-                              <a:latin typeface="Gill Sans Nova Light" panose="020B0302020104020203" pitchFamily="34" charset="0"/>
-                            </a:rPr>
-                            <a:t> </a:t>
-                          </a:r>
-                          <a14:m>
-                            <m:oMath xmlns:m="http://schemas.openxmlformats.org/officeDocument/2006/math">
-                              <m:r>
-                                <a:rPr lang="es-ES_tradnl" sz="2200" b="0" dirty="0" smtClean="0">
-                                  <a:latin typeface="Cambria Math" panose="02040503050406030204" pitchFamily="18" charset="0"/>
-                                </a:rPr>
-                                <m:t>𝑌</m:t>
-                              </m:r>
-                            </m:oMath>
-                          </a14:m>
-                          <a:r>
-                            <a:rPr lang="es-ES_tradnl" sz="2200" dirty="0">
-                              <a:latin typeface="Gill Sans Nova Light" panose="020B0302020104020203" pitchFamily="34" charset="0"/>
-                            </a:rPr>
-                            <a:t> cuantitativo -&gt;</a:t>
-                          </a:r>
-                          <a:r>
-                            <a:rPr lang="es-ES_tradnl" sz="2200" baseline="0" dirty="0">
-                              <a:latin typeface="Gill Sans Nova Light" panose="020B0302020104020203" pitchFamily="34" charset="0"/>
-                            </a:rPr>
-                            <a:t> Regresión</a:t>
-                          </a:r>
-                        </a:p>
-                        <a:p>
-                          <a:r>
-                            <a:rPr lang="es-ES_tradnl" sz="2200" dirty="0">
-                              <a:latin typeface="Gill Sans Nova Light" panose="020B0302020104020203" pitchFamily="34" charset="0"/>
-                            </a:rPr>
-                            <a:t> </a:t>
-                          </a:r>
-                          <a14:m>
-                            <m:oMath xmlns:m="http://schemas.openxmlformats.org/officeDocument/2006/math">
-                              <m:r>
-                                <a:rPr lang="es-ES_tradnl" sz="2200" b="0" dirty="0" smtClean="0">
-                                  <a:latin typeface="Cambria Math" panose="02040503050406030204" pitchFamily="18" charset="0"/>
-                                </a:rPr>
-                                <m:t>𝑌</m:t>
-                              </m:r>
-                            </m:oMath>
-                          </a14:m>
-                          <a:r>
-                            <a:rPr lang="es-ES_tradnl" sz="2200" dirty="0">
-                              <a:latin typeface="Gill Sans Nova Light" panose="020B0302020104020203" pitchFamily="34" charset="0"/>
-                            </a:rPr>
-                            <a:t> binaria</a:t>
-                          </a:r>
-                          <a:r>
-                            <a:rPr lang="es-ES_tradnl" sz="2200" baseline="0" dirty="0">
-                              <a:latin typeface="Gill Sans Nova Light" panose="020B0302020104020203" pitchFamily="34" charset="0"/>
-                            </a:rPr>
-                            <a:t> o categórica -&gt; Clasificación</a:t>
-                          </a:r>
-                          <a:endParaRPr lang="es-ES_tradnl" sz="2200" dirty="0">
-                            <a:latin typeface="Gill Sans Nova Light" panose="020B0302020104020203" pitchFamily="34" charset="0"/>
-                          </a:endParaRPr>
-                        </a:p>
-                      </a:txBody>
-                      <a:tcPr anchor="ctr">
-                        <a:lnT w="12700" cap="flat" cmpd="sng" algn="ctr">
-                          <a:solidFill>
-                            <a:schemeClr val="tx1"/>
-                          </a:solidFill>
-                          <a:prstDash val="solid"/>
-                          <a:round/>
-                          <a:headEnd type="none" w="med" len="med"/>
-                          <a:tailEnd type="none" w="med" len="med"/>
-                        </a:lnT>
-                        <a:lnB w="12700" cap="flat" cmpd="sng" algn="ctr">
-                          <a:solidFill>
-                            <a:schemeClr val="tx1"/>
-                          </a:solidFill>
-                          <a:prstDash val="solid"/>
-                          <a:round/>
-                          <a:headEnd type="none" w="med" len="med"/>
-                          <a:tailEnd type="none" w="med" len="med"/>
-                        </a:lnB>
-                      </a:tcPr>
-                    </a:tc>
-                    <a:tc>
-                      <a:txBody>
-                        <a:bodyPr/>
-                        <a:lstStyle/>
-                        <a:p>
-                          <a:pPr marL="285750" indent="-285750">
-                            <a:buFont typeface="Arial" panose="020B0604020202020204" pitchFamily="34" charset="0"/>
-                            <a:buChar char="•"/>
-                          </a:pPr>
-                          <a:r>
-                            <a:rPr lang="es-ES_tradnl" sz="2200" dirty="0">
-                              <a:latin typeface="Gill Sans Nova Light" panose="020B0302020104020203" pitchFamily="34" charset="0"/>
-                            </a:rPr>
-                            <a:t>MCO</a:t>
-                          </a:r>
-                        </a:p>
-                        <a:p>
-                          <a:pPr marL="285750" indent="-285750">
-                            <a:buFont typeface="Arial" panose="020B0604020202020204" pitchFamily="34" charset="0"/>
-                            <a:buChar char="•"/>
-                          </a:pPr>
-                          <a:r>
-                            <a:rPr lang="es-ES_tradnl" sz="2200" dirty="0" err="1">
-                              <a:latin typeface="Gill Sans Nova Light" panose="020B0302020104020203" pitchFamily="34" charset="0"/>
-                            </a:rPr>
-                            <a:t>Logit</a:t>
-                          </a:r>
-                          <a:r>
-                            <a:rPr lang="es-ES_tradnl" sz="2200" dirty="0">
-                              <a:latin typeface="Gill Sans Nova Light" panose="020B0302020104020203" pitchFamily="34" charset="0"/>
-                            </a:rPr>
-                            <a:t>, LDA, QDA, KNN</a:t>
-                          </a:r>
-                        </a:p>
-                        <a:p>
-                          <a:pPr marL="285750" indent="-285750">
-                            <a:buFont typeface="Arial" panose="020B0604020202020204" pitchFamily="34" charset="0"/>
-                            <a:buChar char="•"/>
-                          </a:pPr>
-                          <a:r>
-                            <a:rPr lang="es-ES_tradnl" sz="2200" dirty="0">
-                              <a:latin typeface="Gill Sans Nova Light" panose="020B0302020104020203" pitchFamily="34" charset="0"/>
-                            </a:rPr>
-                            <a:t>Y otros…</a:t>
-                          </a:r>
-                        </a:p>
-                        <a:p>
-                          <a:pPr marL="285750" indent="-285750">
-                            <a:buFont typeface="Arial" panose="020B0604020202020204" pitchFamily="34" charset="0"/>
-                            <a:buChar char="•"/>
-                          </a:pPr>
-                          <a:endParaRPr lang="es-ES_tradnl" sz="2200" dirty="0">
-                            <a:latin typeface="Gill Sans Nova Light" panose="020B0302020104020203" pitchFamily="34" charset="0"/>
-                          </a:endParaRPr>
-                        </a:p>
-                      </a:txBody>
-                      <a:tcPr anchor="ctr">
-                        <a:lnR w="12700" cap="flat" cmpd="sng" algn="ctr">
-                          <a:solidFill>
-                            <a:schemeClr val="tx1"/>
-                          </a:solidFill>
-                          <a:prstDash val="solid"/>
-                          <a:round/>
-                          <a:headEnd type="none" w="med" len="med"/>
-                          <a:tailEnd type="none" w="med" len="med"/>
-                        </a:lnR>
-                        <a:lnT w="12700" cap="flat" cmpd="sng" algn="ctr">
-                          <a:solidFill>
-                            <a:schemeClr val="tx1"/>
-                          </a:solidFill>
-                          <a:prstDash val="solid"/>
-                          <a:round/>
-                          <a:headEnd type="none" w="med" len="med"/>
-                          <a:tailEnd type="none" w="med" len="med"/>
-                        </a:lnT>
-                        <a:lnB w="12700" cap="flat" cmpd="sng" algn="ctr">
-                          <a:solidFill>
-                            <a:schemeClr val="tx1"/>
-                          </a:solidFill>
-                          <a:prstDash val="solid"/>
-                          <a:round/>
-                          <a:headEnd type="none" w="med" len="med"/>
-                          <a:tailEnd type="none" w="med" len="med"/>
-                        </a:lnB>
-                      </a:tcPr>
-                    </a:tc>
-                    <a:extLst>
-                      <a:ext uri="{0D108BD9-81ED-4DB2-BD59-A6C34878D82A}">
-                        <a16:rowId xmlns:a16="http://schemas.microsoft.com/office/drawing/2014/main" val="715415779"/>
-                      </a:ext>
-                    </a:extLst>
-                  </a:tr>
-                </a:tbl>
-              </a:graphicData>
-            </a:graphic>
-          </p:graphicFrame>
-        </mc:Choice>
-        <mc:Fallback xmlns="">
-          <p:graphicFrame>
-            <p:nvGraphicFramePr>
-              <p:cNvPr id="4" name="Content Placeholder 3">
-                <a:extLst>
-                  <a:ext uri="{FF2B5EF4-FFF2-40B4-BE49-F238E27FC236}">
-                    <a16:creationId xmlns:a16="http://schemas.microsoft.com/office/drawing/2014/main" id="{08559E05-DBC3-8301-D584-275312741E4C}"/>
-                  </a:ext>
-                </a:extLst>
-              </p:cNvPr>
-              <p:cNvGraphicFramePr>
-                <a:graphicFrameLocks noGrp="1"/>
-              </p:cNvGraphicFramePr>
-              <p:nvPr>
-                <p:ph idx="1"/>
-                <p:extLst>
-                  <p:ext uri="{D42A27DB-BD31-4B8C-83A1-F6EECF244321}">
-                    <p14:modId xmlns:p14="http://schemas.microsoft.com/office/powerpoint/2010/main" val="3431141794"/>
-                  </p:ext>
-                </p:extLst>
-              </p:nvPr>
-            </p:nvGraphicFramePr>
-            <p:xfrm>
-              <a:off x="617621" y="1496447"/>
-              <a:ext cx="10956757" cy="4724400"/>
-            </p:xfrm>
-            <a:graphic>
-              <a:graphicData uri="http://schemas.openxmlformats.org/drawingml/2006/table">
-                <a:tbl>
-                  <a:tblPr firstRow="1" bandRow="1">
-                    <a:tableStyleId>{F2DE63D5-997A-4646-A377-4702673A728D}</a:tableStyleId>
-                  </a:tblPr>
-                  <a:tblGrid>
-                    <a:gridCol w="1540043">
-                      <a:extLst>
-                        <a:ext uri="{9D8B030D-6E8A-4147-A177-3AD203B41FA5}">
-                          <a16:colId xmlns:a16="http://schemas.microsoft.com/office/drawing/2014/main" val="1029663632"/>
-                        </a:ext>
-                      </a:extLst>
-                    </a:gridCol>
-                    <a:gridCol w="1915804">
-                      <a:extLst>
-                        <a:ext uri="{9D8B030D-6E8A-4147-A177-3AD203B41FA5}">
-                          <a16:colId xmlns:a16="http://schemas.microsoft.com/office/drawing/2014/main" val="3989478329"/>
-                        </a:ext>
-                      </a:extLst>
-                    </a:gridCol>
-                    <a:gridCol w="5265262">
-                      <a:extLst>
-                        <a:ext uri="{9D8B030D-6E8A-4147-A177-3AD203B41FA5}">
-                          <a16:colId xmlns:a16="http://schemas.microsoft.com/office/drawing/2014/main" val="1368382703"/>
-                        </a:ext>
-                      </a:extLst>
-                    </a:gridCol>
-                    <a:gridCol w="2235648">
-                      <a:extLst>
-                        <a:ext uri="{9D8B030D-6E8A-4147-A177-3AD203B41FA5}">
-                          <a16:colId xmlns:a16="http://schemas.microsoft.com/office/drawing/2014/main" val="995975348"/>
-                        </a:ext>
-                      </a:extLst>
-                    </a:gridCol>
-                  </a:tblGrid>
-                  <a:tr h="762000">
-                    <a:tc>
-                      <a:txBody>
-                        <a:bodyPr/>
-                        <a:lstStyle/>
-                        <a:p>
-                          <a:pPr algn="ctr"/>
-                          <a:r>
-                            <a:rPr lang="es-ES_tradnl" sz="2200" dirty="0">
-                              <a:latin typeface="Gill Sans Nova Light" panose="020B0302020104020203" pitchFamily="34" charset="0"/>
-                            </a:rPr>
-                            <a:t>Etapas</a:t>
-                          </a:r>
-                        </a:p>
-                      </a:txBody>
-                      <a:tcPr anchor="ctr">
-                        <a:lnL w="12700" cap="flat" cmpd="sng" algn="ctr">
-                          <a:solidFill>
-                            <a:schemeClr val="tx1"/>
-                          </a:solidFill>
-                          <a:prstDash val="solid"/>
-                          <a:round/>
-                          <a:headEnd type="none" w="med" len="med"/>
-                          <a:tailEnd type="none" w="med" len="med"/>
-                        </a:lnL>
-                        <a:lnT w="12700" cap="flat" cmpd="sng" algn="ctr">
-                          <a:solidFill>
-                            <a:schemeClr val="tx1"/>
-                          </a:solidFill>
-                          <a:prstDash val="solid"/>
-                          <a:round/>
-                          <a:headEnd type="none" w="med" len="med"/>
-                          <a:tailEnd type="none" w="med" len="med"/>
-                        </a:lnT>
-                        <a:solidFill>
-                          <a:srgbClr val="002060"/>
-                        </a:solidFill>
-                      </a:tcPr>
-                    </a:tc>
-                    <a:tc>
-                      <a:txBody>
-                        <a:bodyPr/>
-                        <a:lstStyle/>
-                        <a:p>
-                          <a:pPr algn="ctr"/>
-                          <a:r>
-                            <a:rPr lang="es-ES_tradnl" sz="2200" dirty="0">
-                              <a:latin typeface="Gill Sans Nova Light" panose="020B0302020104020203" pitchFamily="34" charset="0"/>
-                            </a:rPr>
-                            <a:t>Tipo de Aprendizaje</a:t>
-                          </a:r>
-                        </a:p>
-                      </a:txBody>
-                      <a:tcPr anchor="ctr">
-                        <a:lnT w="12700" cap="flat" cmpd="sng" algn="ctr">
-                          <a:solidFill>
-                            <a:schemeClr val="tx1"/>
-                          </a:solidFill>
-                          <a:prstDash val="solid"/>
-                          <a:round/>
-                          <a:headEnd type="none" w="med" len="med"/>
-                          <a:tailEnd type="none" w="med" len="med"/>
-                        </a:lnT>
-                        <a:solidFill>
-                          <a:srgbClr val="002060"/>
-                        </a:solidFill>
-                      </a:tcPr>
-                    </a:tc>
-                    <a:tc>
-                      <a:txBody>
-                        <a:bodyPr/>
-                        <a:lstStyle/>
-                        <a:p>
-                          <a:pPr algn="ctr"/>
-                          <a:r>
-                            <a:rPr lang="es-ES_tradnl" sz="2200" dirty="0">
-                              <a:latin typeface="Gill Sans Nova Light" panose="020B0302020104020203" pitchFamily="34" charset="0"/>
-                            </a:rPr>
-                            <a:t>Idea</a:t>
-                          </a:r>
-                        </a:p>
-                      </a:txBody>
-                      <a:tcPr anchor="ctr">
-                        <a:lnT w="12700" cap="flat" cmpd="sng" algn="ctr">
-                          <a:solidFill>
-                            <a:schemeClr val="tx1"/>
-                          </a:solidFill>
-                          <a:prstDash val="solid"/>
-                          <a:round/>
-                          <a:headEnd type="none" w="med" len="med"/>
-                          <a:tailEnd type="none" w="med" len="med"/>
-                        </a:lnT>
-                        <a:solidFill>
-                          <a:srgbClr val="002060"/>
-                        </a:solidFill>
-                      </a:tcPr>
-                    </a:tc>
-                    <a:tc>
-                      <a:txBody>
-                        <a:bodyPr/>
-                        <a:lstStyle/>
-                        <a:p>
-                          <a:pPr algn="ctr"/>
-                          <a:r>
-                            <a:rPr lang="es-ES_tradnl" sz="2200" dirty="0">
-                              <a:latin typeface="Gill Sans Nova Light" panose="020B0302020104020203" pitchFamily="34" charset="0"/>
-                            </a:rPr>
-                            <a:t>Métodos</a:t>
-                          </a:r>
-                        </a:p>
-                      </a:txBody>
-                      <a:tcPr anchor="ctr">
-                        <a:lnR w="12700" cap="flat" cmpd="sng" algn="ctr">
-                          <a:solidFill>
-                            <a:schemeClr val="tx1"/>
-                          </a:solidFill>
-                          <a:prstDash val="solid"/>
-                          <a:round/>
-                          <a:headEnd type="none" w="med" len="med"/>
-                          <a:tailEnd type="none" w="med" len="med"/>
-                        </a:lnR>
-                        <a:lnT w="12700" cap="flat" cmpd="sng" algn="ctr">
-                          <a:solidFill>
-                            <a:schemeClr val="tx1"/>
-                          </a:solidFill>
-                          <a:prstDash val="solid"/>
-                          <a:round/>
-                          <a:headEnd type="none" w="med" len="med"/>
-                          <a:tailEnd type="none" w="med" len="med"/>
-                        </a:lnT>
-                        <a:solidFill>
-                          <a:srgbClr val="002060"/>
-                        </a:solidFill>
-                      </a:tcPr>
-                    </a:tc>
-                    <a:extLst>
-                      <a:ext uri="{0D108BD9-81ED-4DB2-BD59-A6C34878D82A}">
-                        <a16:rowId xmlns:a16="http://schemas.microsoft.com/office/drawing/2014/main" val="11467572"/>
-                      </a:ext>
-                    </a:extLst>
-                  </a:tr>
-                  <a:tr h="1097280">
-                    <a:tc rowSpan="2">
-                      <a:txBody>
-                        <a:bodyPr/>
-                        <a:lstStyle/>
-                        <a:p>
-                          <a:r>
-                            <a:rPr lang="es-ES_tradnl" sz="2200" dirty="0">
-                              <a:latin typeface="Gill Sans Nova Light" panose="020B0302020104020203" pitchFamily="34" charset="0"/>
-                            </a:rPr>
-                            <a:t>Explorativa</a:t>
-                          </a:r>
-                        </a:p>
-                        <a:p>
-                          <a:pPr marL="0" marR="0" lvl="0" indent="0" algn="l" defTabSz="914400" rtl="0" eaLnBrk="1" fontAlgn="auto" latinLnBrk="0" hangingPunct="1">
-                            <a:lnSpc>
-                              <a:spcPct val="100000"/>
-                            </a:lnSpc>
-                            <a:spcBef>
-                              <a:spcPts val="0"/>
-                            </a:spcBef>
-                            <a:spcAft>
-                              <a:spcPts val="0"/>
-                            </a:spcAft>
-                            <a:buClrTx/>
-                            <a:buSzTx/>
-                            <a:buFontTx/>
-                            <a:buNone/>
-                            <a:tabLst/>
-                            <a:defRPr/>
-                          </a:pPr>
-                          <a:endParaRPr lang="es-ES_tradnl" sz="2200" dirty="0">
-                            <a:latin typeface="Gill Sans Nova Light" panose="020B0302020104020203" pitchFamily="34" charset="0"/>
-                          </a:endParaRPr>
-                        </a:p>
-                        <a:p>
-                          <a:endParaRPr lang="es-ES_tradnl" sz="2200" dirty="0">
-                            <a:latin typeface="Gill Sans Nova Light" panose="020B0302020104020203" pitchFamily="34" charset="0"/>
-                          </a:endParaRPr>
-                        </a:p>
-                      </a:txBody>
-                      <a:tcPr anchor="ctr">
-                        <a:lnL w="12700" cap="flat" cmpd="sng" algn="ctr">
-                          <a:solidFill>
-                            <a:schemeClr val="tx1"/>
-                          </a:solidFill>
-                          <a:prstDash val="solid"/>
-                          <a:round/>
-                          <a:headEnd type="none" w="med" len="med"/>
-                          <a:tailEnd type="none" w="med" len="med"/>
-                        </a:lnL>
-                        <a:lnB w="12700" cap="flat" cmpd="sng" algn="ctr">
-                          <a:solidFill>
-                            <a:schemeClr val="tx1"/>
-                          </a:solidFill>
-                          <a:prstDash val="solid"/>
-                          <a:round/>
-                          <a:headEnd type="none" w="med" len="med"/>
-                          <a:tailEnd type="none" w="med" len="med"/>
-                        </a:lnB>
-                      </a:tcPr>
-                    </a:tc>
-                    <a:tc>
-                      <a:txBody>
-                        <a:bodyPr/>
-                        <a:lstStyle/>
-                        <a:p>
-                          <a:r>
-                            <a:rPr lang="es-ES_tradnl" sz="2200" dirty="0">
-                              <a:latin typeface="Gill Sans Nova Light" panose="020B0302020104020203" pitchFamily="34" charset="0"/>
-                            </a:rPr>
-                            <a:t>Aprendizaje No Supervisado</a:t>
-                          </a:r>
-                        </a:p>
-                      </a:txBody>
-                      <a:tcPr anchor="ctr"/>
-                    </a:tc>
-                    <a:tc>
-                      <a:txBody>
-                        <a:bodyPr/>
-                        <a:lstStyle/>
-                        <a:p>
-                          <a:endParaRPr lang="en-US"/>
-                        </a:p>
-                      </a:txBody>
-                      <a:tcPr anchor="ctr">
-                        <a:blipFill>
-                          <a:blip r:embed="rId2"/>
-                          <a:stretch>
-                            <a:fillRect l="-65783" t="-72414" r="-42651" b="-265517"/>
-                          </a:stretch>
-                        </a:blipFill>
-                      </a:tcPr>
-                    </a:tc>
-                    <a:tc>
-                      <a:txBody>
-                        <a:bodyPr/>
-                        <a:lstStyle/>
-                        <a:p>
-                          <a:pPr marL="285750" lvl="0" indent="-285750">
-                            <a:buFont typeface="Arial" panose="020B0604020202020204" pitchFamily="34" charset="0"/>
-                            <a:buChar char="•"/>
-                          </a:pPr>
-                          <a:r>
-                            <a:rPr lang="es-ES_tradnl" sz="2200" dirty="0">
-                              <a:latin typeface="Gill Sans Nova Light" panose="020B0302020104020203" pitchFamily="34" charset="0"/>
-                            </a:rPr>
-                            <a:t>PCA</a:t>
-                          </a:r>
-                        </a:p>
-                        <a:p>
-                          <a:pPr marL="285750" lvl="0" indent="-285750">
-                            <a:buFont typeface="Arial" panose="020B0604020202020204" pitchFamily="34" charset="0"/>
-                            <a:buChar char="•"/>
-                          </a:pPr>
-                          <a:r>
-                            <a:rPr lang="es-ES_tradnl" sz="2200" dirty="0">
-                              <a:latin typeface="Gill Sans Nova Light" panose="020B0302020104020203" pitchFamily="34" charset="0"/>
-                            </a:rPr>
-                            <a:t>Clusters</a:t>
-                          </a:r>
-                        </a:p>
-                        <a:p>
-                          <a:endParaRPr lang="es-ES_tradnl" sz="2200" dirty="0">
-                            <a:latin typeface="Gill Sans Nova Light" panose="020B0302020104020203" pitchFamily="34" charset="0"/>
-                          </a:endParaRPr>
-                        </a:p>
-                      </a:txBody>
-                      <a:tcPr anchor="ctr">
-                        <a:lnR w="12700" cap="flat" cmpd="sng" algn="ctr">
-                          <a:solidFill>
-                            <a:schemeClr val="tx1"/>
-                          </a:solidFill>
-                          <a:prstDash val="solid"/>
-                          <a:round/>
-                          <a:headEnd type="none" w="med" len="med"/>
-                          <a:tailEnd type="none" w="med" len="med"/>
-                        </a:lnR>
-                      </a:tcPr>
-                    </a:tc>
-                    <a:extLst>
-                      <a:ext uri="{0D108BD9-81ED-4DB2-BD59-A6C34878D82A}">
-                        <a16:rowId xmlns:a16="http://schemas.microsoft.com/office/drawing/2014/main" val="2145790582"/>
-                      </a:ext>
-                    </a:extLst>
-                  </a:tr>
-                  <a:tr h="1097280">
-                    <a:tc vMerge="1">
-                      <a:txBody>
-                        <a:bodyPr/>
-                        <a:lstStyle/>
-                        <a:p>
-                          <a:pPr marL="0" marR="0" lvl="0" indent="0" algn="l" defTabSz="914400" rtl="0" eaLnBrk="1" fontAlgn="auto" latinLnBrk="0" hangingPunct="1">
-                            <a:lnSpc>
-                              <a:spcPct val="100000"/>
-                            </a:lnSpc>
-                            <a:spcBef>
-                              <a:spcPts val="0"/>
-                            </a:spcBef>
-                            <a:spcAft>
-                              <a:spcPts val="0"/>
-                            </a:spcAft>
-                            <a:buClrTx/>
-                            <a:buSzTx/>
-                            <a:buFontTx/>
-                            <a:buNone/>
-                            <a:tabLst/>
-                            <a:defRPr/>
-                          </a:pPr>
-                          <a:r>
-                            <a:rPr lang="es-ES_tradnl" sz="2200" dirty="0">
-                              <a:latin typeface="Gill Sans Nova Light" panose="020B0302020104020203" pitchFamily="34" charset="0"/>
-                            </a:rPr>
-                            <a:t>Explorativa</a:t>
-                          </a:r>
-                        </a:p>
-                        <a:p>
-                          <a:endParaRPr lang="es-ES_tradnl" sz="2200" dirty="0">
-                            <a:latin typeface="Gill Sans Nova Light" panose="020B0302020104020203" pitchFamily="34" charset="0"/>
-                          </a:endParaRPr>
-                        </a:p>
-                      </a:txBody>
-                      <a:tcPr/>
-                    </a:tc>
-                    <a:tc>
-                      <a:txBody>
-                        <a:bodyPr/>
-                        <a:lstStyle/>
-                        <a:p>
-                          <a:r>
-                            <a:rPr lang="es-ES_tradnl" sz="2200" dirty="0">
-                              <a:latin typeface="Gill Sans Nova Light" panose="020B0302020104020203" pitchFamily="34" charset="0"/>
-                            </a:rPr>
-                            <a:t>Aprendizaje Supervisado</a:t>
-                          </a:r>
-                        </a:p>
-                      </a:txBody>
-                      <a:tcPr anchor="ctr">
-                        <a:lnB w="12700" cap="flat" cmpd="sng" algn="ctr">
-                          <a:solidFill>
-                            <a:schemeClr val="tx1"/>
-                          </a:solidFill>
-                          <a:prstDash val="solid"/>
-                          <a:round/>
-                          <a:headEnd type="none" w="med" len="med"/>
-                          <a:tailEnd type="none" w="med" len="med"/>
-                        </a:lnB>
-                      </a:tcPr>
-                    </a:tc>
-                    <a:tc>
-                      <a:txBody>
-                        <a:bodyPr/>
-                        <a:lstStyle/>
-                        <a:p>
-                          <a:endParaRPr lang="en-US"/>
-                        </a:p>
-                      </a:txBody>
-                      <a:tcPr anchor="ctr">
-                        <a:lnB w="12700" cap="flat" cmpd="sng" algn="ctr">
-                          <a:solidFill>
-                            <a:schemeClr val="tx1"/>
-                          </a:solidFill>
-                          <a:prstDash val="solid"/>
-                          <a:round/>
-                          <a:headEnd type="none" w="med" len="med"/>
-                          <a:tailEnd type="none" w="med" len="med"/>
-                        </a:lnB>
-                        <a:blipFill>
-                          <a:blip r:embed="rId2"/>
-                          <a:stretch>
-                            <a:fillRect l="-65783" t="-174419" r="-42651" b="-168605"/>
-                          </a:stretch>
-                        </a:blipFill>
-                      </a:tcPr>
-                    </a:tc>
-                    <a:tc>
-                      <a:txBody>
-                        <a:bodyPr/>
-                        <a:lstStyle/>
-                        <a:p>
-                          <a:pPr marL="285750" lvl="0" indent="-285750">
-                            <a:buFont typeface="Arial" panose="020B0604020202020204" pitchFamily="34" charset="0"/>
-                            <a:buChar char="•"/>
-                          </a:pPr>
-                          <a:r>
-                            <a:rPr lang="es-ES_tradnl" sz="2200" dirty="0">
-                              <a:latin typeface="Gill Sans Nova Light" panose="020B0302020104020203" pitchFamily="34" charset="0"/>
-                            </a:rPr>
-                            <a:t>Histogramas</a:t>
-                          </a:r>
-                        </a:p>
-                        <a:p>
-                          <a:pPr marL="285750" lvl="0" indent="-285750">
-                            <a:buFont typeface="Arial" panose="020B0604020202020204" pitchFamily="34" charset="0"/>
-                            <a:buChar char="•"/>
-                          </a:pPr>
-                          <a:r>
-                            <a:rPr lang="es-ES_tradnl" sz="2200" dirty="0">
-                              <a:latin typeface="Gill Sans Nova Light" panose="020B0302020104020203" pitchFamily="34" charset="0"/>
-                            </a:rPr>
-                            <a:t>Kernels</a:t>
-                          </a:r>
-                        </a:p>
-                        <a:p>
-                          <a:endParaRPr lang="es-ES_tradnl" sz="2200" dirty="0">
-                            <a:latin typeface="Gill Sans Nova Light" panose="020B0302020104020203" pitchFamily="34" charset="0"/>
-                          </a:endParaRPr>
-                        </a:p>
-                      </a:txBody>
-                      <a:tcPr anchor="ctr">
-                        <a:lnR w="12700" cap="flat" cmpd="sng" algn="ctr">
-                          <a:solidFill>
-                            <a:schemeClr val="tx1"/>
-                          </a:solidFill>
-                          <a:prstDash val="solid"/>
-                          <a:round/>
-                          <a:headEnd type="none" w="med" len="med"/>
-                          <a:tailEnd type="none" w="med" len="med"/>
-                        </a:lnR>
-                        <a:lnB w="12700" cap="flat" cmpd="sng" algn="ctr">
-                          <a:solidFill>
-                            <a:schemeClr val="tx1"/>
-                          </a:solidFill>
-                          <a:prstDash val="solid"/>
-                          <a:round/>
-                          <a:headEnd type="none" w="med" len="med"/>
-                          <a:tailEnd type="none" w="med" len="med"/>
-                        </a:lnB>
-                      </a:tcPr>
-                    </a:tc>
-                    <a:extLst>
-                      <a:ext uri="{0D108BD9-81ED-4DB2-BD59-A6C34878D82A}">
-                        <a16:rowId xmlns:a16="http://schemas.microsoft.com/office/drawing/2014/main" val="933332684"/>
-                      </a:ext>
-                    </a:extLst>
-                  </a:tr>
-                  <a:tr h="1767840">
-                    <a:tc>
-                      <a:txBody>
-                        <a:bodyPr/>
-                        <a:lstStyle/>
-                        <a:p>
-                          <a:r>
-                            <a:rPr lang="es-ES_tradnl" sz="2200" dirty="0">
-                              <a:latin typeface="Gill Sans Nova Light" panose="020B0302020104020203" pitchFamily="34" charset="0"/>
-                            </a:rPr>
-                            <a:t>Modelos y Predicción</a:t>
-                          </a:r>
-                        </a:p>
-                      </a:txBody>
-                      <a:tcPr anchor="ctr">
-                        <a:lnL w="12700" cap="flat" cmpd="sng" algn="ctr">
-                          <a:solidFill>
-                            <a:schemeClr val="tx1"/>
-                          </a:solidFill>
-                          <a:prstDash val="solid"/>
-                          <a:round/>
-                          <a:headEnd type="none" w="med" len="med"/>
-                          <a:tailEnd type="none" w="med" len="med"/>
-                        </a:lnL>
-                        <a:lnT w="12700" cap="flat" cmpd="sng" algn="ctr">
-                          <a:solidFill>
-                            <a:schemeClr val="tx1"/>
-                          </a:solidFill>
-                          <a:prstDash val="solid"/>
-                          <a:round/>
-                          <a:headEnd type="none" w="med" len="med"/>
-                          <a:tailEnd type="none" w="med" len="med"/>
-                        </a:lnT>
-                        <a:lnB w="12700" cap="flat" cmpd="sng" algn="ctr">
-                          <a:solidFill>
-                            <a:schemeClr val="tx1"/>
-                          </a:solidFill>
-                          <a:prstDash val="solid"/>
-                          <a:round/>
-                          <a:headEnd type="none" w="med" len="med"/>
-                          <a:tailEnd type="none" w="med" len="med"/>
-                        </a:lnB>
-                      </a:tcPr>
-                    </a:tc>
-                    <a:tc>
-                      <a:txBody>
-                        <a:bodyPr/>
-                        <a:lstStyle/>
-                        <a:p>
-                          <a:pPr marL="0" marR="0" lvl="0" indent="0" algn="l" defTabSz="914400" rtl="0" eaLnBrk="1" fontAlgn="auto" latinLnBrk="0" hangingPunct="1">
-                            <a:lnSpc>
-                              <a:spcPct val="100000"/>
-                            </a:lnSpc>
-                            <a:spcBef>
-                              <a:spcPts val="0"/>
-                            </a:spcBef>
-                            <a:spcAft>
-                              <a:spcPts val="0"/>
-                            </a:spcAft>
-                            <a:buClrTx/>
-                            <a:buSzTx/>
-                            <a:buFontTx/>
-                            <a:buNone/>
-                            <a:tabLst/>
-                            <a:defRPr/>
-                          </a:pPr>
-                          <a:r>
-                            <a:rPr lang="es-ES_tradnl" sz="2200" dirty="0">
-                              <a:latin typeface="Gill Sans Nova Light" panose="020B0302020104020203" pitchFamily="34" charset="0"/>
-                            </a:rPr>
-                            <a:t>Aprendizaje Supervisado</a:t>
-                          </a:r>
-                        </a:p>
-                        <a:p>
-                          <a:endParaRPr lang="es-ES_tradnl" sz="2200" dirty="0">
-                            <a:latin typeface="Gill Sans Nova Light" panose="020B0302020104020203" pitchFamily="34" charset="0"/>
-                          </a:endParaRPr>
-                        </a:p>
-                      </a:txBody>
-                      <a:tcPr anchor="ctr">
-                        <a:lnT w="12700" cap="flat" cmpd="sng" algn="ctr">
-                          <a:solidFill>
-                            <a:schemeClr val="tx1"/>
-                          </a:solidFill>
-                          <a:prstDash val="solid"/>
-                          <a:round/>
-                          <a:headEnd type="none" w="med" len="med"/>
-                          <a:tailEnd type="none" w="med" len="med"/>
-                        </a:lnT>
-                        <a:lnB w="12700" cap="flat" cmpd="sng" algn="ctr">
-                          <a:solidFill>
-                            <a:schemeClr val="tx1"/>
-                          </a:solidFill>
-                          <a:prstDash val="solid"/>
-                          <a:round/>
-                          <a:headEnd type="none" w="med" len="med"/>
-                          <a:tailEnd type="none" w="med" len="med"/>
-                        </a:lnB>
-                      </a:tcPr>
-                    </a:tc>
-                    <a:tc>
-                      <a:txBody>
-                        <a:bodyPr/>
-                        <a:lstStyle/>
-                        <a:p>
-                          <a:endParaRPr lang="en-US"/>
-                        </a:p>
-                      </a:txBody>
-                      <a:tcPr anchor="ctr">
-                        <a:lnT w="12700" cap="flat" cmpd="sng" algn="ctr">
-                          <a:solidFill>
-                            <a:schemeClr val="tx1"/>
-                          </a:solidFill>
-                          <a:prstDash val="solid"/>
-                          <a:round/>
-                          <a:headEnd type="none" w="med" len="med"/>
-                          <a:tailEnd type="none" w="med" len="med"/>
-                        </a:lnT>
-                        <a:lnB w="12700" cap="flat" cmpd="sng" algn="ctr">
-                          <a:solidFill>
-                            <a:schemeClr val="tx1"/>
-                          </a:solidFill>
-                          <a:prstDash val="solid"/>
-                          <a:round/>
-                          <a:headEnd type="none" w="med" len="med"/>
-                          <a:tailEnd type="none" w="med" len="med"/>
-                        </a:lnB>
-                        <a:blipFill>
-                          <a:blip r:embed="rId2"/>
-                          <a:stretch>
-                            <a:fillRect l="-65783" t="-168571" r="-42651" b="-3571"/>
-                          </a:stretch>
-                        </a:blipFill>
-                      </a:tcPr>
-                    </a:tc>
-                    <a:tc>
-                      <a:txBody>
-                        <a:bodyPr/>
-                        <a:lstStyle/>
-                        <a:p>
-                          <a:pPr marL="285750" indent="-285750">
-                            <a:buFont typeface="Arial" panose="020B0604020202020204" pitchFamily="34" charset="0"/>
-                            <a:buChar char="•"/>
-                          </a:pPr>
-                          <a:r>
-                            <a:rPr lang="es-ES_tradnl" sz="2200" dirty="0">
-                              <a:latin typeface="Gill Sans Nova Light" panose="020B0302020104020203" pitchFamily="34" charset="0"/>
-                            </a:rPr>
-                            <a:t>MCO</a:t>
-                          </a:r>
-                        </a:p>
-                        <a:p>
-                          <a:pPr marL="285750" indent="-285750">
-                            <a:buFont typeface="Arial" panose="020B0604020202020204" pitchFamily="34" charset="0"/>
-                            <a:buChar char="•"/>
-                          </a:pPr>
-                          <a:r>
-                            <a:rPr lang="es-ES_tradnl" sz="2200" dirty="0" err="1">
-                              <a:latin typeface="Gill Sans Nova Light" panose="020B0302020104020203" pitchFamily="34" charset="0"/>
-                            </a:rPr>
-                            <a:t>Logit</a:t>
-                          </a:r>
-                          <a:r>
-                            <a:rPr lang="es-ES_tradnl" sz="2200" dirty="0">
-                              <a:latin typeface="Gill Sans Nova Light" panose="020B0302020104020203" pitchFamily="34" charset="0"/>
-                            </a:rPr>
-                            <a:t>, LDA, QDA, KNN</a:t>
-                          </a:r>
-                        </a:p>
-                        <a:p>
-                          <a:pPr marL="285750" indent="-285750">
-                            <a:buFont typeface="Arial" panose="020B0604020202020204" pitchFamily="34" charset="0"/>
-                            <a:buChar char="•"/>
-                          </a:pPr>
-                          <a:r>
-                            <a:rPr lang="es-ES_tradnl" sz="2200" dirty="0">
-                              <a:latin typeface="Gill Sans Nova Light" panose="020B0302020104020203" pitchFamily="34" charset="0"/>
-                            </a:rPr>
-                            <a:t>Y otros…</a:t>
-                          </a:r>
-                        </a:p>
-                        <a:p>
-                          <a:pPr marL="285750" indent="-285750">
-                            <a:buFont typeface="Arial" panose="020B0604020202020204" pitchFamily="34" charset="0"/>
-                            <a:buChar char="•"/>
-                          </a:pPr>
-                          <a:endParaRPr lang="es-ES_tradnl" sz="2200" dirty="0">
-                            <a:latin typeface="Gill Sans Nova Light" panose="020B0302020104020203" pitchFamily="34" charset="0"/>
-                          </a:endParaRPr>
-                        </a:p>
-                      </a:txBody>
-                      <a:tcPr anchor="ctr">
-                        <a:lnR w="12700" cap="flat" cmpd="sng" algn="ctr">
-                          <a:solidFill>
-                            <a:schemeClr val="tx1"/>
-                          </a:solidFill>
-                          <a:prstDash val="solid"/>
-                          <a:round/>
-                          <a:headEnd type="none" w="med" len="med"/>
-                          <a:tailEnd type="none" w="med" len="med"/>
-                        </a:lnR>
-                        <a:lnT w="12700" cap="flat" cmpd="sng" algn="ctr">
-                          <a:solidFill>
-                            <a:schemeClr val="tx1"/>
-                          </a:solidFill>
-                          <a:prstDash val="solid"/>
-                          <a:round/>
-                          <a:headEnd type="none" w="med" len="med"/>
-                          <a:tailEnd type="none" w="med" len="med"/>
-                        </a:lnT>
-                        <a:lnB w="12700" cap="flat" cmpd="sng" algn="ctr">
-                          <a:solidFill>
-                            <a:schemeClr val="tx1"/>
-                          </a:solidFill>
-                          <a:prstDash val="solid"/>
-                          <a:round/>
-                          <a:headEnd type="none" w="med" len="med"/>
-                          <a:tailEnd type="none" w="med" len="med"/>
-                        </a:lnB>
-                      </a:tcPr>
-                    </a:tc>
-                    <a:extLst>
-                      <a:ext uri="{0D108BD9-81ED-4DB2-BD59-A6C34878D82A}">
-                        <a16:rowId xmlns:a16="http://schemas.microsoft.com/office/drawing/2014/main" val="715415779"/>
-                      </a:ext>
-                    </a:extLst>
-                  </a:tr>
-                </a:tbl>
-              </a:graphicData>
-            </a:graphic>
-          </p:graphicFrame>
-        </mc:Fallback>
-      </mc:AlternateContent>
-      <p:sp>
-        <p:nvSpPr>
-          <p:cNvPr id="5" name="Slide Number Placeholder 4">
-            <a:extLst>
-              <a:ext uri="{FF2B5EF4-FFF2-40B4-BE49-F238E27FC236}">
-                <a16:creationId xmlns:a16="http://schemas.microsoft.com/office/drawing/2014/main" id="{D4B742BB-420A-39A8-1250-F8C947C8F619}"/>
-              </a:ext>
-            </a:extLst>
-          </p:cNvPr>
-          <p:cNvSpPr>
-            <a:spLocks noGrp="1"/>
-          </p:cNvSpPr>
-          <p:nvPr>
-            <p:ph type="sldNum" sz="quarter" idx="12"/>
-          </p:nvPr>
-        </p:nvSpPr>
-        <p:spPr/>
-        <p:txBody>
-          <a:bodyPr/>
-          <a:lstStyle/>
-          <a:p>
-            <a:fld id="{278C1CC4-2077-434E-BCF1-5D01C08A9B17}" type="slidenum">
-              <a:rPr lang="en-US" smtClean="0"/>
-              <a:t>4</a:t>
-            </a:fld>
-            <a:endParaRPr lang="en-US"/>
-          </a:p>
-        </p:txBody>
-      </p:sp>
-      <p:sp>
-        <p:nvSpPr>
-          <p:cNvPr id="6" name="Rectangle 5">
-            <a:extLst>
-              <a:ext uri="{FF2B5EF4-FFF2-40B4-BE49-F238E27FC236}">
-                <a16:creationId xmlns:a16="http://schemas.microsoft.com/office/drawing/2014/main" id="{06411E09-9C93-2937-FA98-0414F500111B}"/>
-              </a:ext>
-            </a:extLst>
-          </p:cNvPr>
-          <p:cNvSpPr/>
-          <p:nvPr/>
-        </p:nvSpPr>
-        <p:spPr>
-          <a:xfrm>
-            <a:off x="4058653" y="5727338"/>
-            <a:ext cx="4812631" cy="417095"/>
-          </a:xfrm>
-          <a:prstGeom prst="rect">
-            <a:avLst/>
-          </a:prstGeom>
-          <a:noFill/>
-          <a:ln w="28575">
-            <a:solidFill>
-              <a:srgbClr val="FF0000"/>
-            </a:solidFill>
-          </a:ln>
-        </p:spPr>
-        <p:style>
-          <a:lnRef idx="2">
-            <a:schemeClr val="accent1">
-              <a:shade val="15000"/>
-            </a:schemeClr>
-          </a:lnRef>
-          <a:fillRef idx="1">
-            <a:schemeClr val="accent1"/>
-          </a:fillRef>
-          <a:effectRef idx="0">
-            <a:schemeClr val="accent1"/>
-          </a:effectRef>
-          <a:fontRef idx="minor">
-            <a:schemeClr val="lt1"/>
-          </a:fontRef>
-        </p:style>
-        <p:txBody>
-          <a:bodyPr rtlCol="0" anchor="ctr"/>
-          <a:lstStyle/>
-          <a:p>
-            <a:pPr algn="ctr"/>
-            <a:r>
-              <a:rPr lang="es-ES_tradnl" dirty="0"/>
-              <a:t>x</a:t>
-            </a:r>
-          </a:p>
-        </p:txBody>
-      </p:sp>
-      <p:sp>
-        <p:nvSpPr>
-          <p:cNvPr id="3" name="Rectangle 2">
-            <a:extLst>
-              <a:ext uri="{FF2B5EF4-FFF2-40B4-BE49-F238E27FC236}">
-                <a16:creationId xmlns:a16="http://schemas.microsoft.com/office/drawing/2014/main" id="{7151059B-F693-3AB2-5ECB-B9BC8A48F24B}"/>
-              </a:ext>
-            </a:extLst>
-          </p:cNvPr>
-          <p:cNvSpPr/>
-          <p:nvPr/>
-        </p:nvSpPr>
-        <p:spPr>
-          <a:xfrm>
-            <a:off x="9648281" y="4812184"/>
-            <a:ext cx="1535534" cy="691801"/>
-          </a:xfrm>
-          <a:prstGeom prst="rect">
-            <a:avLst/>
-          </a:prstGeom>
-          <a:noFill/>
-          <a:ln w="28575">
-            <a:solidFill>
-              <a:srgbClr val="FF0000"/>
-            </a:solidFill>
-          </a:ln>
-        </p:spPr>
-        <p:style>
-          <a:lnRef idx="2">
-            <a:schemeClr val="accent1">
-              <a:shade val="15000"/>
-            </a:schemeClr>
-          </a:lnRef>
-          <a:fillRef idx="1">
-            <a:schemeClr val="accent1"/>
-          </a:fillRef>
-          <a:effectRef idx="0">
-            <a:schemeClr val="accent1"/>
-          </a:effectRef>
-          <a:fontRef idx="minor">
-            <a:schemeClr val="lt1"/>
-          </a:fontRef>
-        </p:style>
-        <p:txBody>
-          <a:bodyPr rtlCol="0" anchor="ctr"/>
-          <a:lstStyle/>
-          <a:p>
-            <a:pPr algn="ctr"/>
-            <a:endParaRPr lang="es-ES_tradnl"/>
-          </a:p>
-        </p:txBody>
-      </p:sp>
-    </p:spTree>
-    <p:extLst>
-      <p:ext uri="{BB962C8B-B14F-4D97-AF65-F5344CB8AC3E}">
-        <p14:creationId xmlns:p14="http://schemas.microsoft.com/office/powerpoint/2010/main" val="3894729846"/>
-      </p:ext>
-    </p:extLst>
-  </p:cSld>
-  <p:clrMapOvr>
-    <a:masterClrMapping/>
-  </p:clrMapOvr>
-  <p:timing>
-    <p:tnLst>
-      <p:par>
-        <p:cTn id="1" dur="indefinite" restart="never" nodeType="tmRoot">
-          <p:childTnLst>
-            <p:seq concurrent="1" nextAc="seek">
-              <p:cTn id="2" dur="indefinite" nodeType="mainSeq">
-                <p:childTnLst>
-                  <p:par>
-                    <p:cTn id="3" fill="hold">
-                      <p:stCondLst>
-                        <p:cond delay="indefinite"/>
-                      </p:stCondLst>
-                      <p:childTnLst>
-                        <p:par>
-                          <p:cTn id="4" fill="hold">
-                            <p:stCondLst>
-                              <p:cond delay="0"/>
-                            </p:stCondLst>
-                            <p:childTnLst>
-                              <p:par>
-                                <p:cTn id="5" presetID="1" presetClass="entr" presetSubtype="0" fill="hold" grpId="0" nodeType="clickEffect">
-                                  <p:stCondLst>
-                                    <p:cond delay="0"/>
-                                  </p:stCondLst>
-                                  <p:childTnLst>
-                                    <p:set>
-                                      <p:cBhvr>
-                                        <p:cTn id="6" dur="1" fill="hold">
-                                          <p:stCondLst>
-                                            <p:cond delay="0"/>
-                                          </p:stCondLst>
-                                        </p:cTn>
-                                        <p:tgtEl>
-                                          <p:spTgt spid="6"/>
-                                        </p:tgtEl>
-                                        <p:attrNameLst>
-                                          <p:attrName>style.visibility</p:attrName>
-                                        </p:attrNameLst>
-                                      </p:cBhvr>
-                                      <p:to>
-                                        <p:strVal val="visible"/>
-                                      </p:to>
-                                    </p:set>
-                                  </p:childTnLst>
-                                </p:cTn>
-                              </p:par>
-                            </p:childTnLst>
-                          </p:cTn>
-                        </p:par>
-                      </p:childTnLst>
-                    </p:cTn>
-                  </p:par>
-                  <p:par>
-                    <p:cTn id="7" fill="hold">
-                      <p:stCondLst>
-                        <p:cond delay="indefinite"/>
-                      </p:stCondLst>
-                      <p:childTnLst>
-                        <p:par>
-                          <p:cTn id="8" fill="hold">
-                            <p:stCondLst>
-                              <p:cond delay="0"/>
-                            </p:stCondLst>
-                            <p:childTnLst>
-                              <p:par>
-                                <p:cTn id="9" presetID="1" presetClass="entr" presetSubtype="0" fill="hold" grpId="0" nodeType="clickEffect">
-                                  <p:stCondLst>
-                                    <p:cond delay="0"/>
-                                  </p:stCondLst>
-                                  <p:childTnLst>
-                                    <p:set>
-                                      <p:cBhvr>
-                                        <p:cTn id="10" dur="1" fill="hold">
-                                          <p:stCondLst>
-                                            <p:cond delay="0"/>
-                                          </p:stCondLst>
-                                        </p:cTn>
-                                        <p:tgtEl>
-                                          <p:spTgt spid="3"/>
-                                        </p:tgtEl>
-                                        <p:attrNameLst>
-                                          <p:attrName>style.visibility</p:attrName>
-                                        </p:attrNameLst>
-                                      </p:cBhvr>
-                                      <p:to>
-                                        <p:strVal val="visible"/>
-                                      </p:to>
-                                    </p:set>
-                                  </p:childTnLst>
-                                </p:cTn>
-                              </p:par>
-                            </p:childTnLst>
-                          </p:cTn>
-                        </p:par>
-                      </p:childTnLst>
-                    </p:cTn>
-                  </p:par>
-                </p:childTnLst>
-              </p:cTn>
-              <p:prevCondLst>
-                <p:cond evt="onPrev" delay="0">
-                  <p:tgtEl>
-                    <p:sldTgt/>
-                  </p:tgtEl>
-                </p:cond>
-              </p:prevCondLst>
-              <p:nextCondLst>
-                <p:cond evt="onNext" delay="0">
-                  <p:tgtEl>
-                    <p:sldTgt/>
-                  </p:tgtEl>
-                </p:cond>
-              </p:nextCondLst>
-            </p:seq>
-          </p:childTnLst>
-        </p:cTn>
-      </p:par>
-    </p:tnLst>
-    <p:bldLst>
-      <p:bldP spid="6" grpId="0" animBg="1"/>
-      <p:bldP spid="3" grpId="0" animBg="1"/>
-    </p:bldLst>
-  </p:timing>
-</p:sld>
-</file>
-
-<file path=ppt/slides/slide40.xml><?xml version="1.0" encoding="utf-8"?>
+<file path=ppt/slides/slide41.xml><?xml version="1.0" encoding="utf-8"?>
 <p:sld xmlns:a="http://schemas.openxmlformats.org/drawingml/2006/main" xmlns:r="http://schemas.openxmlformats.org/officeDocument/2006/relationships" xmlns:p="http://schemas.openxmlformats.org/presentationml/2006/main">
   <p:cSld>
     <p:spTree>
@@ -32426,7 +32766,7 @@
           <a:p>
             <a:fld id="{278C1CC4-2077-434E-BCF1-5D01C08A9B17}" type="slidenum">
               <a:rPr lang="en-US" smtClean="0"/>
-              <a:t>40</a:t>
+              <a:t>41</a:t>
             </a:fld>
             <a:endParaRPr lang="en-US"/>
           </a:p>
@@ -32445,7 +32785,7 @@
 </p:sld>
 </file>
 
-<file path=ppt/slides/slide41.xml><?xml version="1.0" encoding="utf-8"?>
+<file path=ppt/slides/slide42.xml><?xml version="1.0" encoding="utf-8"?>
 <p:sld xmlns:a="http://schemas.openxmlformats.org/drawingml/2006/main" xmlns:r="http://schemas.openxmlformats.org/officeDocument/2006/relationships" xmlns:p="http://schemas.openxmlformats.org/presentationml/2006/main">
   <p:cSld>
     <p:spTree>
@@ -32934,7 +33274,7 @@
           <a:p>
             <a:fld id="{278C1CC4-2077-434E-BCF1-5D01C08A9B17}" type="slidenum">
               <a:rPr lang="en-US" smtClean="0"/>
-              <a:t>41</a:t>
+              <a:t>42</a:t>
             </a:fld>
             <a:endParaRPr lang="en-US"/>
           </a:p>
@@ -33299,7 +33639,7 @@
 </p:sld>
 </file>
 
-<file path=ppt/slides/slide42.xml><?xml version="1.0" encoding="utf-8"?>
+<file path=ppt/slides/slide43.xml><?xml version="1.0" encoding="utf-8"?>
 <p:sld xmlns:a="http://schemas.openxmlformats.org/drawingml/2006/main" xmlns:r="http://schemas.openxmlformats.org/officeDocument/2006/relationships" xmlns:p="http://schemas.openxmlformats.org/presentationml/2006/main">
   <p:cSld>
     <p:spTree>
@@ -33667,7 +34007,7 @@
           <a:p>
             <a:fld id="{278C1CC4-2077-434E-BCF1-5D01C08A9B17}" type="slidenum">
               <a:rPr lang="en-US" smtClean="0"/>
-              <a:t>42</a:t>
+              <a:t>43</a:t>
             </a:fld>
             <a:endParaRPr lang="en-US"/>
           </a:p>
@@ -33957,7 +34297,7 @@
 </p:sld>
 </file>
 
-<file path=ppt/slides/slide43.xml><?xml version="1.0" encoding="utf-8"?>
+<file path=ppt/slides/slide44.xml><?xml version="1.0" encoding="utf-8"?>
 <p:sld xmlns:a="http://schemas.openxmlformats.org/drawingml/2006/main" xmlns:r="http://schemas.openxmlformats.org/officeDocument/2006/relationships" xmlns:p="http://schemas.openxmlformats.org/presentationml/2006/main">
   <p:cSld>
     <p:spTree>
@@ -34469,7 +34809,7 @@
           <a:p>
             <a:fld id="{278C1CC4-2077-434E-BCF1-5D01C08A9B17}" type="slidenum">
               <a:rPr lang="en-US" smtClean="0"/>
-              <a:t>43</a:t>
+              <a:t>44</a:t>
             </a:fld>
             <a:endParaRPr lang="en-US"/>
           </a:p>
@@ -34828,7 +35168,7 @@
 </p:sld>
 </file>
 
-<file path=ppt/slides/slide44.xml><?xml version="1.0" encoding="utf-8"?>
+<file path=ppt/slides/slide45.xml><?xml version="1.0" encoding="utf-8"?>
 <p:sld xmlns:a="http://schemas.openxmlformats.org/drawingml/2006/main" xmlns:r="http://schemas.openxmlformats.org/officeDocument/2006/relationships" xmlns:p="http://schemas.openxmlformats.org/presentationml/2006/main">
   <p:cSld>
     <p:spTree>
@@ -35113,7 +35453,7 @@
           <a:p>
             <a:fld id="{278C1CC4-2077-434E-BCF1-5D01C08A9B17}" type="slidenum">
               <a:rPr lang="en-US" smtClean="0"/>
-              <a:t>44</a:t>
+              <a:t>45</a:t>
             </a:fld>
             <a:endParaRPr lang="en-US"/>
           </a:p>
@@ -35132,7 +35472,7 @@
 </p:sld>
 </file>
 
-<file path=ppt/slides/slide45.xml><?xml version="1.0" encoding="utf-8"?>
+<file path=ppt/slides/slide46.xml><?xml version="1.0" encoding="utf-8"?>
 <p:sld xmlns:a="http://schemas.openxmlformats.org/drawingml/2006/main" xmlns:r="http://schemas.openxmlformats.org/officeDocument/2006/relationships" xmlns:p="http://schemas.openxmlformats.org/presentationml/2006/main">
   <p:cSld>
     <p:spTree>
@@ -35515,7 +35855,7 @@
           <a:p>
             <a:fld id="{278C1CC4-2077-434E-BCF1-5D01C08A9B17}" type="slidenum">
               <a:rPr lang="en-US" smtClean="0"/>
-              <a:t>45</a:t>
+              <a:t>46</a:t>
             </a:fld>
             <a:endParaRPr lang="en-US"/>
           </a:p>
@@ -35534,7 +35874,7 @@
 </p:sld>
 </file>
 
-<file path=ppt/slides/slide46.xml><?xml version="1.0" encoding="utf-8"?>
+<file path=ppt/slides/slide47.xml><?xml version="1.0" encoding="utf-8"?>
 <p:sld xmlns:a="http://schemas.openxmlformats.org/drawingml/2006/main" xmlns:r="http://schemas.openxmlformats.org/officeDocument/2006/relationships" xmlns:p="http://schemas.openxmlformats.org/presentationml/2006/main">
   <p:cSld>
     <p:spTree>
@@ -35673,7 +36013,7 @@
           <a:p>
             <a:fld id="{278C1CC4-2077-434E-BCF1-5D01C08A9B17}" type="slidenum">
               <a:rPr lang="en-US" smtClean="0"/>
-              <a:t>46</a:t>
+              <a:t>47</a:t>
             </a:fld>
             <a:endParaRPr lang="en-US"/>
           </a:p>
@@ -35692,7 +36032,7 @@
 </p:sld>
 </file>
 
-<file path=ppt/slides/slide47.xml><?xml version="1.0" encoding="utf-8"?>
+<file path=ppt/slides/slide48.xml><?xml version="1.0" encoding="utf-8"?>
 <p:sld xmlns:a="http://schemas.openxmlformats.org/drawingml/2006/main" xmlns:r="http://schemas.openxmlformats.org/officeDocument/2006/relationships" xmlns:p="http://schemas.openxmlformats.org/presentationml/2006/main">
   <p:cSld>
     <p:spTree>
@@ -35813,7 +36153,7 @@
           <a:p>
             <a:fld id="{278C1CC4-2077-434E-BCF1-5D01C08A9B17}" type="slidenum">
               <a:rPr lang="en-US" smtClean="0"/>
-              <a:t>47</a:t>
+              <a:t>48</a:t>
             </a:fld>
             <a:endParaRPr lang="en-US"/>
           </a:p>
@@ -35861,7 +36201,7 @@
 </p:sld>
 </file>
 
-<file path=ppt/slides/slide48.xml><?xml version="1.0" encoding="utf-8"?>
+<file path=ppt/slides/slide49.xml><?xml version="1.0" encoding="utf-8"?>
 <p:sld xmlns:a="http://schemas.openxmlformats.org/drawingml/2006/main" xmlns:r="http://schemas.openxmlformats.org/officeDocument/2006/relationships" xmlns:p="http://schemas.openxmlformats.org/presentationml/2006/main">
   <p:cSld>
     <p:spTree>
@@ -35983,7 +36323,7 @@
           <a:p>
             <a:fld id="{278C1CC4-2077-434E-BCF1-5D01C08A9B17}" type="slidenum">
               <a:rPr lang="en-US" smtClean="0"/>
-              <a:t>48</a:t>
+              <a:t>49</a:t>
             </a:fld>
             <a:endParaRPr lang="en-US"/>
           </a:p>
@@ -36022,121 +36362,6 @@
     <p:extLst>
       <p:ext uri="{BB962C8B-B14F-4D97-AF65-F5344CB8AC3E}">
         <p14:creationId xmlns:p14="http://schemas.microsoft.com/office/powerpoint/2010/main" val="402846416"/>
-      </p:ext>
-    </p:extLst>
-  </p:cSld>
-  <p:clrMapOvr>
-    <a:masterClrMapping/>
-  </p:clrMapOvr>
-</p:sld>
-</file>
-
-<file path=ppt/slides/slide49.xml><?xml version="1.0" encoding="utf-8"?>
-<p:sld xmlns:a="http://schemas.openxmlformats.org/drawingml/2006/main" xmlns:r="http://schemas.openxmlformats.org/officeDocument/2006/relationships" xmlns:p="http://schemas.openxmlformats.org/presentationml/2006/main">
-  <p:cSld>
-    <p:spTree>
-      <p:nvGrpSpPr>
-        <p:cNvPr id="1" name=""/>
-        <p:cNvGrpSpPr/>
-        <p:nvPr/>
-      </p:nvGrpSpPr>
-      <p:grpSpPr>
-        <a:xfrm>
-          <a:off x="0" y="0"/>
-          <a:ext cx="0" cy="0"/>
-          <a:chOff x="0" y="0"/>
-          <a:chExt cx="0" cy="0"/>
-        </a:xfrm>
-      </p:grpSpPr>
-      <p:sp>
-        <p:nvSpPr>
-          <p:cNvPr id="2" name="Title 1">
-            <a:extLst>
-              <a:ext uri="{FF2B5EF4-FFF2-40B4-BE49-F238E27FC236}">
-                <a16:creationId xmlns:a16="http://schemas.microsoft.com/office/drawing/2014/main" id="{B9E357CD-60DB-7599-DBBF-E7E34F55F067}"/>
-              </a:ext>
-            </a:extLst>
-          </p:cNvPr>
-          <p:cNvSpPr>
-            <a:spLocks noGrp="1"/>
-          </p:cNvSpPr>
-          <p:nvPr>
-            <p:ph type="title"/>
-          </p:nvPr>
-        </p:nvSpPr>
-        <p:spPr/>
-        <p:txBody>
-          <a:bodyPr/>
-          <a:lstStyle/>
-          <a:p>
-            <a:r>
-              <a:rPr lang="es-ES_tradnl" dirty="0"/>
-              <a:t>Conclusiones finales</a:t>
-            </a:r>
-          </a:p>
-        </p:txBody>
-      </p:sp>
-      <p:sp>
-        <p:nvSpPr>
-          <p:cNvPr id="4" name="Text Placeholder 3">
-            <a:extLst>
-              <a:ext uri="{FF2B5EF4-FFF2-40B4-BE49-F238E27FC236}">
-                <a16:creationId xmlns:a16="http://schemas.microsoft.com/office/drawing/2014/main" id="{808E002C-8C25-F567-04EE-6365B0376417}"/>
-              </a:ext>
-            </a:extLst>
-          </p:cNvPr>
-          <p:cNvSpPr>
-            <a:spLocks noGrp="1"/>
-          </p:cNvSpPr>
-          <p:nvPr>
-            <p:ph type="body" idx="1"/>
-          </p:nvPr>
-        </p:nvSpPr>
-        <p:spPr/>
-        <p:txBody>
-          <a:bodyPr/>
-          <a:lstStyle/>
-          <a:p>
-            <a:r>
-              <a:rPr lang="es-ES_tradnl" dirty="0"/>
-              <a:t>¿Qué aprendimos hoy?</a:t>
-            </a:r>
-          </a:p>
-        </p:txBody>
-      </p:sp>
-      <p:sp>
-        <p:nvSpPr>
-          <p:cNvPr id="3" name="Slide Number Placeholder 2">
-            <a:extLst>
-              <a:ext uri="{FF2B5EF4-FFF2-40B4-BE49-F238E27FC236}">
-                <a16:creationId xmlns:a16="http://schemas.microsoft.com/office/drawing/2014/main" id="{1A580811-4E8A-0CFA-2D7A-CC97B0990DF8}"/>
-              </a:ext>
-            </a:extLst>
-          </p:cNvPr>
-          <p:cNvSpPr>
-            <a:spLocks noGrp="1"/>
-          </p:cNvSpPr>
-          <p:nvPr>
-            <p:ph type="sldNum" sz="quarter" idx="12"/>
-          </p:nvPr>
-        </p:nvSpPr>
-        <p:spPr/>
-        <p:txBody>
-          <a:bodyPr/>
-          <a:lstStyle/>
-          <a:p>
-            <a:fld id="{278C1CC4-2077-434E-BCF1-5D01C08A9B17}" type="slidenum">
-              <a:rPr lang="en-US" smtClean="0"/>
-              <a:t>49</a:t>
-            </a:fld>
-            <a:endParaRPr lang="en-US"/>
-          </a:p>
-        </p:txBody>
-      </p:sp>
-    </p:spTree>
-    <p:extLst>
-      <p:ext uri="{BB962C8B-B14F-4D97-AF65-F5344CB8AC3E}">
-        <p14:creationId xmlns:p14="http://schemas.microsoft.com/office/powerpoint/2010/main" val="1583056128"/>
       </p:ext>
     </p:extLst>
   </p:cSld>
@@ -36264,6 +36489,121 @@
 </file>
 
 <file path=ppt/slides/slide50.xml><?xml version="1.0" encoding="utf-8"?>
+<p:sld xmlns:a="http://schemas.openxmlformats.org/drawingml/2006/main" xmlns:r="http://schemas.openxmlformats.org/officeDocument/2006/relationships" xmlns:p="http://schemas.openxmlformats.org/presentationml/2006/main">
+  <p:cSld>
+    <p:spTree>
+      <p:nvGrpSpPr>
+        <p:cNvPr id="1" name=""/>
+        <p:cNvGrpSpPr/>
+        <p:nvPr/>
+      </p:nvGrpSpPr>
+      <p:grpSpPr>
+        <a:xfrm>
+          <a:off x="0" y="0"/>
+          <a:ext cx="0" cy="0"/>
+          <a:chOff x="0" y="0"/>
+          <a:chExt cx="0" cy="0"/>
+        </a:xfrm>
+      </p:grpSpPr>
+      <p:sp>
+        <p:nvSpPr>
+          <p:cNvPr id="2" name="Title 1">
+            <a:extLst>
+              <a:ext uri="{FF2B5EF4-FFF2-40B4-BE49-F238E27FC236}">
+                <a16:creationId xmlns:a16="http://schemas.microsoft.com/office/drawing/2014/main" id="{B9E357CD-60DB-7599-DBBF-E7E34F55F067}"/>
+              </a:ext>
+            </a:extLst>
+          </p:cNvPr>
+          <p:cNvSpPr>
+            <a:spLocks noGrp="1"/>
+          </p:cNvSpPr>
+          <p:nvPr>
+            <p:ph type="title"/>
+          </p:nvPr>
+        </p:nvSpPr>
+        <p:spPr/>
+        <p:txBody>
+          <a:bodyPr/>
+          <a:lstStyle/>
+          <a:p>
+            <a:r>
+              <a:rPr lang="es-ES_tradnl" dirty="0"/>
+              <a:t>Conclusiones finales</a:t>
+            </a:r>
+          </a:p>
+        </p:txBody>
+      </p:sp>
+      <p:sp>
+        <p:nvSpPr>
+          <p:cNvPr id="4" name="Text Placeholder 3">
+            <a:extLst>
+              <a:ext uri="{FF2B5EF4-FFF2-40B4-BE49-F238E27FC236}">
+                <a16:creationId xmlns:a16="http://schemas.microsoft.com/office/drawing/2014/main" id="{808E002C-8C25-F567-04EE-6365B0376417}"/>
+              </a:ext>
+            </a:extLst>
+          </p:cNvPr>
+          <p:cNvSpPr>
+            <a:spLocks noGrp="1"/>
+          </p:cNvSpPr>
+          <p:nvPr>
+            <p:ph type="body" idx="1"/>
+          </p:nvPr>
+        </p:nvSpPr>
+        <p:spPr/>
+        <p:txBody>
+          <a:bodyPr/>
+          <a:lstStyle/>
+          <a:p>
+            <a:r>
+              <a:rPr lang="es-ES_tradnl" dirty="0"/>
+              <a:t>¿Qué aprendimos hoy?</a:t>
+            </a:r>
+          </a:p>
+        </p:txBody>
+      </p:sp>
+      <p:sp>
+        <p:nvSpPr>
+          <p:cNvPr id="3" name="Slide Number Placeholder 2">
+            <a:extLst>
+              <a:ext uri="{FF2B5EF4-FFF2-40B4-BE49-F238E27FC236}">
+                <a16:creationId xmlns:a16="http://schemas.microsoft.com/office/drawing/2014/main" id="{1A580811-4E8A-0CFA-2D7A-CC97B0990DF8}"/>
+              </a:ext>
+            </a:extLst>
+          </p:cNvPr>
+          <p:cNvSpPr>
+            <a:spLocks noGrp="1"/>
+          </p:cNvSpPr>
+          <p:nvPr>
+            <p:ph type="sldNum" sz="quarter" idx="12"/>
+          </p:nvPr>
+        </p:nvSpPr>
+        <p:spPr/>
+        <p:txBody>
+          <a:bodyPr/>
+          <a:lstStyle/>
+          <a:p>
+            <a:fld id="{278C1CC4-2077-434E-BCF1-5D01C08A9B17}" type="slidenum">
+              <a:rPr lang="en-US" smtClean="0"/>
+              <a:t>50</a:t>
+            </a:fld>
+            <a:endParaRPr lang="en-US"/>
+          </a:p>
+        </p:txBody>
+      </p:sp>
+    </p:spTree>
+    <p:extLst>
+      <p:ext uri="{BB962C8B-B14F-4D97-AF65-F5344CB8AC3E}">
+        <p14:creationId xmlns:p14="http://schemas.microsoft.com/office/powerpoint/2010/main" val="1583056128"/>
+      </p:ext>
+    </p:extLst>
+  </p:cSld>
+  <p:clrMapOvr>
+    <a:masterClrMapping/>
+  </p:clrMapOvr>
+</p:sld>
+</file>
+
+<file path=ppt/slides/slide51.xml><?xml version="1.0" encoding="utf-8"?>
 <p:sld xmlns:a="http://schemas.openxmlformats.org/drawingml/2006/main" xmlns:r="http://schemas.openxmlformats.org/officeDocument/2006/relationships" xmlns:p="http://schemas.openxmlformats.org/presentationml/2006/main">
   <p:cSld>
     <p:spTree>
@@ -36512,7 +36852,7 @@
 </p:sld>
 </file>
 
-<file path=ppt/slides/slide51.xml><?xml version="1.0" encoding="utf-8"?>
+<file path=ppt/slides/slide52.xml><?xml version="1.0" encoding="utf-8"?>
 <p:sld xmlns:a="http://schemas.openxmlformats.org/drawingml/2006/main" xmlns:r="http://schemas.openxmlformats.org/officeDocument/2006/relationships" xmlns:p="http://schemas.openxmlformats.org/presentationml/2006/main">
   <p:cSld>
     <p:spTree>
@@ -36696,7 +37036,7 @@
           <a:p>
             <a:fld id="{278C1CC4-2077-434E-BCF1-5D01C08A9B17}" type="slidenum">
               <a:rPr lang="en-US" smtClean="0"/>
-              <a:t>51</a:t>
+              <a:t>52</a:t>
             </a:fld>
             <a:endParaRPr lang="en-US"/>
           </a:p>
@@ -36715,7 +37055,7 @@
 </p:sld>
 </file>
 
-<file path=ppt/slides/slide52.xml><?xml version="1.0" encoding="utf-8"?>
+<file path=ppt/slides/slide53.xml><?xml version="1.0" encoding="utf-8"?>
 <p:sld xmlns:a="http://schemas.openxmlformats.org/drawingml/2006/main" xmlns:r="http://schemas.openxmlformats.org/officeDocument/2006/relationships" xmlns:p="http://schemas.openxmlformats.org/presentationml/2006/main">
   <p:cSld>
     <p:spTree>
@@ -36823,7 +37163,7 @@
           <a:p>
             <a:fld id="{278C1CC4-2077-434E-BCF1-5D01C08A9B17}" type="slidenum">
               <a:rPr lang="en-US" smtClean="0"/>
-              <a:t>52</a:t>
+              <a:t>53</a:t>
             </a:fld>
             <a:endParaRPr lang="en-US"/>
           </a:p>
